--- a/docs/VeriBeca-Pitch.pptx
+++ b/docs/VeriBeca-Pitch.pptx
@@ -3113,8 +3113,8 @@
         </p:nvSpPr>
         <p:spPr>
           <a:xfrm>
-            <a:off x="0" y="2788920"/>
-            <a:ext cx="12191695" cy="73152"/>
+            <a:off x="0" y="0"/>
+            <a:ext cx="12191695" cy="320040"/>
           </a:xfrm>
           <a:prstGeom prst="rect">
             <a:avLst/>
@@ -3125,6 +3125,7 @@
           <a:ln>
             <a:noFill/>
           </a:ln>
+          <a:effectLst/>
         </p:spPr>
         <p:style>
           <a:lnRef idx="1">
@@ -3150,14 +3151,58 @@
       </p:sp>
       <p:sp>
         <p:nvSpPr>
-          <p:cNvPr id="3" name="TextBox 2"/>
+          <p:cNvPr id="3" name="Rectangle 2"/>
+          <p:cNvSpPr/>
+          <p:nvPr/>
+        </p:nvSpPr>
+        <p:spPr>
+          <a:xfrm>
+            <a:off x="0" y="6537960"/>
+            <a:ext cx="12191695" cy="320040"/>
+          </a:xfrm>
+          <a:prstGeom prst="rect">
+            <a:avLst/>
+          </a:prstGeom>
+          <a:solidFill>
+            <a:srgbClr val="149E8F"/>
+          </a:solidFill>
+          <a:ln>
+            <a:noFill/>
+          </a:ln>
+          <a:effectLst/>
+        </p:spPr>
+        <p:style>
+          <a:lnRef idx="1">
+            <a:schemeClr val="accent1"/>
+          </a:lnRef>
+          <a:fillRef idx="3">
+            <a:schemeClr val="accent1"/>
+          </a:fillRef>
+          <a:effectRef idx="2">
+            <a:schemeClr val="accent1"/>
+          </a:effectRef>
+          <a:fontRef idx="minor">
+            <a:schemeClr val="lt1"/>
+          </a:fontRef>
+        </p:style>
+        <p:txBody>
+          <a:bodyPr rtlCol="0" anchor="ctr"/>
+          <a:lstStyle/>
+          <a:p>
+            <a:pPr algn="ctr"/>
+          </a:p>
+        </p:txBody>
+      </p:sp>
+      <p:sp>
+        <p:nvSpPr>
+          <p:cNvPr id="4" name="TextBox 3"/>
           <p:cNvSpPr txBox="1"/>
           <p:nvPr/>
         </p:nvSpPr>
         <p:spPr>
           <a:xfrm>
-            <a:off x="914400" y="1828800"/>
-            <a:ext cx="10332720" cy="1097280"/>
+            <a:off x="914400" y="2057400"/>
+            <a:ext cx="10332720" cy="1280160"/>
           </a:xfrm>
           <a:prstGeom prst="rect">
             <a:avLst/>
@@ -3165,14 +3210,18 @@
           <a:noFill/>
         </p:spPr>
         <p:txBody>
-          <a:bodyPr wrap="square">
+          <a:bodyPr wrap="square" anchor="t">
             <a:spAutoFit/>
           </a:bodyPr>
           <a:lstStyle/>
           <a:p>
-            <a:pPr algn="l"/>
-            <a:r>
-              <a:rPr sz="5400" b="1">
+            <a:pPr algn="l">
+              <a:spcAft>
+                <a:spcPts val="1000"/>
+              </a:spcAft>
+            </a:pPr>
+            <a:r>
+              <a:rPr sz="6400" b="1">
                 <a:solidFill>
                   <a:srgbClr val="FFFFFF"/>
                 </a:solidFill>
@@ -3185,14 +3234,14 @@
       </p:sp>
       <p:sp>
         <p:nvSpPr>
-          <p:cNvPr id="4" name="TextBox 3"/>
+          <p:cNvPr id="5" name="TextBox 4"/>
           <p:cNvSpPr txBox="1"/>
           <p:nvPr/>
         </p:nvSpPr>
         <p:spPr>
           <a:xfrm>
-            <a:off x="914400" y="2971800"/>
-            <a:ext cx="10332720" cy="914400"/>
+            <a:off x="960120" y="3429000"/>
+            <a:ext cx="10332720" cy="640080"/>
           </a:xfrm>
           <a:prstGeom prst="rect">
             <a:avLst/>
@@ -3200,34 +3249,38 @@
           <a:noFill/>
         </p:spPr>
         <p:txBody>
-          <a:bodyPr wrap="square">
+          <a:bodyPr wrap="square" anchor="t">
             <a:spAutoFit/>
           </a:bodyPr>
           <a:lstStyle/>
           <a:p>
-            <a:pPr algn="l"/>
-            <a:r>
-              <a:rPr sz="2400" b="0">
+            <a:pPr algn="l">
+              <a:spcAft>
+                <a:spcPts val="1000"/>
+              </a:spcAft>
+            </a:pPr>
+            <a:r>
+              <a:rPr sz="2400" b="1">
                 <a:solidFill>
                   <a:srgbClr val="149E8F"/>
                 </a:solidFill>
                 <a:latin typeface="Calibri"/>
               </a:rPr>
-              <a:t>Asignación transparente de becas · DSL tipado + IA + Blockchain</a:t>
-            </a:r>
-          </a:p>
-        </p:txBody>
-      </p:sp>
-      <p:sp>
-        <p:nvSpPr>
-          <p:cNvPr id="5" name="TextBox 4"/>
+              <a:t>Asignación transparente de becas y ayudas sociales</a:t>
+            </a:r>
+          </a:p>
+        </p:txBody>
+      </p:sp>
+      <p:sp>
+        <p:nvSpPr>
+          <p:cNvPr id="6" name="TextBox 5"/>
           <p:cNvSpPr txBox="1"/>
           <p:nvPr/>
         </p:nvSpPr>
         <p:spPr>
           <a:xfrm>
-            <a:off x="914400" y="5852160"/>
-            <a:ext cx="10332720" cy="640080"/>
+            <a:off x="960120" y="4114800"/>
+            <a:ext cx="10332720" cy="548640"/>
           </a:xfrm>
           <a:prstGeom prst="rect">
             <a:avLst/>
@@ -3235,20 +3288,79 @@
           <a:noFill/>
         </p:spPr>
         <p:txBody>
-          <a:bodyPr wrap="square">
+          <a:bodyPr wrap="square" anchor="t">
             <a:spAutoFit/>
           </a:bodyPr>
           <a:lstStyle/>
           <a:p>
-            <a:pPr algn="l"/>
-            <a:r>
-              <a:rPr sz="1500" b="0">
+            <a:pPr algn="l">
+              <a:spcAft>
+                <a:spcPts val="1000"/>
+              </a:spcAft>
+            </a:pPr>
+            <a:r>
+              <a:rPr sz="1800" b="0">
                 <a:solidFill>
                   <a:srgbClr val="C9D6DE"/>
                 </a:solidFill>
                 <a:latin typeface="Calibri"/>
               </a:rPr>
-              <a:t>Teoría de Computación 2 · Universidad Champagnat · Equipo de 3 integrantes</a:t>
+              <a:t>DSL tipado  ·  Inteligencia Artificial  ·  Blockchain</a:t>
+            </a:r>
+          </a:p>
+        </p:txBody>
+      </p:sp>
+      <p:sp>
+        <p:nvSpPr>
+          <p:cNvPr id="7" name="TextBox 6"/>
+          <p:cNvSpPr txBox="1"/>
+          <p:nvPr/>
+        </p:nvSpPr>
+        <p:spPr>
+          <a:xfrm>
+            <a:off x="960120" y="5577840"/>
+            <a:ext cx="10332720" cy="822960"/>
+          </a:xfrm>
+          <a:prstGeom prst="rect">
+            <a:avLst/>
+          </a:prstGeom>
+          <a:noFill/>
+        </p:spPr>
+        <p:txBody>
+          <a:bodyPr wrap="square" anchor="t">
+            <a:spAutoFit/>
+          </a:bodyPr>
+          <a:lstStyle/>
+          <a:p>
+            <a:pPr algn="l">
+              <a:spcAft>
+                <a:spcPts val="1000"/>
+              </a:spcAft>
+            </a:pPr>
+            <a:r>
+              <a:rPr sz="1400" b="0">
+                <a:solidFill>
+                  <a:srgbClr val="C9D6DE"/>
+                </a:solidFill>
+                <a:latin typeface="Calibri"/>
+              </a:rPr>
+              <a:t>Teoría de Computación 2 · Universidad Champagnat</a:t>
+            </a:r>
+          </a:p>
+          <a:p>
+            <a:pPr algn="l">
+              <a:spcAft>
+                <a:spcPts val="0"/>
+              </a:spcAft>
+            </a:pPr>
+            <a:r>
+              <a:rPr sz="1400" b="0">
+                <a:solidFill>
+                  <a:srgbClr val="C9D6DE"/>
+                </a:solidFill>
+                <a:latin typeface="Calibri"/>
+              </a:rPr>
+              <a:t>Integrantes: Santiago Vicente · Matías Porcari · Bautista Navarro</a:t>
             </a:r>
           </a:p>
         </p:txBody>
@@ -3281,14 +3393,102 @@
       <p:grpSpPr/>
       <p:sp>
         <p:nvSpPr>
-          <p:cNvPr id="2" name="TextBox 1"/>
+          <p:cNvPr id="2" name="Rectangle 1"/>
+          <p:cNvSpPr/>
+          <p:nvPr/>
+        </p:nvSpPr>
+        <p:spPr>
+          <a:xfrm>
+            <a:off x="0" y="0"/>
+            <a:ext cx="12191695" cy="320040"/>
+          </a:xfrm>
+          <a:prstGeom prst="rect">
+            <a:avLst/>
+          </a:prstGeom>
+          <a:solidFill>
+            <a:srgbClr val="0F3D5C"/>
+          </a:solidFill>
+          <a:ln>
+            <a:noFill/>
+          </a:ln>
+          <a:effectLst/>
+        </p:spPr>
+        <p:style>
+          <a:lnRef idx="1">
+            <a:schemeClr val="accent1"/>
+          </a:lnRef>
+          <a:fillRef idx="3">
+            <a:schemeClr val="accent1"/>
+          </a:fillRef>
+          <a:effectRef idx="2">
+            <a:schemeClr val="accent1"/>
+          </a:effectRef>
+          <a:fontRef idx="minor">
+            <a:schemeClr val="lt1"/>
+          </a:fontRef>
+        </p:style>
+        <p:txBody>
+          <a:bodyPr rtlCol="0" anchor="ctr"/>
+          <a:lstStyle/>
+          <a:p>
+            <a:pPr algn="ctr"/>
+          </a:p>
+        </p:txBody>
+      </p:sp>
+      <p:sp>
+        <p:nvSpPr>
+          <p:cNvPr id="3" name="Rectangle 2"/>
+          <p:cNvSpPr/>
+          <p:nvPr/>
+        </p:nvSpPr>
+        <p:spPr>
+          <a:xfrm>
+            <a:off x="0" y="6537960"/>
+            <a:ext cx="12191695" cy="320040"/>
+          </a:xfrm>
+          <a:prstGeom prst="rect">
+            <a:avLst/>
+          </a:prstGeom>
+          <a:solidFill>
+            <a:srgbClr val="0F3D5C"/>
+          </a:solidFill>
+          <a:ln>
+            <a:noFill/>
+          </a:ln>
+          <a:effectLst/>
+        </p:spPr>
+        <p:style>
+          <a:lnRef idx="1">
+            <a:schemeClr val="accent1"/>
+          </a:lnRef>
+          <a:fillRef idx="3">
+            <a:schemeClr val="accent1"/>
+          </a:fillRef>
+          <a:effectRef idx="2">
+            <a:schemeClr val="accent1"/>
+          </a:effectRef>
+          <a:fontRef idx="minor">
+            <a:schemeClr val="lt1"/>
+          </a:fontRef>
+        </p:style>
+        <p:txBody>
+          <a:bodyPr rtlCol="0" anchor="ctr"/>
+          <a:lstStyle/>
+          <a:p>
+            <a:pPr algn="ctr"/>
+          </a:p>
+        </p:txBody>
+      </p:sp>
+      <p:sp>
+        <p:nvSpPr>
+          <p:cNvPr id="4" name="TextBox 3"/>
           <p:cNvSpPr txBox="1"/>
           <p:nvPr/>
         </p:nvSpPr>
         <p:spPr>
           <a:xfrm>
-            <a:off x="1097280" y="2377440"/>
-            <a:ext cx="10058400" cy="1645920"/>
+            <a:off x="914400" y="2286000"/>
+            <a:ext cx="10332720" cy="1828800"/>
           </a:xfrm>
           <a:prstGeom prst="rect">
             <a:avLst/>
@@ -3296,34 +3496,54 @@
           <a:noFill/>
         </p:spPr>
         <p:txBody>
-          <a:bodyPr wrap="square">
+          <a:bodyPr wrap="square" anchor="ctr">
             <a:spAutoFit/>
           </a:bodyPr>
           <a:lstStyle/>
           <a:p>
-            <a:pPr algn="ctr"/>
-            <a:r>
-              <a:rPr sz="4000" b="1">
+            <a:pPr algn="ctr">
+              <a:spcAft>
+                <a:spcPts val="600"/>
+              </a:spcAft>
+            </a:pPr>
+            <a:r>
+              <a:rPr sz="3800" b="1">
                 <a:solidFill>
                   <a:srgbClr val="FFFFFF"/>
                 </a:solidFill>
                 <a:latin typeface="Calibri"/>
               </a:rPr>
-              <a:t>De "confíen en nosotros" a "verifíquenlo ustedes mismos".</a:t>
-            </a:r>
-          </a:p>
-        </p:txBody>
-      </p:sp>
-      <p:sp>
-        <p:nvSpPr>
-          <p:cNvPr id="3" name="TextBox 2"/>
+              <a:t>De "confíen en nosotros"</a:t>
+            </a:r>
+          </a:p>
+          <a:p>
+            <a:pPr algn="ctr">
+              <a:spcAft>
+                <a:spcPts val="1000"/>
+              </a:spcAft>
+            </a:pPr>
+            <a:r>
+              <a:rPr sz="3800" b="1">
+                <a:solidFill>
+                  <a:srgbClr val="FFFFFF"/>
+                </a:solidFill>
+                <a:latin typeface="Calibri"/>
+              </a:rPr>
+              <a:t>a "verifíquenlo ustedes mismos".</a:t>
+            </a:r>
+          </a:p>
+        </p:txBody>
+      </p:sp>
+      <p:sp>
+        <p:nvSpPr>
+          <p:cNvPr id="5" name="TextBox 4"/>
           <p:cNvSpPr txBox="1"/>
           <p:nvPr/>
         </p:nvSpPr>
         <p:spPr>
           <a:xfrm>
-            <a:off x="1097280" y="4023360"/>
-            <a:ext cx="10058400" cy="731520"/>
+            <a:off x="914400" y="4572000"/>
+            <a:ext cx="10332720" cy="640080"/>
           </a:xfrm>
           <a:prstGeom prst="rect">
             <a:avLst/>
@@ -3331,34 +3551,38 @@
           <a:noFill/>
         </p:spPr>
         <p:txBody>
-          <a:bodyPr wrap="square">
+          <a:bodyPr wrap="square" anchor="t">
             <a:spAutoFit/>
           </a:bodyPr>
           <a:lstStyle/>
           <a:p>
-            <a:pPr algn="ctr"/>
-            <a:r>
-              <a:rPr sz="2200" b="0">
+            <a:pPr algn="ctr">
+              <a:spcAft>
+                <a:spcPts val="1000"/>
+              </a:spcAft>
+            </a:pPr>
+            <a:r>
+              <a:rPr sz="2000" b="0">
                 <a:solidFill>
                   <a:srgbClr val="E7FBF8"/>
                 </a:solidFill>
                 <a:latin typeface="Calibri"/>
               </a:rPr>
-              <a:t>VeriBeca · Becas justas, consistentes y auditables.</a:t>
-            </a:r>
-          </a:p>
-        </p:txBody>
-      </p:sp>
-      <p:sp>
-        <p:nvSpPr>
-          <p:cNvPr id="4" name="TextBox 3"/>
+              <a:t>VeriBeca · Becas justas, consistentes y auditables</a:t>
+            </a:r>
+          </a:p>
+        </p:txBody>
+      </p:sp>
+      <p:sp>
+        <p:nvSpPr>
+          <p:cNvPr id="6" name="TextBox 5"/>
           <p:cNvSpPr txBox="1"/>
           <p:nvPr/>
         </p:nvSpPr>
         <p:spPr>
           <a:xfrm>
-            <a:off x="1097280" y="5852160"/>
-            <a:ext cx="10058400" cy="640080"/>
+            <a:off x="914400" y="5852160"/>
+            <a:ext cx="10332720" cy="548640"/>
           </a:xfrm>
           <a:prstGeom prst="rect">
             <a:avLst/>
@@ -3366,20 +3590,24 @@
           <a:noFill/>
         </p:spPr>
         <p:txBody>
-          <a:bodyPr wrap="square">
+          <a:bodyPr wrap="square" anchor="t">
             <a:spAutoFit/>
           </a:bodyPr>
           <a:lstStyle/>
           <a:p>
-            <a:pPr algn="ctr"/>
-            <a:r>
-              <a:rPr sz="1500" b="0">
+            <a:pPr algn="ctr">
+              <a:spcAft>
+                <a:spcPts val="1000"/>
+              </a:spcAft>
+            </a:pPr>
+            <a:r>
+              <a:rPr sz="1500" b="1">
                 <a:solidFill>
                   <a:srgbClr val="E7FBF8"/>
                 </a:solidFill>
                 <a:latin typeface="Calibri"/>
               </a:rPr>
-              <a:t>github.com/santivicente/veribeca  ·  ¡Gracias!</a:t>
+              <a:t>github.com/santivicente/veribeca   ·   ¡Gracias!</a:t>
             </a:r>
           </a:p>
         </p:txBody>
@@ -3419,17 +3647,18 @@
         <p:spPr>
           <a:xfrm>
             <a:off x="0" y="0"/>
-            <a:ext cx="12191695" cy="1143000"/>
+            <a:ext cx="256032" cy="6858000"/>
           </a:xfrm>
           <a:prstGeom prst="rect">
             <a:avLst/>
           </a:prstGeom>
           <a:solidFill>
-            <a:srgbClr val="0F3D5C"/>
+            <a:srgbClr val="149E8F"/>
           </a:solidFill>
           <a:ln>
             <a:noFill/>
           </a:ln>
+          <a:effectLst/>
         </p:spPr>
         <p:style>
           <a:lnRef idx="1">
@@ -3455,14 +3684,58 @@
       </p:sp>
       <p:sp>
         <p:nvSpPr>
-          <p:cNvPr id="3" name="TextBox 2"/>
+          <p:cNvPr id="3" name="Rectangle 2"/>
+          <p:cNvSpPr/>
+          <p:nvPr/>
+        </p:nvSpPr>
+        <p:spPr>
+          <a:xfrm>
+            <a:off x="640080" y="566928"/>
+            <a:ext cx="146304" cy="566928"/>
+          </a:xfrm>
+          <a:prstGeom prst="rect">
+            <a:avLst/>
+          </a:prstGeom>
+          <a:solidFill>
+            <a:srgbClr val="149E8F"/>
+          </a:solidFill>
+          <a:ln>
+            <a:noFill/>
+          </a:ln>
+          <a:effectLst/>
+        </p:spPr>
+        <p:style>
+          <a:lnRef idx="1">
+            <a:schemeClr val="accent1"/>
+          </a:lnRef>
+          <a:fillRef idx="3">
+            <a:schemeClr val="accent1"/>
+          </a:fillRef>
+          <a:effectRef idx="2">
+            <a:schemeClr val="accent1"/>
+          </a:effectRef>
+          <a:fontRef idx="minor">
+            <a:schemeClr val="lt1"/>
+          </a:fontRef>
+        </p:style>
+        <p:txBody>
+          <a:bodyPr rtlCol="0" anchor="ctr"/>
+          <a:lstStyle/>
+          <a:p>
+            <a:pPr algn="ctr"/>
+          </a:p>
+        </p:txBody>
+      </p:sp>
+      <p:sp>
+        <p:nvSpPr>
+          <p:cNvPr id="4" name="TextBox 3"/>
           <p:cNvSpPr txBox="1"/>
           <p:nvPr/>
         </p:nvSpPr>
         <p:spPr>
           <a:xfrm>
-            <a:off x="640080" y="256032"/>
-            <a:ext cx="10058400" cy="822960"/>
+            <a:off x="914400" y="457200"/>
+            <a:ext cx="10607040" cy="868680"/>
           </a:xfrm>
           <a:prstGeom prst="rect">
             <a:avLst/>
@@ -3470,16 +3743,20 @@
           <a:noFill/>
         </p:spPr>
         <p:txBody>
-          <a:bodyPr wrap="square">
+          <a:bodyPr wrap="square" anchor="t">
             <a:spAutoFit/>
           </a:bodyPr>
           <a:lstStyle/>
           <a:p>
-            <a:pPr algn="l"/>
-            <a:r>
-              <a:rPr sz="3200" b="1">
-                <a:solidFill>
-                  <a:srgbClr val="FFFFFF"/>
+            <a:pPr algn="l">
+              <a:spcAft>
+                <a:spcPts val="1000"/>
+              </a:spcAft>
+            </a:pPr>
+            <a:r>
+              <a:rPr sz="3000" b="1">
+                <a:solidFill>
+                  <a:srgbClr val="0F3D5C"/>
                 </a:solidFill>
                 <a:latin typeface="Calibri"/>
               </a:rPr>
@@ -3490,14 +3767,14 @@
       </p:sp>
       <p:sp>
         <p:nvSpPr>
-          <p:cNvPr id="4" name="TextBox 3"/>
+          <p:cNvPr id="5" name="TextBox 4"/>
           <p:cNvSpPr txBox="1"/>
           <p:nvPr/>
         </p:nvSpPr>
         <p:spPr>
           <a:xfrm>
-            <a:off x="11338560" y="6309360"/>
-            <a:ext cx="731520" cy="457200"/>
+            <a:off x="914400" y="1298448"/>
+            <a:ext cx="10789920" cy="457200"/>
           </a:xfrm>
           <a:prstGeom prst="rect">
             <a:avLst/>
@@ -3505,34 +3782,38 @@
           <a:noFill/>
         </p:spPr>
         <p:txBody>
-          <a:bodyPr wrap="square">
+          <a:bodyPr wrap="square" anchor="t">
             <a:spAutoFit/>
           </a:bodyPr>
           <a:lstStyle/>
           <a:p>
-            <a:pPr algn="r"/>
-            <a:r>
-              <a:rPr sz="1200" b="0">
+            <a:pPr algn="l">
+              <a:spcAft>
+                <a:spcPts val="1000"/>
+              </a:spcAft>
+            </a:pPr>
+            <a:r>
+              <a:rPr sz="1600" b="0">
                 <a:solidFill>
                   <a:srgbClr val="6B6B6B"/>
                 </a:solidFill>
                 <a:latin typeface="Calibri"/>
               </a:rPr>
-              <a:t>2</a:t>
-            </a:r>
-          </a:p>
-        </p:txBody>
-      </p:sp>
-      <p:sp>
-        <p:nvSpPr>
-          <p:cNvPr id="5" name="TextBox 4"/>
+              <a:t>La asignación de becas y ayudas sociales se percibe como opaca</a:t>
+            </a:r>
+          </a:p>
+        </p:txBody>
+      </p:sp>
+      <p:sp>
+        <p:nvSpPr>
+          <p:cNvPr id="6" name="TextBox 5"/>
           <p:cNvSpPr txBox="1"/>
           <p:nvPr/>
         </p:nvSpPr>
         <p:spPr>
           <a:xfrm>
-            <a:off x="731520" y="1554480"/>
-            <a:ext cx="10698480" cy="4754880"/>
+            <a:off x="640080" y="6400800"/>
+            <a:ext cx="7315200" cy="365760"/>
           </a:xfrm>
           <a:prstGeom prst="rect">
             <a:avLst/>
@@ -3540,7 +3821,7 @@
           <a:noFill/>
         </p:spPr>
         <p:txBody>
-          <a:bodyPr wrap="square">
+          <a:bodyPr wrap="square" anchor="t">
             <a:spAutoFit/>
           </a:bodyPr>
           <a:lstStyle/>
@@ -3551,7 +3832,85 @@
               </a:spcAft>
             </a:pPr>
             <a:r>
-              <a:rPr sz="1800" b="1">
+              <a:rPr sz="1000" b="0">
+                <a:solidFill>
+                  <a:srgbClr val="C9D6DE"/>
+                </a:solidFill>
+                <a:latin typeface="Calibri"/>
+              </a:rPr>
+              <a:t>VeriBeca · Asignación transparente de becas</a:t>
+            </a:r>
+          </a:p>
+        </p:txBody>
+      </p:sp>
+      <p:sp>
+        <p:nvSpPr>
+          <p:cNvPr id="7" name="TextBox 6"/>
+          <p:cNvSpPr txBox="1"/>
+          <p:nvPr/>
+        </p:nvSpPr>
+        <p:spPr>
+          <a:xfrm>
+            <a:off x="11247120" y="6400800"/>
+            <a:ext cx="731520" cy="365760"/>
+          </a:xfrm>
+          <a:prstGeom prst="rect">
+            <a:avLst/>
+          </a:prstGeom>
+          <a:noFill/>
+        </p:spPr>
+        <p:txBody>
+          <a:bodyPr wrap="square" anchor="t">
+            <a:spAutoFit/>
+          </a:bodyPr>
+          <a:lstStyle/>
+          <a:p>
+            <a:pPr algn="r">
+              <a:spcAft>
+                <a:spcPts val="1000"/>
+              </a:spcAft>
+            </a:pPr>
+            <a:r>
+              <a:rPr sz="1100" b="1">
+                <a:solidFill>
+                  <a:srgbClr val="6B6B6B"/>
+                </a:solidFill>
+                <a:latin typeface="Calibri"/>
+              </a:rPr>
+              <a:t>2</a:t>
+            </a:r>
+          </a:p>
+        </p:txBody>
+      </p:sp>
+      <p:sp>
+        <p:nvSpPr>
+          <p:cNvPr id="8" name="TextBox 7"/>
+          <p:cNvSpPr txBox="1"/>
+          <p:nvPr/>
+        </p:nvSpPr>
+        <p:spPr>
+          <a:xfrm>
+            <a:off x="914400" y="2011680"/>
+            <a:ext cx="6583680" cy="4023360"/>
+          </a:xfrm>
+          <a:prstGeom prst="rect">
+            <a:avLst/>
+          </a:prstGeom>
+          <a:noFill/>
+        </p:spPr>
+        <p:txBody>
+          <a:bodyPr wrap="square" anchor="t">
+            <a:spAutoFit/>
+          </a:bodyPr>
+          <a:lstStyle/>
+          <a:p>
+            <a:pPr algn="l">
+              <a:spcAft>
+                <a:spcPts val="1000"/>
+              </a:spcAft>
+            </a:pPr>
+            <a:r>
+              <a:rPr sz="1600" b="1">
                 <a:solidFill>
                   <a:srgbClr val="149E8F"/>
                 </a:solidFill>
@@ -3560,84 +3919,84 @@
               <a:t>●  </a:t>
             </a:r>
             <a:r>
-              <a:rPr sz="1900" b="0">
-                <a:solidFill>
-                  <a:srgbClr val="3A3A3A"/>
-                </a:solidFill>
-                <a:latin typeface="Calibri"/>
-              </a:rPr>
-              <a:t>La asignación de becas y ayudas sociales se percibe como opaca.</a:t>
-            </a:r>
-          </a:p>
-          <a:p>
-            <a:pPr lvl="1" algn="l">
+              <a:rPr sz="1800" b="0">
+                <a:solidFill>
+                  <a:srgbClr val="2E2E2E"/>
+                </a:solidFill>
+                <a:latin typeface="Calibri"/>
+              </a:rPr>
+              <a:t>Criterios de elegibilidad ambiguos y poco claros.</a:t>
+            </a:r>
+          </a:p>
+          <a:p>
+            <a:pPr algn="l">
               <a:spcAft>
                 <a:spcPts val="1000"/>
               </a:spcAft>
             </a:pPr>
             <a:r>
-              <a:rPr sz="1600" b="0">
-                <a:solidFill>
-                  <a:srgbClr val="6B6B6B"/>
-                </a:solidFill>
-                <a:latin typeface="Calibri"/>
-              </a:rPr>
-              <a:t>–  </a:t>
-            </a:r>
-            <a:r>
-              <a:rPr sz="1600" b="0">
-                <a:solidFill>
-                  <a:srgbClr val="6B6B6B"/>
-                </a:solidFill>
-                <a:latin typeface="Calibri"/>
-              </a:rPr>
-              <a:t>Criterios ambiguos y aplicados de forma inconsistente.</a:t>
-            </a:r>
-          </a:p>
-          <a:p>
-            <a:pPr lvl="1" algn="l">
+              <a:rPr sz="1600" b="1">
+                <a:solidFill>
+                  <a:srgbClr val="149E8F"/>
+                </a:solidFill>
+                <a:latin typeface="Calibri"/>
+              </a:rPr>
+              <a:t>●  </a:t>
+            </a:r>
+            <a:r>
+              <a:rPr sz="1800" b="0">
+                <a:solidFill>
+                  <a:srgbClr val="2E2E2E"/>
+                </a:solidFill>
+                <a:latin typeface="Calibri"/>
+              </a:rPr>
+              <a:t>Aplicación inconsistente entre distintos evaluadores.</a:t>
+            </a:r>
+          </a:p>
+          <a:p>
+            <a:pPr algn="l">
               <a:spcAft>
                 <a:spcPts val="1000"/>
               </a:spcAft>
             </a:pPr>
             <a:r>
-              <a:rPr sz="1600" b="0">
-                <a:solidFill>
-                  <a:srgbClr val="6B6B6B"/>
-                </a:solidFill>
-                <a:latin typeface="Calibri"/>
-              </a:rPr>
-              <a:t>–  </a:t>
-            </a:r>
-            <a:r>
-              <a:rPr sz="1600" b="0">
-                <a:solidFill>
-                  <a:srgbClr val="6B6B6B"/>
-                </a:solidFill>
-                <a:latin typeface="Calibri"/>
-              </a:rPr>
-              <a:t>Evaluación manual, lenta y propensa a error.</a:t>
-            </a:r>
-          </a:p>
-          <a:p>
-            <a:pPr lvl="1" algn="l">
+              <a:rPr sz="1600" b="1">
+                <a:solidFill>
+                  <a:srgbClr val="149E8F"/>
+                </a:solidFill>
+                <a:latin typeface="Calibri"/>
+              </a:rPr>
+              <a:t>●  </a:t>
+            </a:r>
+            <a:r>
+              <a:rPr sz="1800" b="0">
+                <a:solidFill>
+                  <a:srgbClr val="2E2E2E"/>
+                </a:solidFill>
+                <a:latin typeface="Calibri"/>
+              </a:rPr>
+              <a:t>Procesos manuales, lentos y propensos a error humano.</a:t>
+            </a:r>
+          </a:p>
+          <a:p>
+            <a:pPr algn="l">
               <a:spcAft>
                 <a:spcPts val="1000"/>
               </a:spcAft>
             </a:pPr>
             <a:r>
-              <a:rPr sz="1600" b="0">
-                <a:solidFill>
-                  <a:srgbClr val="6B6B6B"/>
-                </a:solidFill>
-                <a:latin typeface="Calibri"/>
-              </a:rPr>
-              <a:t>–  </a:t>
-            </a:r>
-            <a:r>
-              <a:rPr sz="1600" b="0">
-                <a:solidFill>
-                  <a:srgbClr val="6B6B6B"/>
+              <a:rPr sz="1600" b="1">
+                <a:solidFill>
+                  <a:srgbClr val="149E8F"/>
+                </a:solidFill>
+                <a:latin typeface="Calibri"/>
+              </a:rPr>
+              <a:t>●  </a:t>
+            </a:r>
+            <a:r>
+              <a:rPr sz="1800" b="0">
+                <a:solidFill>
+                  <a:srgbClr val="2E2E2E"/>
                 </a:solidFill>
                 <a:latin typeface="Calibri"/>
               </a:rPr>
@@ -3651,7 +4010,7 @@
               </a:spcAft>
             </a:pPr>
             <a:r>
-              <a:rPr sz="1800" b="1">
+              <a:rPr sz="1600" b="1">
                 <a:solidFill>
                   <a:srgbClr val="149E8F"/>
                 </a:solidFill>
@@ -3660,13 +4019,114 @@
               <a:t>●  </a:t>
             </a:r>
             <a:r>
-              <a:rPr sz="1900" b="0">
-                <a:solidFill>
-                  <a:srgbClr val="3A3A3A"/>
-                </a:solidFill>
-                <a:latin typeface="Calibri"/>
-              </a:rPr>
-              <a:t>Resultado: desconfianza y sospechas de favoritismo.</a:t>
+              <a:rPr sz="1800" b="0">
+                <a:solidFill>
+                  <a:srgbClr val="2E2E2E"/>
+                </a:solidFill>
+                <a:latin typeface="Calibri"/>
+              </a:rPr>
+              <a:t>No hay evidencia inalterable de cómo se decidió cada caso.</a:t>
+            </a:r>
+          </a:p>
+        </p:txBody>
+      </p:sp>
+      <p:sp>
+        <p:nvSpPr>
+          <p:cNvPr id="9" name="Rounded Rectangle 8"/>
+          <p:cNvSpPr/>
+          <p:nvPr/>
+        </p:nvSpPr>
+        <p:spPr>
+          <a:xfrm>
+            <a:off x="7863840" y="2103120"/>
+            <a:ext cx="3566160" cy="3108960"/>
+          </a:xfrm>
+          <a:prstGeom prst="roundRect">
+            <a:avLst/>
+          </a:prstGeom>
+          <a:solidFill>
+            <a:srgbClr val="F3F6F9"/>
+          </a:solidFill>
+          <a:ln w="19050">
+            <a:solidFill>
+              <a:srgbClr val="149E8F"/>
+            </a:solidFill>
+          </a:ln>
+          <a:effectLst/>
+        </p:spPr>
+        <p:style>
+          <a:lnRef idx="1">
+            <a:schemeClr val="accent1"/>
+          </a:lnRef>
+          <a:fillRef idx="3">
+            <a:schemeClr val="accent1"/>
+          </a:fillRef>
+          <a:effectRef idx="2">
+            <a:schemeClr val="accent1"/>
+          </a:effectRef>
+          <a:fontRef idx="minor">
+            <a:schemeClr val="lt1"/>
+          </a:fontRef>
+        </p:style>
+        <p:txBody>
+          <a:bodyPr rtlCol="0" anchor="ctr"/>
+          <a:lstStyle/>
+          <a:p>
+            <a:pPr algn="ctr"/>
+          </a:p>
+        </p:txBody>
+      </p:sp>
+      <p:sp>
+        <p:nvSpPr>
+          <p:cNvPr id="10" name="TextBox 9"/>
+          <p:cNvSpPr txBox="1"/>
+          <p:nvPr/>
+        </p:nvSpPr>
+        <p:spPr>
+          <a:xfrm>
+            <a:off x="8138160" y="2468880"/>
+            <a:ext cx="3108960" cy="2468880"/>
+          </a:xfrm>
+          <a:prstGeom prst="rect">
+            <a:avLst/>
+          </a:prstGeom>
+          <a:noFill/>
+        </p:spPr>
+        <p:txBody>
+          <a:bodyPr wrap="square" anchor="ctr">
+            <a:spAutoFit/>
+          </a:bodyPr>
+          <a:lstStyle/>
+          <a:p>
+            <a:pPr algn="ctr">
+              <a:spcAft>
+                <a:spcPts val="1400"/>
+              </a:spcAft>
+            </a:pPr>
+            <a:r>
+              <a:rPr sz="1500" b="1">
+                <a:solidFill>
+                  <a:srgbClr val="0E6F64"/>
+                </a:solidFill>
+                <a:latin typeface="Calibri"/>
+              </a:rPr>
+              <a:t>La consecuencia</a:t>
+            </a:r>
+          </a:p>
+          <a:p>
+            <a:pPr algn="ctr">
+              <a:spcAft>
+                <a:spcPts val="1000"/>
+              </a:spcAft>
+            </a:pPr>
+            <a:r>
+              <a:rPr sz="1700" b="0">
+                <a:solidFill>
+                  <a:srgbClr val="2E2E2E"/>
+                </a:solidFill>
+                <a:latin typeface="Calibri"/>
+              </a:rPr>
+              <a:t>Desconfianza en las instituciones y sospechas de favoritismo o clientelismo.</a:t>
             </a:r>
           </a:p>
         </p:txBody>
@@ -3706,17 +4166,18 @@
         <p:spPr>
           <a:xfrm>
             <a:off x="0" y="0"/>
-            <a:ext cx="12191695" cy="1143000"/>
+            <a:ext cx="256032" cy="6858000"/>
           </a:xfrm>
           <a:prstGeom prst="rect">
             <a:avLst/>
           </a:prstGeom>
           <a:solidFill>
-            <a:srgbClr val="0F3D5C"/>
+            <a:srgbClr val="149E8F"/>
           </a:solidFill>
           <a:ln>
             <a:noFill/>
           </a:ln>
+          <a:effectLst/>
         </p:spPr>
         <p:style>
           <a:lnRef idx="1">
@@ -3742,14 +4203,58 @@
       </p:sp>
       <p:sp>
         <p:nvSpPr>
-          <p:cNvPr id="3" name="TextBox 2"/>
+          <p:cNvPr id="3" name="Rectangle 2"/>
+          <p:cNvSpPr/>
+          <p:nvPr/>
+        </p:nvSpPr>
+        <p:spPr>
+          <a:xfrm>
+            <a:off x="640080" y="566928"/>
+            <a:ext cx="146304" cy="566928"/>
+          </a:xfrm>
+          <a:prstGeom prst="rect">
+            <a:avLst/>
+          </a:prstGeom>
+          <a:solidFill>
+            <a:srgbClr val="149E8F"/>
+          </a:solidFill>
+          <a:ln>
+            <a:noFill/>
+          </a:ln>
+          <a:effectLst/>
+        </p:spPr>
+        <p:style>
+          <a:lnRef idx="1">
+            <a:schemeClr val="accent1"/>
+          </a:lnRef>
+          <a:fillRef idx="3">
+            <a:schemeClr val="accent1"/>
+          </a:fillRef>
+          <a:effectRef idx="2">
+            <a:schemeClr val="accent1"/>
+          </a:effectRef>
+          <a:fontRef idx="minor">
+            <a:schemeClr val="lt1"/>
+          </a:fontRef>
+        </p:style>
+        <p:txBody>
+          <a:bodyPr rtlCol="0" anchor="ctr"/>
+          <a:lstStyle/>
+          <a:p>
+            <a:pPr algn="ctr"/>
+          </a:p>
+        </p:txBody>
+      </p:sp>
+      <p:sp>
+        <p:nvSpPr>
+          <p:cNvPr id="4" name="TextBox 3"/>
           <p:cNvSpPr txBox="1"/>
           <p:nvPr/>
         </p:nvSpPr>
         <p:spPr>
           <a:xfrm>
-            <a:off x="640080" y="256032"/>
-            <a:ext cx="10058400" cy="822960"/>
+            <a:off x="914400" y="457200"/>
+            <a:ext cx="10607040" cy="868680"/>
           </a:xfrm>
           <a:prstGeom prst="rect">
             <a:avLst/>
@@ -3757,34 +4262,38 @@
           <a:noFill/>
         </p:spPr>
         <p:txBody>
-          <a:bodyPr wrap="square">
+          <a:bodyPr wrap="square" anchor="t">
             <a:spAutoFit/>
           </a:bodyPr>
           <a:lstStyle/>
           <a:p>
-            <a:pPr algn="l"/>
-            <a:r>
-              <a:rPr sz="3200" b="1">
-                <a:solidFill>
-                  <a:srgbClr val="FFFFFF"/>
-                </a:solidFill>
-                <a:latin typeface="Calibri"/>
-              </a:rPr>
-              <a:t>Por qué importa</a:t>
-            </a:r>
-          </a:p>
-        </p:txBody>
-      </p:sp>
-      <p:sp>
-        <p:nvSpPr>
-          <p:cNvPr id="4" name="TextBox 3"/>
+            <a:pPr algn="l">
+              <a:spcAft>
+                <a:spcPts val="1000"/>
+              </a:spcAft>
+            </a:pPr>
+            <a:r>
+              <a:rPr sz="3000" b="1">
+                <a:solidFill>
+                  <a:srgbClr val="0F3D5C"/>
+                </a:solidFill>
+                <a:latin typeface="Calibri"/>
+              </a:rPr>
+              <a:t>La solución</a:t>
+            </a:r>
+          </a:p>
+        </p:txBody>
+      </p:sp>
+      <p:sp>
+        <p:nvSpPr>
+          <p:cNvPr id="5" name="TextBox 4"/>
           <p:cNvSpPr txBox="1"/>
           <p:nvPr/>
         </p:nvSpPr>
         <p:spPr>
           <a:xfrm>
-            <a:off x="11338560" y="6309360"/>
-            <a:ext cx="731520" cy="457200"/>
+            <a:off x="914400" y="1298448"/>
+            <a:ext cx="10789920" cy="457200"/>
           </a:xfrm>
           <a:prstGeom prst="rect">
             <a:avLst/>
@@ -3792,34 +4301,38 @@
           <a:noFill/>
         </p:spPr>
         <p:txBody>
-          <a:bodyPr wrap="square">
+          <a:bodyPr wrap="square" anchor="t">
             <a:spAutoFit/>
           </a:bodyPr>
           <a:lstStyle/>
           <a:p>
-            <a:pPr algn="r"/>
-            <a:r>
-              <a:rPr sz="1200" b="0">
+            <a:pPr algn="l">
+              <a:spcAft>
+                <a:spcPts val="1000"/>
+              </a:spcAft>
+            </a:pPr>
+            <a:r>
+              <a:rPr sz="1600" b="0">
                 <a:solidFill>
                   <a:srgbClr val="6B6B6B"/>
                 </a:solidFill>
                 <a:latin typeface="Calibri"/>
               </a:rPr>
-              <a:t>3</a:t>
-            </a:r>
-          </a:p>
-        </p:txBody>
-      </p:sp>
-      <p:sp>
-        <p:nvSpPr>
-          <p:cNvPr id="5" name="TextBox 4"/>
+              <a:t>La institución define sus reglas; el sistema las aplica, prioriza y audita</a:t>
+            </a:r>
+          </a:p>
+        </p:txBody>
+      </p:sp>
+      <p:sp>
+        <p:nvSpPr>
+          <p:cNvPr id="6" name="TextBox 5"/>
           <p:cNvSpPr txBox="1"/>
           <p:nvPr/>
         </p:nvSpPr>
         <p:spPr>
           <a:xfrm>
-            <a:off x="731520" y="1554480"/>
-            <a:ext cx="10698480" cy="4754880"/>
+            <a:off x="640080" y="6400800"/>
+            <a:ext cx="7315200" cy="365760"/>
           </a:xfrm>
           <a:prstGeom prst="rect">
             <a:avLst/>
@@ -3827,7 +4340,7 @@
           <a:noFill/>
         </p:spPr>
         <p:txBody>
-          <a:bodyPr wrap="square">
+          <a:bodyPr wrap="square" anchor="t">
             <a:spAutoFit/>
           </a:bodyPr>
           <a:lstStyle/>
@@ -3838,24 +4351,239 @@
               </a:spcAft>
             </a:pPr>
             <a:r>
+              <a:rPr sz="1000" b="0">
+                <a:solidFill>
+                  <a:srgbClr val="C9D6DE"/>
+                </a:solidFill>
+                <a:latin typeface="Calibri"/>
+              </a:rPr>
+              <a:t>VeriBeca · Asignación transparente de becas</a:t>
+            </a:r>
+          </a:p>
+        </p:txBody>
+      </p:sp>
+      <p:sp>
+        <p:nvSpPr>
+          <p:cNvPr id="7" name="TextBox 6"/>
+          <p:cNvSpPr txBox="1"/>
+          <p:nvPr/>
+        </p:nvSpPr>
+        <p:spPr>
+          <a:xfrm>
+            <a:off x="11247120" y="6400800"/>
+            <a:ext cx="731520" cy="365760"/>
+          </a:xfrm>
+          <a:prstGeom prst="rect">
+            <a:avLst/>
+          </a:prstGeom>
+          <a:noFill/>
+        </p:spPr>
+        <p:txBody>
+          <a:bodyPr wrap="square" anchor="t">
+            <a:spAutoFit/>
+          </a:bodyPr>
+          <a:lstStyle/>
+          <a:p>
+            <a:pPr algn="r">
+              <a:spcAft>
+                <a:spcPts val="1000"/>
+              </a:spcAft>
+            </a:pPr>
+            <a:r>
+              <a:rPr sz="1100" b="1">
+                <a:solidFill>
+                  <a:srgbClr val="6B6B6B"/>
+                </a:solidFill>
+                <a:latin typeface="Calibri"/>
+              </a:rPr>
+              <a:t>3</a:t>
+            </a:r>
+          </a:p>
+        </p:txBody>
+      </p:sp>
+      <p:sp>
+        <p:nvSpPr>
+          <p:cNvPr id="8" name="Oval 7"/>
+          <p:cNvSpPr/>
+          <p:nvPr/>
+        </p:nvSpPr>
+        <p:spPr>
+          <a:xfrm>
+            <a:off x="914400" y="1965960"/>
+            <a:ext cx="566928" cy="566928"/>
+          </a:xfrm>
+          <a:prstGeom prst="ellipse">
+            <a:avLst/>
+          </a:prstGeom>
+          <a:solidFill>
+            <a:srgbClr val="149E8F"/>
+          </a:solidFill>
+          <a:ln>
+            <a:noFill/>
+          </a:ln>
+          <a:effectLst/>
+        </p:spPr>
+        <p:style>
+          <a:lnRef idx="1">
+            <a:schemeClr val="accent1"/>
+          </a:lnRef>
+          <a:fillRef idx="3">
+            <a:schemeClr val="accent1"/>
+          </a:fillRef>
+          <a:effectRef idx="2">
+            <a:schemeClr val="accent1"/>
+          </a:effectRef>
+          <a:fontRef idx="minor">
+            <a:schemeClr val="lt1"/>
+          </a:fontRef>
+        </p:style>
+        <p:txBody>
+          <a:bodyPr rtlCol="0" anchor="ctr" wrap="square"/>
+          <a:lstStyle/>
+          <a:p>
+            <a:pPr algn="ctr">
+              <a:spcAft>
+                <a:spcPts val="1000"/>
+              </a:spcAft>
+            </a:pPr>
+            <a:r>
+              <a:rPr sz="2200" b="1">
+                <a:solidFill>
+                  <a:srgbClr val="FFFFFF"/>
+                </a:solidFill>
+                <a:latin typeface="Calibri"/>
+              </a:rPr>
+              <a:t>1</a:t>
+            </a:r>
+          </a:p>
+        </p:txBody>
+      </p:sp>
+      <p:sp>
+        <p:nvSpPr>
+          <p:cNvPr id="9" name="TextBox 8"/>
+          <p:cNvSpPr txBox="1"/>
+          <p:nvPr/>
+        </p:nvSpPr>
+        <p:spPr>
+          <a:xfrm>
+            <a:off x="1691640" y="1920240"/>
+            <a:ext cx="9692640" cy="731520"/>
+          </a:xfrm>
+          <a:prstGeom prst="rect">
+            <a:avLst/>
+          </a:prstGeom>
+          <a:noFill/>
+        </p:spPr>
+        <p:txBody>
+          <a:bodyPr wrap="square" anchor="t">
+            <a:spAutoFit/>
+          </a:bodyPr>
+          <a:lstStyle/>
+          <a:p>
+            <a:pPr algn="l">
+              <a:spcAft>
+                <a:spcPts val="1000"/>
+              </a:spcAft>
+            </a:pPr>
+            <a:r>
               <a:rPr sz="1800" b="1">
                 <a:solidFill>
-                  <a:srgbClr val="149E8F"/>
-                </a:solidFill>
-                <a:latin typeface="Calibri"/>
-              </a:rPr>
-              <a:t>●  </a:t>
-            </a:r>
-            <a:r>
-              <a:rPr sz="1900" b="0">
-                <a:solidFill>
-                  <a:srgbClr val="3A3A3A"/>
-                </a:solidFill>
-                <a:latin typeface="Calibri"/>
-              </a:rPr>
-              <a:t>Afecta presupuestos significativos y a poblaciones vulnerables.</a:t>
-            </a:r>
-          </a:p>
+                  <a:srgbClr val="0F3D5C"/>
+                </a:solidFill>
+                <a:latin typeface="Calibri"/>
+              </a:rPr>
+              <a:t>Escribir la regla  —  </a:t>
+            </a:r>
+            <a:r>
+              <a:rPr sz="1700" b="0">
+                <a:solidFill>
+                  <a:srgbClr val="2E2E2E"/>
+                </a:solidFill>
+                <a:latin typeface="Calibri"/>
+              </a:rPr>
+              <a:t>En un lenguaje simple y legible (DSL).</a:t>
+            </a:r>
+          </a:p>
+        </p:txBody>
+      </p:sp>
+      <p:sp>
+        <p:nvSpPr>
+          <p:cNvPr id="10" name="Oval 9"/>
+          <p:cNvSpPr/>
+          <p:nvPr/>
+        </p:nvSpPr>
+        <p:spPr>
+          <a:xfrm>
+            <a:off x="914400" y="2807208"/>
+            <a:ext cx="566928" cy="566928"/>
+          </a:xfrm>
+          <a:prstGeom prst="ellipse">
+            <a:avLst/>
+          </a:prstGeom>
+          <a:solidFill>
+            <a:srgbClr val="149E8F"/>
+          </a:solidFill>
+          <a:ln>
+            <a:noFill/>
+          </a:ln>
+          <a:effectLst/>
+        </p:spPr>
+        <p:style>
+          <a:lnRef idx="1">
+            <a:schemeClr val="accent1"/>
+          </a:lnRef>
+          <a:fillRef idx="3">
+            <a:schemeClr val="accent1"/>
+          </a:fillRef>
+          <a:effectRef idx="2">
+            <a:schemeClr val="accent1"/>
+          </a:effectRef>
+          <a:fontRef idx="minor">
+            <a:schemeClr val="lt1"/>
+          </a:fontRef>
+        </p:style>
+        <p:txBody>
+          <a:bodyPr rtlCol="0" anchor="ctr" wrap="square"/>
+          <a:lstStyle/>
+          <a:p>
+            <a:pPr algn="ctr">
+              <a:spcAft>
+                <a:spcPts val="1000"/>
+              </a:spcAft>
+            </a:pPr>
+            <a:r>
+              <a:rPr sz="2200" b="1">
+                <a:solidFill>
+                  <a:srgbClr val="FFFFFF"/>
+                </a:solidFill>
+                <a:latin typeface="Calibri"/>
+              </a:rPr>
+              <a:t>2</a:t>
+            </a:r>
+          </a:p>
+        </p:txBody>
+      </p:sp>
+      <p:sp>
+        <p:nvSpPr>
+          <p:cNvPr id="11" name="TextBox 10"/>
+          <p:cNvSpPr txBox="1"/>
+          <p:nvPr/>
+        </p:nvSpPr>
+        <p:spPr>
+          <a:xfrm>
+            <a:off x="1691640" y="2761488"/>
+            <a:ext cx="9692640" cy="731520"/>
+          </a:xfrm>
+          <a:prstGeom prst="rect">
+            <a:avLst/>
+          </a:prstGeom>
+          <a:noFill/>
+        </p:spPr>
+        <p:txBody>
+          <a:bodyPr wrap="square" anchor="t">
+            <a:spAutoFit/>
+          </a:bodyPr>
+          <a:lstStyle/>
           <a:p>
             <a:pPr algn="l">
               <a:spcAft>
@@ -3865,22 +4593,102 @@
             <a:r>
               <a:rPr sz="1800" b="1">
                 <a:solidFill>
-                  <a:srgbClr val="149E8F"/>
-                </a:solidFill>
-                <a:latin typeface="Calibri"/>
-              </a:rPr>
-              <a:t>●  </a:t>
-            </a:r>
-            <a:r>
-              <a:rPr sz="1900" b="0">
-                <a:solidFill>
-                  <a:srgbClr val="3A3A3A"/>
-                </a:solidFill>
-                <a:latin typeface="Calibri"/>
-              </a:rPr>
-              <a:t>La falta de trazabilidad genera conflictos y reclamos sin respuesta.</a:t>
-            </a:r>
-          </a:p>
+                  <a:srgbClr val="0F3D5C"/>
+                </a:solidFill>
+                <a:latin typeface="Calibri"/>
+              </a:rPr>
+              <a:t>Validar  —  </a:t>
+            </a:r>
+            <a:r>
+              <a:rPr sz="1700" b="0">
+                <a:solidFill>
+                  <a:srgbClr val="2E2E2E"/>
+                </a:solidFill>
+                <a:latin typeface="Calibri"/>
+              </a:rPr>
+              <a:t>El type-checker verifica que la regla esté bien formada.</a:t>
+            </a:r>
+          </a:p>
+        </p:txBody>
+      </p:sp>
+      <p:sp>
+        <p:nvSpPr>
+          <p:cNvPr id="12" name="Oval 11"/>
+          <p:cNvSpPr/>
+          <p:nvPr/>
+        </p:nvSpPr>
+        <p:spPr>
+          <a:xfrm>
+            <a:off x="914400" y="3648456"/>
+            <a:ext cx="566928" cy="566928"/>
+          </a:xfrm>
+          <a:prstGeom prst="ellipse">
+            <a:avLst/>
+          </a:prstGeom>
+          <a:solidFill>
+            <a:srgbClr val="149E8F"/>
+          </a:solidFill>
+          <a:ln>
+            <a:noFill/>
+          </a:ln>
+          <a:effectLst/>
+        </p:spPr>
+        <p:style>
+          <a:lnRef idx="1">
+            <a:schemeClr val="accent1"/>
+          </a:lnRef>
+          <a:fillRef idx="3">
+            <a:schemeClr val="accent1"/>
+          </a:fillRef>
+          <a:effectRef idx="2">
+            <a:schemeClr val="accent1"/>
+          </a:effectRef>
+          <a:fontRef idx="minor">
+            <a:schemeClr val="lt1"/>
+          </a:fontRef>
+        </p:style>
+        <p:txBody>
+          <a:bodyPr rtlCol="0" anchor="ctr" wrap="square"/>
+          <a:lstStyle/>
+          <a:p>
+            <a:pPr algn="ctr">
+              <a:spcAft>
+                <a:spcPts val="1000"/>
+              </a:spcAft>
+            </a:pPr>
+            <a:r>
+              <a:rPr sz="2200" b="1">
+                <a:solidFill>
+                  <a:srgbClr val="FFFFFF"/>
+                </a:solidFill>
+                <a:latin typeface="Calibri"/>
+              </a:rPr>
+              <a:t>3</a:t>
+            </a:r>
+          </a:p>
+        </p:txBody>
+      </p:sp>
+      <p:sp>
+        <p:nvSpPr>
+          <p:cNvPr id="13" name="TextBox 12"/>
+          <p:cNvSpPr txBox="1"/>
+          <p:nvPr/>
+        </p:nvSpPr>
+        <p:spPr>
+          <a:xfrm>
+            <a:off x="1691640" y="3602736"/>
+            <a:ext cx="9692640" cy="731520"/>
+          </a:xfrm>
+          <a:prstGeom prst="rect">
+            <a:avLst/>
+          </a:prstGeom>
+          <a:noFill/>
+        </p:spPr>
+        <p:txBody>
+          <a:bodyPr wrap="square" anchor="t">
+            <a:spAutoFit/>
+          </a:bodyPr>
+          <a:lstStyle/>
           <a:p>
             <a:pPr algn="l">
               <a:spcAft>
@@ -3890,20 +4698,230 @@
             <a:r>
               <a:rPr sz="1800" b="1">
                 <a:solidFill>
-                  <a:srgbClr val="149E8F"/>
-                </a:solidFill>
-                <a:latin typeface="Calibri"/>
-              </a:rPr>
-              <a:t>●  </a:t>
-            </a:r>
-            <a:r>
-              <a:rPr sz="1900" b="0">
-                <a:solidFill>
-                  <a:srgbClr val="3A3A3A"/>
-                </a:solidFill>
-                <a:latin typeface="Calibri"/>
-              </a:rPr>
-              <a:t>Demanda creciente de transparencia y rendición de cuentas.</a:t>
+                  <a:srgbClr val="0F3D5C"/>
+                </a:solidFill>
+                <a:latin typeface="Calibri"/>
+              </a:rPr>
+              <a:t>Aplicar a todos  —  </a:t>
+            </a:r>
+            <a:r>
+              <a:rPr sz="1700" b="0">
+                <a:solidFill>
+                  <a:srgbClr val="2E2E2E"/>
+                </a:solidFill>
+                <a:latin typeface="Calibri"/>
+              </a:rPr>
+              <a:t>El intérprete evalúa a cada postulante por igual.</a:t>
+            </a:r>
+          </a:p>
+        </p:txBody>
+      </p:sp>
+      <p:sp>
+        <p:nvSpPr>
+          <p:cNvPr id="14" name="Oval 13"/>
+          <p:cNvSpPr/>
+          <p:nvPr/>
+        </p:nvSpPr>
+        <p:spPr>
+          <a:xfrm>
+            <a:off x="914400" y="4489704"/>
+            <a:ext cx="566928" cy="566928"/>
+          </a:xfrm>
+          <a:prstGeom prst="ellipse">
+            <a:avLst/>
+          </a:prstGeom>
+          <a:solidFill>
+            <a:srgbClr val="149E8F"/>
+          </a:solidFill>
+          <a:ln>
+            <a:noFill/>
+          </a:ln>
+          <a:effectLst/>
+        </p:spPr>
+        <p:style>
+          <a:lnRef idx="1">
+            <a:schemeClr val="accent1"/>
+          </a:lnRef>
+          <a:fillRef idx="3">
+            <a:schemeClr val="accent1"/>
+          </a:fillRef>
+          <a:effectRef idx="2">
+            <a:schemeClr val="accent1"/>
+          </a:effectRef>
+          <a:fontRef idx="minor">
+            <a:schemeClr val="lt1"/>
+          </a:fontRef>
+        </p:style>
+        <p:txBody>
+          <a:bodyPr rtlCol="0" anchor="ctr" wrap="square"/>
+          <a:lstStyle/>
+          <a:p>
+            <a:pPr algn="ctr">
+              <a:spcAft>
+                <a:spcPts val="1000"/>
+              </a:spcAft>
+            </a:pPr>
+            <a:r>
+              <a:rPr sz="2200" b="1">
+                <a:solidFill>
+                  <a:srgbClr val="FFFFFF"/>
+                </a:solidFill>
+                <a:latin typeface="Calibri"/>
+              </a:rPr>
+              <a:t>4</a:t>
+            </a:r>
+          </a:p>
+        </p:txBody>
+      </p:sp>
+      <p:sp>
+        <p:nvSpPr>
+          <p:cNvPr id="15" name="TextBox 14"/>
+          <p:cNvSpPr txBox="1"/>
+          <p:nvPr/>
+        </p:nvSpPr>
+        <p:spPr>
+          <a:xfrm>
+            <a:off x="1691640" y="4443984"/>
+            <a:ext cx="9692640" cy="731520"/>
+          </a:xfrm>
+          <a:prstGeom prst="rect">
+            <a:avLst/>
+          </a:prstGeom>
+          <a:noFill/>
+        </p:spPr>
+        <p:txBody>
+          <a:bodyPr wrap="square" anchor="t">
+            <a:spAutoFit/>
+          </a:bodyPr>
+          <a:lstStyle/>
+          <a:p>
+            <a:pPr algn="l">
+              <a:spcAft>
+                <a:spcPts val="1000"/>
+              </a:spcAft>
+            </a:pPr>
+            <a:r>
+              <a:rPr sz="1800" b="1">
+                <a:solidFill>
+                  <a:srgbClr val="0F3D5C"/>
+                </a:solidFill>
+                <a:latin typeface="Calibri"/>
+              </a:rPr>
+              <a:t>Priorizar con IA  —  </a:t>
+            </a:r>
+            <a:r>
+              <a:rPr sz="1700" b="0">
+                <a:solidFill>
+                  <a:srgbClr val="2E2E2E"/>
+                </a:solidFill>
+                <a:latin typeface="Calibri"/>
+              </a:rPr>
+              <a:t>Ordena a los elegibles según vulnerabilidad.</a:t>
+            </a:r>
+          </a:p>
+        </p:txBody>
+      </p:sp>
+      <p:sp>
+        <p:nvSpPr>
+          <p:cNvPr id="16" name="Oval 15"/>
+          <p:cNvSpPr/>
+          <p:nvPr/>
+        </p:nvSpPr>
+        <p:spPr>
+          <a:xfrm>
+            <a:off x="914400" y="5330952"/>
+            <a:ext cx="566928" cy="566928"/>
+          </a:xfrm>
+          <a:prstGeom prst="ellipse">
+            <a:avLst/>
+          </a:prstGeom>
+          <a:solidFill>
+            <a:srgbClr val="149E8F"/>
+          </a:solidFill>
+          <a:ln>
+            <a:noFill/>
+          </a:ln>
+          <a:effectLst/>
+        </p:spPr>
+        <p:style>
+          <a:lnRef idx="1">
+            <a:schemeClr val="accent1"/>
+          </a:lnRef>
+          <a:fillRef idx="3">
+            <a:schemeClr val="accent1"/>
+          </a:fillRef>
+          <a:effectRef idx="2">
+            <a:schemeClr val="accent1"/>
+          </a:effectRef>
+          <a:fontRef idx="minor">
+            <a:schemeClr val="lt1"/>
+          </a:fontRef>
+        </p:style>
+        <p:txBody>
+          <a:bodyPr rtlCol="0" anchor="ctr" wrap="square"/>
+          <a:lstStyle/>
+          <a:p>
+            <a:pPr algn="ctr">
+              <a:spcAft>
+                <a:spcPts val="1000"/>
+              </a:spcAft>
+            </a:pPr>
+            <a:r>
+              <a:rPr sz="2200" b="1">
+                <a:solidFill>
+                  <a:srgbClr val="FFFFFF"/>
+                </a:solidFill>
+                <a:latin typeface="Calibri"/>
+              </a:rPr>
+              <a:t>5</a:t>
+            </a:r>
+          </a:p>
+        </p:txBody>
+      </p:sp>
+      <p:sp>
+        <p:nvSpPr>
+          <p:cNvPr id="17" name="TextBox 16"/>
+          <p:cNvSpPr txBox="1"/>
+          <p:nvPr/>
+        </p:nvSpPr>
+        <p:spPr>
+          <a:xfrm>
+            <a:off x="1691640" y="5285232"/>
+            <a:ext cx="9692640" cy="731520"/>
+          </a:xfrm>
+          <a:prstGeom prst="rect">
+            <a:avLst/>
+          </a:prstGeom>
+          <a:noFill/>
+        </p:spPr>
+        <p:txBody>
+          <a:bodyPr wrap="square" anchor="t">
+            <a:spAutoFit/>
+          </a:bodyPr>
+          <a:lstStyle/>
+          <a:p>
+            <a:pPr algn="l">
+              <a:spcAft>
+                <a:spcPts val="1000"/>
+              </a:spcAft>
+            </a:pPr>
+            <a:r>
+              <a:rPr sz="1800" b="1">
+                <a:solidFill>
+                  <a:srgbClr val="0F3D5C"/>
+                </a:solidFill>
+                <a:latin typeface="Calibri"/>
+              </a:rPr>
+              <a:t>Sellar en blockchain  —  </a:t>
+            </a:r>
+            <a:r>
+              <a:rPr sz="1700" b="0">
+                <a:solidFill>
+                  <a:srgbClr val="2E2E2E"/>
+                </a:solidFill>
+                <a:latin typeface="Calibri"/>
+              </a:rPr>
+              <a:t>Cada decisión queda registrada e inalterable.</a:t>
             </a:r>
           </a:p>
         </p:txBody>
@@ -3943,9 +4961,253 @@
         <p:spPr>
           <a:xfrm>
             <a:off x="0" y="0"/>
-            <a:ext cx="12191695" cy="1143000"/>
+            <a:ext cx="256032" cy="6858000"/>
           </a:xfrm>
           <a:prstGeom prst="rect">
+            <a:avLst/>
+          </a:prstGeom>
+          <a:solidFill>
+            <a:srgbClr val="149E8F"/>
+          </a:solidFill>
+          <a:ln>
+            <a:noFill/>
+          </a:ln>
+          <a:effectLst/>
+        </p:spPr>
+        <p:style>
+          <a:lnRef idx="1">
+            <a:schemeClr val="accent1"/>
+          </a:lnRef>
+          <a:fillRef idx="3">
+            <a:schemeClr val="accent1"/>
+          </a:fillRef>
+          <a:effectRef idx="2">
+            <a:schemeClr val="accent1"/>
+          </a:effectRef>
+          <a:fontRef idx="minor">
+            <a:schemeClr val="lt1"/>
+          </a:fontRef>
+        </p:style>
+        <p:txBody>
+          <a:bodyPr rtlCol="0" anchor="ctr"/>
+          <a:lstStyle/>
+          <a:p>
+            <a:pPr algn="ctr"/>
+          </a:p>
+        </p:txBody>
+      </p:sp>
+      <p:sp>
+        <p:nvSpPr>
+          <p:cNvPr id="3" name="Rectangle 2"/>
+          <p:cNvSpPr/>
+          <p:nvPr/>
+        </p:nvSpPr>
+        <p:spPr>
+          <a:xfrm>
+            <a:off x="640080" y="566928"/>
+            <a:ext cx="146304" cy="566928"/>
+          </a:xfrm>
+          <a:prstGeom prst="rect">
+            <a:avLst/>
+          </a:prstGeom>
+          <a:solidFill>
+            <a:srgbClr val="149E8F"/>
+          </a:solidFill>
+          <a:ln>
+            <a:noFill/>
+          </a:ln>
+          <a:effectLst/>
+        </p:spPr>
+        <p:style>
+          <a:lnRef idx="1">
+            <a:schemeClr val="accent1"/>
+          </a:lnRef>
+          <a:fillRef idx="3">
+            <a:schemeClr val="accent1"/>
+          </a:fillRef>
+          <a:effectRef idx="2">
+            <a:schemeClr val="accent1"/>
+          </a:effectRef>
+          <a:fontRef idx="minor">
+            <a:schemeClr val="lt1"/>
+          </a:fontRef>
+        </p:style>
+        <p:txBody>
+          <a:bodyPr rtlCol="0" anchor="ctr"/>
+          <a:lstStyle/>
+          <a:p>
+            <a:pPr algn="ctr"/>
+          </a:p>
+        </p:txBody>
+      </p:sp>
+      <p:sp>
+        <p:nvSpPr>
+          <p:cNvPr id="4" name="TextBox 3"/>
+          <p:cNvSpPr txBox="1"/>
+          <p:nvPr/>
+        </p:nvSpPr>
+        <p:spPr>
+          <a:xfrm>
+            <a:off x="914400" y="457200"/>
+            <a:ext cx="10607040" cy="868680"/>
+          </a:xfrm>
+          <a:prstGeom prst="rect">
+            <a:avLst/>
+          </a:prstGeom>
+          <a:noFill/>
+        </p:spPr>
+        <p:txBody>
+          <a:bodyPr wrap="square" anchor="t">
+            <a:spAutoFit/>
+          </a:bodyPr>
+          <a:lstStyle/>
+          <a:p>
+            <a:pPr algn="l">
+              <a:spcAft>
+                <a:spcPts val="1000"/>
+              </a:spcAft>
+            </a:pPr>
+            <a:r>
+              <a:rPr sz="3000" b="1">
+                <a:solidFill>
+                  <a:srgbClr val="0F3D5C"/>
+                </a:solidFill>
+                <a:latin typeface="Calibri"/>
+              </a:rPr>
+              <a:t>Cómo funciona (demo)</a:t>
+            </a:r>
+          </a:p>
+        </p:txBody>
+      </p:sp>
+      <p:sp>
+        <p:nvSpPr>
+          <p:cNvPr id="5" name="TextBox 4"/>
+          <p:cNvSpPr txBox="1"/>
+          <p:nvPr/>
+        </p:nvSpPr>
+        <p:spPr>
+          <a:xfrm>
+            <a:off x="914400" y="1298448"/>
+            <a:ext cx="10789920" cy="457200"/>
+          </a:xfrm>
+          <a:prstGeom prst="rect">
+            <a:avLst/>
+          </a:prstGeom>
+          <a:noFill/>
+        </p:spPr>
+        <p:txBody>
+          <a:bodyPr wrap="square" anchor="t">
+            <a:spAutoFit/>
+          </a:bodyPr>
+          <a:lstStyle/>
+          <a:p>
+            <a:pPr algn="l">
+              <a:spcAft>
+                <a:spcPts val="1000"/>
+              </a:spcAft>
+            </a:pPr>
+            <a:r>
+              <a:rPr sz="1600" b="0">
+                <a:solidFill>
+                  <a:srgbClr val="6B6B6B"/>
+                </a:solidFill>
+                <a:latin typeface="Calibri"/>
+              </a:rPr>
+              <a:t>Del criterio a un certificado verificable, en segundos</a:t>
+            </a:r>
+          </a:p>
+        </p:txBody>
+      </p:sp>
+      <p:sp>
+        <p:nvSpPr>
+          <p:cNvPr id="6" name="TextBox 5"/>
+          <p:cNvSpPr txBox="1"/>
+          <p:nvPr/>
+        </p:nvSpPr>
+        <p:spPr>
+          <a:xfrm>
+            <a:off x="640080" y="6400800"/>
+            <a:ext cx="7315200" cy="365760"/>
+          </a:xfrm>
+          <a:prstGeom prst="rect">
+            <a:avLst/>
+          </a:prstGeom>
+          <a:noFill/>
+        </p:spPr>
+        <p:txBody>
+          <a:bodyPr wrap="square" anchor="t">
+            <a:spAutoFit/>
+          </a:bodyPr>
+          <a:lstStyle/>
+          <a:p>
+            <a:pPr algn="l">
+              <a:spcAft>
+                <a:spcPts val="1000"/>
+              </a:spcAft>
+            </a:pPr>
+            <a:r>
+              <a:rPr sz="1000" b="0">
+                <a:solidFill>
+                  <a:srgbClr val="C9D6DE"/>
+                </a:solidFill>
+                <a:latin typeface="Calibri"/>
+              </a:rPr>
+              <a:t>VeriBeca · Asignación transparente de becas</a:t>
+            </a:r>
+          </a:p>
+        </p:txBody>
+      </p:sp>
+      <p:sp>
+        <p:nvSpPr>
+          <p:cNvPr id="7" name="TextBox 6"/>
+          <p:cNvSpPr txBox="1"/>
+          <p:nvPr/>
+        </p:nvSpPr>
+        <p:spPr>
+          <a:xfrm>
+            <a:off x="11247120" y="6400800"/>
+            <a:ext cx="731520" cy="365760"/>
+          </a:xfrm>
+          <a:prstGeom prst="rect">
+            <a:avLst/>
+          </a:prstGeom>
+          <a:noFill/>
+        </p:spPr>
+        <p:txBody>
+          <a:bodyPr wrap="square" anchor="t">
+            <a:spAutoFit/>
+          </a:bodyPr>
+          <a:lstStyle/>
+          <a:p>
+            <a:pPr algn="r">
+              <a:spcAft>
+                <a:spcPts val="1000"/>
+              </a:spcAft>
+            </a:pPr>
+            <a:r>
+              <a:rPr sz="1100" b="1">
+                <a:solidFill>
+                  <a:srgbClr val="6B6B6B"/>
+                </a:solidFill>
+                <a:latin typeface="Calibri"/>
+              </a:rPr>
+              <a:t>4</a:t>
+            </a:r>
+          </a:p>
+        </p:txBody>
+      </p:sp>
+      <p:sp>
+        <p:nvSpPr>
+          <p:cNvPr id="8" name="Rounded Rectangle 7"/>
+          <p:cNvSpPr/>
+          <p:nvPr/>
+        </p:nvSpPr>
+        <p:spPr>
+          <a:xfrm>
+            <a:off x="914400" y="1920240"/>
+            <a:ext cx="10424160" cy="914400"/>
+          </a:xfrm>
+          <a:prstGeom prst="roundRect">
             <a:avLst/>
           </a:prstGeom>
           <a:solidFill>
@@ -3954,6 +5216,7 @@
           <a:ln>
             <a:noFill/>
           </a:ln>
+          <a:effectLst/>
         </p:spPr>
         <p:style>
           <a:lnRef idx="1">
@@ -3970,23 +5233,36 @@
           </a:fontRef>
         </p:style>
         <p:txBody>
-          <a:bodyPr rtlCol="0" anchor="ctr"/>
-          <a:lstStyle/>
-          <a:p>
-            <a:pPr algn="ctr"/>
-          </a:p>
-        </p:txBody>
-      </p:sp>
-      <p:sp>
-        <p:nvSpPr>
-          <p:cNvPr id="3" name="TextBox 2"/>
+          <a:bodyPr rtlCol="0" anchor="ctr" wrap="square"/>
+          <a:lstStyle/>
+          <a:p>
+            <a:pPr algn="ctr">
+              <a:spcAft>
+                <a:spcPts val="1000"/>
+              </a:spcAft>
+            </a:pPr>
+            <a:r>
+              <a:rPr sz="1800" b="1">
+                <a:solidFill>
+                  <a:srgbClr val="9FE8DE"/>
+                </a:solidFill>
+                <a:latin typeface="Calibri"/>
+              </a:rPr>
+              <a:t>SI ingreso_familiar &lt; 300000  Y  promedio &gt;= 7  ENTONCES elegible</a:t>
+            </a:r>
+          </a:p>
+        </p:txBody>
+      </p:sp>
+      <p:sp>
+        <p:nvSpPr>
+          <p:cNvPr id="9" name="TextBox 8"/>
           <p:cNvSpPr txBox="1"/>
           <p:nvPr/>
         </p:nvSpPr>
         <p:spPr>
           <a:xfrm>
-            <a:off x="640080" y="256032"/>
-            <a:ext cx="10058400" cy="822960"/>
+            <a:off x="914400" y="3154680"/>
+            <a:ext cx="10424160" cy="2926080"/>
           </a:xfrm>
           <a:prstGeom prst="rect">
             <a:avLst/>
@@ -3994,88 +5270,18 @@
           <a:noFill/>
         </p:spPr>
         <p:txBody>
-          <a:bodyPr wrap="square">
+          <a:bodyPr wrap="square" anchor="t">
             <a:spAutoFit/>
           </a:bodyPr>
           <a:lstStyle/>
           <a:p>
-            <a:pPr algn="l"/>
-            <a:r>
-              <a:rPr sz="3200" b="1">
-                <a:solidFill>
-                  <a:srgbClr val="FFFFFF"/>
-                </a:solidFill>
-                <a:latin typeface="Calibri"/>
-              </a:rPr>
-              <a:t>La solución</a:t>
-            </a:r>
-          </a:p>
-        </p:txBody>
-      </p:sp>
-      <p:sp>
-        <p:nvSpPr>
-          <p:cNvPr id="4" name="TextBox 3"/>
-          <p:cNvSpPr txBox="1"/>
-          <p:nvPr/>
-        </p:nvSpPr>
-        <p:spPr>
-          <a:xfrm>
-            <a:off x="11338560" y="6309360"/>
-            <a:ext cx="731520" cy="457200"/>
-          </a:xfrm>
-          <a:prstGeom prst="rect">
-            <a:avLst/>
-          </a:prstGeom>
-          <a:noFill/>
-        </p:spPr>
-        <p:txBody>
-          <a:bodyPr wrap="square">
-            <a:spAutoFit/>
-          </a:bodyPr>
-          <a:lstStyle/>
-          <a:p>
-            <a:pPr algn="r"/>
-            <a:r>
-              <a:rPr sz="1200" b="0">
-                <a:solidFill>
-                  <a:srgbClr val="6B6B6B"/>
-                </a:solidFill>
-                <a:latin typeface="Calibri"/>
-              </a:rPr>
-              <a:t>4</a:t>
-            </a:r>
-          </a:p>
-        </p:txBody>
-      </p:sp>
-      <p:sp>
-        <p:nvSpPr>
-          <p:cNvPr id="5" name="TextBox 4"/>
-          <p:cNvSpPr txBox="1"/>
-          <p:nvPr/>
-        </p:nvSpPr>
-        <p:spPr>
-          <a:xfrm>
-            <a:off x="731520" y="1554480"/>
-            <a:ext cx="10698480" cy="4754880"/>
-          </a:xfrm>
-          <a:prstGeom prst="rect">
-            <a:avLst/>
-          </a:prstGeom>
-          <a:noFill/>
-        </p:spPr>
-        <p:txBody>
-          <a:bodyPr wrap="square">
-            <a:spAutoFit/>
-          </a:bodyPr>
-          <a:lstStyle/>
-          <a:p>
             <a:pPr algn="l">
               <a:spcAft>
                 <a:spcPts val="1000"/>
               </a:spcAft>
             </a:pPr>
             <a:r>
-              <a:rPr sz="1800" b="1">
+              <a:rPr sz="1600" b="1">
                 <a:solidFill>
                   <a:srgbClr val="149E8F"/>
                 </a:solidFill>
@@ -4084,13 +5290,13 @@
               <a:t>●  </a:t>
             </a:r>
             <a:r>
-              <a:rPr sz="1900" b="0">
-                <a:solidFill>
-                  <a:srgbClr val="3A3A3A"/>
-                </a:solidFill>
-                <a:latin typeface="Calibri"/>
-              </a:rPr>
-              <a:t>La institución escribe sus reglas en un lenguaje simple y verificable.</a:t>
+              <a:rPr sz="1800" b="0">
+                <a:solidFill>
+                  <a:srgbClr val="2E2E2E"/>
+                </a:solidFill>
+                <a:latin typeface="Calibri"/>
+              </a:rPr>
+              <a:t>Se carga el padrón de postulantes (CSV) y se evalúa con un clic.</a:t>
             </a:r>
           </a:p>
           <a:p>
@@ -4100,7 +5306,7 @@
               </a:spcAft>
             </a:pPr>
             <a:r>
-              <a:rPr sz="1800" b="1">
+              <a:rPr sz="1600" b="1">
                 <a:solidFill>
                   <a:srgbClr val="149E8F"/>
                 </a:solidFill>
@@ -4109,13 +5315,13 @@
               <a:t>●  </a:t>
             </a:r>
             <a:r>
-              <a:rPr sz="1900" b="0">
-                <a:solidFill>
-                  <a:srgbClr val="3A3A3A"/>
-                </a:solidFill>
-                <a:latin typeface="Calibri"/>
-              </a:rPr>
-              <a:t>El sistema valida que la regla esté bien formada (sin errores de tipos).</a:t>
+              <a:rPr sz="1800" b="0">
+                <a:solidFill>
+                  <a:srgbClr val="2E2E2E"/>
+                </a:solidFill>
+                <a:latin typeface="Calibri"/>
+              </a:rPr>
+              <a:t>Sobre 100 postulantes de prueba: 24 elegibles, priorizados en segundos.</a:t>
             </a:r>
           </a:p>
           <a:p>
@@ -4125,7 +5331,7 @@
               </a:spcAft>
             </a:pPr>
             <a:r>
-              <a:rPr sz="1800" b="1">
+              <a:rPr sz="1600" b="1">
                 <a:solidFill>
                   <a:srgbClr val="149E8F"/>
                 </a:solidFill>
@@ -4134,13 +5340,13 @@
               <a:t>●  </a:t>
             </a:r>
             <a:r>
-              <a:rPr sz="1900" b="0">
-                <a:solidFill>
-                  <a:srgbClr val="3A3A3A"/>
-                </a:solidFill>
-                <a:latin typeface="Calibri"/>
-              </a:rPr>
-              <a:t>Aplica la regla a todos los postulantes por igual, automáticamente.</a:t>
+              <a:rPr sz="1800" b="0">
+                <a:solidFill>
+                  <a:srgbClr val="2E2E2E"/>
+                </a:solidFill>
+                <a:latin typeface="Calibri"/>
+              </a:rPr>
+              <a:t>Cada elegible recibe un certificado con un hash único de su decisión.</a:t>
             </a:r>
           </a:p>
           <a:p>
@@ -4150,7 +5356,7 @@
               </a:spcAft>
             </a:pPr>
             <a:r>
-              <a:rPr sz="1800" b="1">
+              <a:rPr sz="1600" b="1">
                 <a:solidFill>
                   <a:srgbClr val="149E8F"/>
                 </a:solidFill>
@@ -4159,13 +5365,13 @@
               <a:t>●  </a:t>
             </a:r>
             <a:r>
-              <a:rPr sz="1900" b="0">
-                <a:solidFill>
-                  <a:srgbClr val="3A3A3A"/>
-                </a:solidFill>
-                <a:latin typeface="Calibri"/>
-              </a:rPr>
-              <a:t>Una IA prioriza a los elegibles según vulnerabilidad.</a:t>
+              <a:rPr sz="1800" b="0">
+                <a:solidFill>
+                  <a:srgbClr val="2E2E2E"/>
+                </a:solidFill>
+                <a:latin typeface="Calibri"/>
+              </a:rPr>
+              <a:t>Ese hash queda registrado en la blockchain y es verificable por cualquiera en el explorer.</a:t>
             </a:r>
           </a:p>
           <a:p>
@@ -4175,7 +5381,7 @@
               </a:spcAft>
             </a:pPr>
             <a:r>
-              <a:rPr sz="1800" b="1">
+              <a:rPr sz="1600" b="1">
                 <a:solidFill>
                   <a:srgbClr val="149E8F"/>
                 </a:solidFill>
@@ -4184,13 +5390,13 @@
               <a:t>●  </a:t>
             </a:r>
             <a:r>
-              <a:rPr sz="1900" b="0">
-                <a:solidFill>
-                  <a:srgbClr val="3A3A3A"/>
-                </a:solidFill>
-                <a:latin typeface="Calibri"/>
-              </a:rPr>
-              <a:t>Cada decisión queda sellada en blockchain: verificable por cualquiera.</a:t>
+              <a:rPr sz="1800" b="0">
+                <a:solidFill>
+                  <a:srgbClr val="2E2E2E"/>
+                </a:solidFill>
+                <a:latin typeface="Calibri"/>
+              </a:rPr>
+              <a:t>Si falla la red, el sistema sigue funcionando en modo de respaldo (la demo nunca se cae).</a:t>
             </a:r>
           </a:p>
         </p:txBody>
@@ -4230,9 +5436,785 @@
         <p:spPr>
           <a:xfrm>
             <a:off x="0" y="0"/>
-            <a:ext cx="12191695" cy="1143000"/>
+            <a:ext cx="256032" cy="6858000"/>
           </a:xfrm>
           <a:prstGeom prst="rect">
+            <a:avLst/>
+          </a:prstGeom>
+          <a:solidFill>
+            <a:srgbClr val="149E8F"/>
+          </a:solidFill>
+          <a:ln>
+            <a:noFill/>
+          </a:ln>
+          <a:effectLst/>
+        </p:spPr>
+        <p:style>
+          <a:lnRef idx="1">
+            <a:schemeClr val="accent1"/>
+          </a:lnRef>
+          <a:fillRef idx="3">
+            <a:schemeClr val="accent1"/>
+          </a:fillRef>
+          <a:effectRef idx="2">
+            <a:schemeClr val="accent1"/>
+          </a:effectRef>
+          <a:fontRef idx="minor">
+            <a:schemeClr val="lt1"/>
+          </a:fontRef>
+        </p:style>
+        <p:txBody>
+          <a:bodyPr rtlCol="0" anchor="ctr"/>
+          <a:lstStyle/>
+          <a:p>
+            <a:pPr algn="ctr"/>
+          </a:p>
+        </p:txBody>
+      </p:sp>
+      <p:sp>
+        <p:nvSpPr>
+          <p:cNvPr id="3" name="Rectangle 2"/>
+          <p:cNvSpPr/>
+          <p:nvPr/>
+        </p:nvSpPr>
+        <p:spPr>
+          <a:xfrm>
+            <a:off x="640080" y="566928"/>
+            <a:ext cx="146304" cy="566928"/>
+          </a:xfrm>
+          <a:prstGeom prst="rect">
+            <a:avLst/>
+          </a:prstGeom>
+          <a:solidFill>
+            <a:srgbClr val="149E8F"/>
+          </a:solidFill>
+          <a:ln>
+            <a:noFill/>
+          </a:ln>
+          <a:effectLst/>
+        </p:spPr>
+        <p:style>
+          <a:lnRef idx="1">
+            <a:schemeClr val="accent1"/>
+          </a:lnRef>
+          <a:fillRef idx="3">
+            <a:schemeClr val="accent1"/>
+          </a:fillRef>
+          <a:effectRef idx="2">
+            <a:schemeClr val="accent1"/>
+          </a:effectRef>
+          <a:fontRef idx="minor">
+            <a:schemeClr val="lt1"/>
+          </a:fontRef>
+        </p:style>
+        <p:txBody>
+          <a:bodyPr rtlCol="0" anchor="ctr"/>
+          <a:lstStyle/>
+          <a:p>
+            <a:pPr algn="ctr"/>
+          </a:p>
+        </p:txBody>
+      </p:sp>
+      <p:sp>
+        <p:nvSpPr>
+          <p:cNvPr id="4" name="TextBox 3"/>
+          <p:cNvSpPr txBox="1"/>
+          <p:nvPr/>
+        </p:nvSpPr>
+        <p:spPr>
+          <a:xfrm>
+            <a:off x="914400" y="457200"/>
+            <a:ext cx="10607040" cy="868680"/>
+          </a:xfrm>
+          <a:prstGeom prst="rect">
+            <a:avLst/>
+          </a:prstGeom>
+          <a:noFill/>
+        </p:spPr>
+        <p:txBody>
+          <a:bodyPr wrap="square" anchor="t">
+            <a:spAutoFit/>
+          </a:bodyPr>
+          <a:lstStyle/>
+          <a:p>
+            <a:pPr algn="l">
+              <a:spcAft>
+                <a:spcPts val="1000"/>
+              </a:spcAft>
+            </a:pPr>
+            <a:r>
+              <a:rPr sz="3000" b="1">
+                <a:solidFill>
+                  <a:srgbClr val="0F3D5C"/>
+                </a:solidFill>
+                <a:latin typeface="Calibri"/>
+              </a:rPr>
+              <a:t>Arquitectura</a:t>
+            </a:r>
+          </a:p>
+        </p:txBody>
+      </p:sp>
+      <p:sp>
+        <p:nvSpPr>
+          <p:cNvPr id="5" name="TextBox 4"/>
+          <p:cNvSpPr txBox="1"/>
+          <p:nvPr/>
+        </p:nvSpPr>
+        <p:spPr>
+          <a:xfrm>
+            <a:off x="914400" y="1298448"/>
+            <a:ext cx="10789920" cy="457200"/>
+          </a:xfrm>
+          <a:prstGeom prst="rect">
+            <a:avLst/>
+          </a:prstGeom>
+          <a:noFill/>
+        </p:spPr>
+        <p:txBody>
+          <a:bodyPr wrap="square" anchor="t">
+            <a:spAutoFit/>
+          </a:bodyPr>
+          <a:lstStyle/>
+          <a:p>
+            <a:pPr algn="l">
+              <a:spcAft>
+                <a:spcPts val="1000"/>
+              </a:spcAft>
+            </a:pPr>
+            <a:r>
+              <a:rPr sz="1600" b="0">
+                <a:solidFill>
+                  <a:srgbClr val="6B6B6B"/>
+                </a:solidFill>
+                <a:latin typeface="Calibri"/>
+              </a:rPr>
+              <a:t>Módulos desacoplados, cada uno con una responsabilidad clara</a:t>
+            </a:r>
+          </a:p>
+        </p:txBody>
+      </p:sp>
+      <p:sp>
+        <p:nvSpPr>
+          <p:cNvPr id="6" name="TextBox 5"/>
+          <p:cNvSpPr txBox="1"/>
+          <p:nvPr/>
+        </p:nvSpPr>
+        <p:spPr>
+          <a:xfrm>
+            <a:off x="640080" y="6400800"/>
+            <a:ext cx="7315200" cy="365760"/>
+          </a:xfrm>
+          <a:prstGeom prst="rect">
+            <a:avLst/>
+          </a:prstGeom>
+          <a:noFill/>
+        </p:spPr>
+        <p:txBody>
+          <a:bodyPr wrap="square" anchor="t">
+            <a:spAutoFit/>
+          </a:bodyPr>
+          <a:lstStyle/>
+          <a:p>
+            <a:pPr algn="l">
+              <a:spcAft>
+                <a:spcPts val="1000"/>
+              </a:spcAft>
+            </a:pPr>
+            <a:r>
+              <a:rPr sz="1000" b="0">
+                <a:solidFill>
+                  <a:srgbClr val="C9D6DE"/>
+                </a:solidFill>
+                <a:latin typeface="Calibri"/>
+              </a:rPr>
+              <a:t>VeriBeca · Asignación transparente de becas</a:t>
+            </a:r>
+          </a:p>
+        </p:txBody>
+      </p:sp>
+      <p:sp>
+        <p:nvSpPr>
+          <p:cNvPr id="7" name="TextBox 6"/>
+          <p:cNvSpPr txBox="1"/>
+          <p:nvPr/>
+        </p:nvSpPr>
+        <p:spPr>
+          <a:xfrm>
+            <a:off x="11247120" y="6400800"/>
+            <a:ext cx="731520" cy="365760"/>
+          </a:xfrm>
+          <a:prstGeom prst="rect">
+            <a:avLst/>
+          </a:prstGeom>
+          <a:noFill/>
+        </p:spPr>
+        <p:txBody>
+          <a:bodyPr wrap="square" anchor="t">
+            <a:spAutoFit/>
+          </a:bodyPr>
+          <a:lstStyle/>
+          <a:p>
+            <a:pPr algn="r">
+              <a:spcAft>
+                <a:spcPts val="1000"/>
+              </a:spcAft>
+            </a:pPr>
+            <a:r>
+              <a:rPr sz="1100" b="1">
+                <a:solidFill>
+                  <a:srgbClr val="6B6B6B"/>
+                </a:solidFill>
+                <a:latin typeface="Calibri"/>
+              </a:rPr>
+              <a:t>5</a:t>
+            </a:r>
+          </a:p>
+        </p:txBody>
+      </p:sp>
+      <p:sp>
+        <p:nvSpPr>
+          <p:cNvPr id="8" name="Rounded Rectangle 7"/>
+          <p:cNvSpPr/>
+          <p:nvPr/>
+        </p:nvSpPr>
+        <p:spPr>
+          <a:xfrm>
+            <a:off x="4389120" y="1783080"/>
+            <a:ext cx="3383280" cy="685800"/>
+          </a:xfrm>
+          <a:prstGeom prst="roundRect">
+            <a:avLst/>
+          </a:prstGeom>
+          <a:solidFill>
+            <a:srgbClr val="149E8F"/>
+          </a:solidFill>
+          <a:ln>
+            <a:noFill/>
+          </a:ln>
+          <a:effectLst/>
+        </p:spPr>
+        <p:style>
+          <a:lnRef idx="1">
+            <a:schemeClr val="accent1"/>
+          </a:lnRef>
+          <a:fillRef idx="3">
+            <a:schemeClr val="accent1"/>
+          </a:fillRef>
+          <a:effectRef idx="2">
+            <a:schemeClr val="accent1"/>
+          </a:effectRef>
+          <a:fontRef idx="minor">
+            <a:schemeClr val="lt1"/>
+          </a:fontRef>
+        </p:style>
+        <p:txBody>
+          <a:bodyPr rtlCol="0" anchor="ctr"/>
+          <a:lstStyle/>
+          <a:p>
+            <a:pPr algn="ctr"/>
+          </a:p>
+        </p:txBody>
+      </p:sp>
+      <p:sp>
+        <p:nvSpPr>
+          <p:cNvPr id="9" name="TextBox 8"/>
+          <p:cNvSpPr txBox="1"/>
+          <p:nvPr/>
+        </p:nvSpPr>
+        <p:spPr>
+          <a:xfrm>
+            <a:off x="4389120" y="1783080"/>
+            <a:ext cx="3383280" cy="685800"/>
+          </a:xfrm>
+          <a:prstGeom prst="rect">
+            <a:avLst/>
+          </a:prstGeom>
+          <a:noFill/>
+        </p:spPr>
+        <p:txBody>
+          <a:bodyPr wrap="square" anchor="ctr">
+            <a:spAutoFit/>
+          </a:bodyPr>
+          <a:lstStyle/>
+          <a:p>
+            <a:pPr algn="ctr">
+              <a:spcAft>
+                <a:spcPts val="1000"/>
+              </a:spcAft>
+            </a:pPr>
+            <a:r>
+              <a:rPr sz="1600" b="1">
+                <a:solidFill>
+                  <a:srgbClr val="FFFFFF"/>
+                </a:solidFill>
+                <a:latin typeface="Calibri"/>
+              </a:rPr>
+              <a:t>Interfaz (Streamlit)</a:t>
+            </a:r>
+          </a:p>
+        </p:txBody>
+      </p:sp>
+      <p:sp>
+        <p:nvSpPr>
+          <p:cNvPr id="10" name="Down Arrow 9"/>
+          <p:cNvSpPr/>
+          <p:nvPr/>
+        </p:nvSpPr>
+        <p:spPr>
+          <a:xfrm>
+            <a:off x="5852160" y="2514600"/>
+            <a:ext cx="457200" cy="411480"/>
+          </a:xfrm>
+          <a:prstGeom prst="downArrow">
+            <a:avLst/>
+          </a:prstGeom>
+          <a:solidFill>
+            <a:srgbClr val="E28A2B"/>
+          </a:solidFill>
+          <a:ln>
+            <a:noFill/>
+          </a:ln>
+          <a:effectLst/>
+        </p:spPr>
+        <p:style>
+          <a:lnRef idx="1">
+            <a:schemeClr val="accent1"/>
+          </a:lnRef>
+          <a:fillRef idx="3">
+            <a:schemeClr val="accent1"/>
+          </a:fillRef>
+          <a:effectRef idx="2">
+            <a:schemeClr val="accent1"/>
+          </a:effectRef>
+          <a:fontRef idx="minor">
+            <a:schemeClr val="lt1"/>
+          </a:fontRef>
+        </p:style>
+        <p:txBody>
+          <a:bodyPr rtlCol="0" anchor="ctr"/>
+          <a:lstStyle/>
+          <a:p>
+            <a:pPr algn="ctr"/>
+          </a:p>
+        </p:txBody>
+      </p:sp>
+      <p:sp>
+        <p:nvSpPr>
+          <p:cNvPr id="11" name="Rounded Rectangle 10"/>
+          <p:cNvSpPr/>
+          <p:nvPr/>
+        </p:nvSpPr>
+        <p:spPr>
+          <a:xfrm>
+            <a:off x="4389120" y="2971800"/>
+            <a:ext cx="3383280" cy="685800"/>
+          </a:xfrm>
+          <a:prstGeom prst="roundRect">
+            <a:avLst/>
+          </a:prstGeom>
+          <a:solidFill>
+            <a:srgbClr val="165A86"/>
+          </a:solidFill>
+          <a:ln>
+            <a:noFill/>
+          </a:ln>
+          <a:effectLst/>
+        </p:spPr>
+        <p:style>
+          <a:lnRef idx="1">
+            <a:schemeClr val="accent1"/>
+          </a:lnRef>
+          <a:fillRef idx="3">
+            <a:schemeClr val="accent1"/>
+          </a:fillRef>
+          <a:effectRef idx="2">
+            <a:schemeClr val="accent1"/>
+          </a:effectRef>
+          <a:fontRef idx="minor">
+            <a:schemeClr val="lt1"/>
+          </a:fontRef>
+        </p:style>
+        <p:txBody>
+          <a:bodyPr rtlCol="0" anchor="ctr"/>
+          <a:lstStyle/>
+          <a:p>
+            <a:pPr algn="ctr"/>
+          </a:p>
+        </p:txBody>
+      </p:sp>
+      <p:sp>
+        <p:nvSpPr>
+          <p:cNvPr id="12" name="TextBox 11"/>
+          <p:cNvSpPr txBox="1"/>
+          <p:nvPr/>
+        </p:nvSpPr>
+        <p:spPr>
+          <a:xfrm>
+            <a:off x="4389120" y="2971800"/>
+            <a:ext cx="3383280" cy="685800"/>
+          </a:xfrm>
+          <a:prstGeom prst="rect">
+            <a:avLst/>
+          </a:prstGeom>
+          <a:noFill/>
+        </p:spPr>
+        <p:txBody>
+          <a:bodyPr wrap="square" anchor="ctr">
+            <a:spAutoFit/>
+          </a:bodyPr>
+          <a:lstStyle/>
+          <a:p>
+            <a:pPr algn="ctr">
+              <a:spcAft>
+                <a:spcPts val="1000"/>
+              </a:spcAft>
+            </a:pPr>
+            <a:r>
+              <a:rPr sz="1600" b="1">
+                <a:solidFill>
+                  <a:srgbClr val="FFFFFF"/>
+                </a:solidFill>
+                <a:latin typeface="Calibri"/>
+              </a:rPr>
+              <a:t>Backend / API (FastAPI)</a:t>
+            </a:r>
+          </a:p>
+        </p:txBody>
+      </p:sp>
+      <p:sp>
+        <p:nvSpPr>
+          <p:cNvPr id="13" name="Down Arrow 12"/>
+          <p:cNvSpPr/>
+          <p:nvPr/>
+        </p:nvSpPr>
+        <p:spPr>
+          <a:xfrm>
+            <a:off x="2331720" y="3703320"/>
+            <a:ext cx="411480" cy="365760"/>
+          </a:xfrm>
+          <a:prstGeom prst="downArrow">
+            <a:avLst/>
+          </a:prstGeom>
+          <a:solidFill>
+            <a:srgbClr val="149E8F"/>
+          </a:solidFill>
+          <a:ln>
+            <a:noFill/>
+          </a:ln>
+          <a:effectLst/>
+        </p:spPr>
+        <p:style>
+          <a:lnRef idx="1">
+            <a:schemeClr val="accent1"/>
+          </a:lnRef>
+          <a:fillRef idx="3">
+            <a:schemeClr val="accent1"/>
+          </a:fillRef>
+          <a:effectRef idx="2">
+            <a:schemeClr val="accent1"/>
+          </a:effectRef>
+          <a:fontRef idx="minor">
+            <a:schemeClr val="lt1"/>
+          </a:fontRef>
+        </p:style>
+        <p:txBody>
+          <a:bodyPr rtlCol="0" anchor="ctr"/>
+          <a:lstStyle/>
+          <a:p>
+            <a:pPr algn="ctr"/>
+          </a:p>
+        </p:txBody>
+      </p:sp>
+      <p:sp>
+        <p:nvSpPr>
+          <p:cNvPr id="14" name="Rounded Rectangle 13"/>
+          <p:cNvSpPr/>
+          <p:nvPr/>
+        </p:nvSpPr>
+        <p:spPr>
+          <a:xfrm>
+            <a:off x="1097280" y="4160520"/>
+            <a:ext cx="2926080" cy="1691640"/>
+          </a:xfrm>
+          <a:prstGeom prst="roundRect">
+            <a:avLst/>
+          </a:prstGeom>
+          <a:solidFill>
+            <a:srgbClr val="F3F6F9"/>
+          </a:solidFill>
+          <a:ln w="25400">
+            <a:solidFill>
+              <a:srgbClr val="149E8F"/>
+            </a:solidFill>
+          </a:ln>
+          <a:effectLst/>
+        </p:spPr>
+        <p:style>
+          <a:lnRef idx="1">
+            <a:schemeClr val="accent1"/>
+          </a:lnRef>
+          <a:fillRef idx="3">
+            <a:schemeClr val="accent1"/>
+          </a:fillRef>
+          <a:effectRef idx="2">
+            <a:schemeClr val="accent1"/>
+          </a:effectRef>
+          <a:fontRef idx="minor">
+            <a:schemeClr val="lt1"/>
+          </a:fontRef>
+        </p:style>
+        <p:txBody>
+          <a:bodyPr rtlCol="0" anchor="ctr"/>
+          <a:lstStyle/>
+          <a:p>
+            <a:pPr algn="ctr"/>
+          </a:p>
+        </p:txBody>
+      </p:sp>
+      <p:sp>
+        <p:nvSpPr>
+          <p:cNvPr id="15" name="TextBox 14"/>
+          <p:cNvSpPr txBox="1"/>
+          <p:nvPr/>
+        </p:nvSpPr>
+        <p:spPr>
+          <a:xfrm>
+            <a:off x="1280160" y="4343400"/>
+            <a:ext cx="2560320" cy="1371600"/>
+          </a:xfrm>
+          <a:prstGeom prst="rect">
+            <a:avLst/>
+          </a:prstGeom>
+          <a:noFill/>
+        </p:spPr>
+        <p:txBody>
+          <a:bodyPr wrap="square" anchor="ctr">
+            <a:spAutoFit/>
+          </a:bodyPr>
+          <a:lstStyle/>
+          <a:p>
+            <a:pPr algn="ctr">
+              <a:spcAft>
+                <a:spcPts val="800"/>
+              </a:spcAft>
+            </a:pPr>
+            <a:r>
+              <a:rPr sz="1800" b="1">
+                <a:solidFill>
+                  <a:srgbClr val="149E8F"/>
+                </a:solidFill>
+                <a:latin typeface="Calibri"/>
+              </a:rPr>
+              <a:t>Motor DSL</a:t>
+            </a:r>
+          </a:p>
+          <a:p>
+            <a:pPr algn="ctr">
+              <a:spcAft>
+                <a:spcPts val="200"/>
+              </a:spcAft>
+            </a:pPr>
+            <a:r>
+              <a:rPr sz="1300" b="0">
+                <a:solidFill>
+                  <a:srgbClr val="2E2E2E"/>
+                </a:solidFill>
+                <a:latin typeface="Calibri"/>
+              </a:rPr>
+              <a:t>lexer → parser →</a:t>
+            </a:r>
+          </a:p>
+          <a:p>
+            <a:pPr algn="ctr">
+              <a:spcAft>
+                <a:spcPts val="200"/>
+              </a:spcAft>
+            </a:pPr>
+            <a:r>
+              <a:rPr sz="1300" b="0">
+                <a:solidFill>
+                  <a:srgbClr val="2E2E2E"/>
+                </a:solidFill>
+                <a:latin typeface="Calibri"/>
+              </a:rPr>
+              <a:t>type-checker → intérprete</a:t>
+            </a:r>
+          </a:p>
+        </p:txBody>
+      </p:sp>
+      <p:sp>
+        <p:nvSpPr>
+          <p:cNvPr id="16" name="Down Arrow 15"/>
+          <p:cNvSpPr/>
+          <p:nvPr/>
+        </p:nvSpPr>
+        <p:spPr>
+          <a:xfrm>
+            <a:off x="5870448" y="3703320"/>
+            <a:ext cx="411480" cy="365760"/>
+          </a:xfrm>
+          <a:prstGeom prst="downArrow">
+            <a:avLst/>
+          </a:prstGeom>
+          <a:solidFill>
+            <a:srgbClr val="E28A2B"/>
+          </a:solidFill>
+          <a:ln>
+            <a:noFill/>
+          </a:ln>
+          <a:effectLst/>
+        </p:spPr>
+        <p:style>
+          <a:lnRef idx="1">
+            <a:schemeClr val="accent1"/>
+          </a:lnRef>
+          <a:fillRef idx="3">
+            <a:schemeClr val="accent1"/>
+          </a:fillRef>
+          <a:effectRef idx="2">
+            <a:schemeClr val="accent1"/>
+          </a:effectRef>
+          <a:fontRef idx="minor">
+            <a:schemeClr val="lt1"/>
+          </a:fontRef>
+        </p:style>
+        <p:txBody>
+          <a:bodyPr rtlCol="0" anchor="ctr"/>
+          <a:lstStyle/>
+          <a:p>
+            <a:pPr algn="ctr"/>
+          </a:p>
+        </p:txBody>
+      </p:sp>
+      <p:sp>
+        <p:nvSpPr>
+          <p:cNvPr id="17" name="Rounded Rectangle 16"/>
+          <p:cNvSpPr/>
+          <p:nvPr/>
+        </p:nvSpPr>
+        <p:spPr>
+          <a:xfrm>
+            <a:off x="4636008" y="4160520"/>
+            <a:ext cx="2926080" cy="1691640"/>
+          </a:xfrm>
+          <a:prstGeom prst="roundRect">
+            <a:avLst/>
+          </a:prstGeom>
+          <a:solidFill>
+            <a:srgbClr val="F3F6F9"/>
+          </a:solidFill>
+          <a:ln w="25400">
+            <a:solidFill>
+              <a:srgbClr val="E28A2B"/>
+            </a:solidFill>
+          </a:ln>
+          <a:effectLst/>
+        </p:spPr>
+        <p:style>
+          <a:lnRef idx="1">
+            <a:schemeClr val="accent1"/>
+          </a:lnRef>
+          <a:fillRef idx="3">
+            <a:schemeClr val="accent1"/>
+          </a:fillRef>
+          <a:effectRef idx="2">
+            <a:schemeClr val="accent1"/>
+          </a:effectRef>
+          <a:fontRef idx="minor">
+            <a:schemeClr val="lt1"/>
+          </a:fontRef>
+        </p:style>
+        <p:txBody>
+          <a:bodyPr rtlCol="0" anchor="ctr"/>
+          <a:lstStyle/>
+          <a:p>
+            <a:pPr algn="ctr"/>
+          </a:p>
+        </p:txBody>
+      </p:sp>
+      <p:sp>
+        <p:nvSpPr>
+          <p:cNvPr id="18" name="TextBox 17"/>
+          <p:cNvSpPr txBox="1"/>
+          <p:nvPr/>
+        </p:nvSpPr>
+        <p:spPr>
+          <a:xfrm>
+            <a:off x="4818888" y="4343400"/>
+            <a:ext cx="2560320" cy="1371600"/>
+          </a:xfrm>
+          <a:prstGeom prst="rect">
+            <a:avLst/>
+          </a:prstGeom>
+          <a:noFill/>
+        </p:spPr>
+        <p:txBody>
+          <a:bodyPr wrap="square" anchor="ctr">
+            <a:spAutoFit/>
+          </a:bodyPr>
+          <a:lstStyle/>
+          <a:p>
+            <a:pPr algn="ctr">
+              <a:spcAft>
+                <a:spcPts val="800"/>
+              </a:spcAft>
+            </a:pPr>
+            <a:r>
+              <a:rPr sz="1800" b="1">
+                <a:solidFill>
+                  <a:srgbClr val="E28A2B"/>
+                </a:solidFill>
+                <a:latin typeface="Calibri"/>
+              </a:rPr>
+              <a:t>IA</a:t>
+            </a:r>
+          </a:p>
+          <a:p>
+            <a:pPr algn="ctr">
+              <a:spcAft>
+                <a:spcPts val="200"/>
+              </a:spcAft>
+            </a:pPr>
+            <a:r>
+              <a:rPr sz="1300" b="0">
+                <a:solidFill>
+                  <a:srgbClr val="2E2E2E"/>
+                </a:solidFill>
+                <a:latin typeface="Calibri"/>
+              </a:rPr>
+              <a:t>scikit-learn:</a:t>
+            </a:r>
+          </a:p>
+          <a:p>
+            <a:pPr algn="ctr">
+              <a:spcAft>
+                <a:spcPts val="200"/>
+              </a:spcAft>
+            </a:pPr>
+            <a:r>
+              <a:rPr sz="1300" b="0">
+                <a:solidFill>
+                  <a:srgbClr val="2E2E2E"/>
+                </a:solidFill>
+                <a:latin typeface="Calibri"/>
+              </a:rPr>
+              <a:t>scoring de vulnerabilidad</a:t>
+            </a:r>
+          </a:p>
+        </p:txBody>
+      </p:sp>
+      <p:sp>
+        <p:nvSpPr>
+          <p:cNvPr id="19" name="Down Arrow 18"/>
+          <p:cNvSpPr/>
+          <p:nvPr/>
+        </p:nvSpPr>
+        <p:spPr>
+          <a:xfrm>
+            <a:off x="9409176" y="3703320"/>
+            <a:ext cx="411480" cy="365760"/>
+          </a:xfrm>
+          <a:prstGeom prst="downArrow">
             <a:avLst/>
           </a:prstGeom>
           <a:solidFill>
@@ -4241,6 +6223,7 @@
           <a:ln>
             <a:noFill/>
           </a:ln>
+          <a:effectLst/>
         </p:spPr>
         <p:style>
           <a:lnRef idx="1">
@@ -4266,14 +6249,60 @@
       </p:sp>
       <p:sp>
         <p:nvSpPr>
-          <p:cNvPr id="3" name="TextBox 2"/>
+          <p:cNvPr id="20" name="Rounded Rectangle 19"/>
+          <p:cNvSpPr/>
+          <p:nvPr/>
+        </p:nvSpPr>
+        <p:spPr>
+          <a:xfrm>
+            <a:off x="8174736" y="4160520"/>
+            <a:ext cx="2926080" cy="1691640"/>
+          </a:xfrm>
+          <a:prstGeom prst="roundRect">
+            <a:avLst/>
+          </a:prstGeom>
+          <a:solidFill>
+            <a:srgbClr val="F3F6F9"/>
+          </a:solidFill>
+          <a:ln w="25400">
+            <a:solidFill>
+              <a:srgbClr val="0F3D5C"/>
+            </a:solidFill>
+          </a:ln>
+          <a:effectLst/>
+        </p:spPr>
+        <p:style>
+          <a:lnRef idx="1">
+            <a:schemeClr val="accent1"/>
+          </a:lnRef>
+          <a:fillRef idx="3">
+            <a:schemeClr val="accent1"/>
+          </a:fillRef>
+          <a:effectRef idx="2">
+            <a:schemeClr val="accent1"/>
+          </a:effectRef>
+          <a:fontRef idx="minor">
+            <a:schemeClr val="lt1"/>
+          </a:fontRef>
+        </p:style>
+        <p:txBody>
+          <a:bodyPr rtlCol="0" anchor="ctr"/>
+          <a:lstStyle/>
+          <a:p>
+            <a:pPr algn="ctr"/>
+          </a:p>
+        </p:txBody>
+      </p:sp>
+      <p:sp>
+        <p:nvSpPr>
+          <p:cNvPr id="21" name="TextBox 20"/>
           <p:cNvSpPr txBox="1"/>
           <p:nvPr/>
         </p:nvSpPr>
         <p:spPr>
           <a:xfrm>
-            <a:off x="640080" y="256032"/>
-            <a:ext cx="10058400" cy="822960"/>
+            <a:off x="8357615" y="4343400"/>
+            <a:ext cx="2560320" cy="1371600"/>
           </a:xfrm>
           <a:prstGeom prst="rect">
             <a:avLst/>
@@ -4281,203 +6310,56 @@
           <a:noFill/>
         </p:spPr>
         <p:txBody>
-          <a:bodyPr wrap="square">
+          <a:bodyPr wrap="square" anchor="ctr">
             <a:spAutoFit/>
           </a:bodyPr>
           <a:lstStyle/>
           <a:p>
-            <a:pPr algn="l"/>
-            <a:r>
-              <a:rPr sz="3200" b="1">
-                <a:solidFill>
-                  <a:srgbClr val="FFFFFF"/>
-                </a:solidFill>
-                <a:latin typeface="Calibri"/>
-              </a:rPr>
-              <a:t>Cómo funciona (demo)</a:t>
-            </a:r>
-          </a:p>
-        </p:txBody>
-      </p:sp>
-      <p:sp>
-        <p:nvSpPr>
-          <p:cNvPr id="4" name="TextBox 3"/>
-          <p:cNvSpPr txBox="1"/>
-          <p:nvPr/>
-        </p:nvSpPr>
-        <p:spPr>
-          <a:xfrm>
-            <a:off x="11338560" y="6309360"/>
-            <a:ext cx="731520" cy="457200"/>
-          </a:xfrm>
-          <a:prstGeom prst="rect">
-            <a:avLst/>
-          </a:prstGeom>
-          <a:noFill/>
-        </p:spPr>
-        <p:txBody>
-          <a:bodyPr wrap="square">
-            <a:spAutoFit/>
-          </a:bodyPr>
-          <a:lstStyle/>
-          <a:p>
-            <a:pPr algn="r"/>
-            <a:r>
-              <a:rPr sz="1200" b="0">
-                <a:solidFill>
-                  <a:srgbClr val="6B6B6B"/>
-                </a:solidFill>
-                <a:latin typeface="Calibri"/>
-              </a:rPr>
-              <a:t>5</a:t>
-            </a:r>
-          </a:p>
-        </p:txBody>
-      </p:sp>
-      <p:sp>
-        <p:nvSpPr>
-          <p:cNvPr id="5" name="TextBox 4"/>
-          <p:cNvSpPr txBox="1"/>
-          <p:nvPr/>
-        </p:nvSpPr>
-        <p:spPr>
-          <a:xfrm>
-            <a:off x="731520" y="1554480"/>
-            <a:ext cx="10698480" cy="4754880"/>
-          </a:xfrm>
-          <a:prstGeom prst="rect">
-            <a:avLst/>
-          </a:prstGeom>
-          <a:noFill/>
-        </p:spPr>
-        <p:txBody>
-          <a:bodyPr wrap="square">
-            <a:spAutoFit/>
-          </a:bodyPr>
-          <a:lstStyle/>
-          <a:p>
-            <a:pPr algn="l">
-              <a:spcAft>
-                <a:spcPts val="1000"/>
+            <a:pPr algn="ctr">
+              <a:spcAft>
+                <a:spcPts val="800"/>
               </a:spcAft>
             </a:pPr>
             <a:r>
               <a:rPr sz="1800" b="1">
                 <a:solidFill>
-                  <a:srgbClr val="149E8F"/>
-                </a:solidFill>
-                <a:latin typeface="Calibri"/>
-              </a:rPr>
-              <a:t>●  </a:t>
-            </a:r>
-            <a:r>
-              <a:rPr sz="1900" b="0">
-                <a:solidFill>
-                  <a:srgbClr val="3A3A3A"/>
-                </a:solidFill>
-                <a:latin typeface="Calibri"/>
-              </a:rPr>
-              <a:t>Regla de ejemplo:</a:t>
-            </a:r>
-          </a:p>
-          <a:p>
-            <a:pPr lvl="1" algn="l">
-              <a:spcAft>
-                <a:spcPts val="1000"/>
-              </a:spcAft>
-            </a:pPr>
-            <a:r>
-              <a:rPr sz="1600" b="0">
-                <a:solidFill>
-                  <a:srgbClr val="6B6B6B"/>
-                </a:solidFill>
-                <a:latin typeface="Calibri"/>
-              </a:rPr>
-              <a:t>–  </a:t>
-            </a:r>
-            <a:r>
-              <a:rPr sz="1600" b="0">
-                <a:solidFill>
-                  <a:srgbClr val="6B6B6B"/>
-                </a:solidFill>
-                <a:latin typeface="Calibri"/>
-              </a:rPr>
-              <a:t>SI ingreso_familiar &lt; 300000 Y promedio &gt;= 7 ENTONCES elegible</a:t>
-            </a:r>
-          </a:p>
-          <a:p>
-            <a:pPr algn="l">
-              <a:spcAft>
-                <a:spcPts val="1000"/>
-              </a:spcAft>
-            </a:pPr>
-            <a:r>
-              <a:rPr sz="1800" b="1">
-                <a:solidFill>
-                  <a:srgbClr val="149E8F"/>
-                </a:solidFill>
-                <a:latin typeface="Calibri"/>
-              </a:rPr>
-              <a:t>●  </a:t>
-            </a:r>
-            <a:r>
-              <a:rPr sz="1900" b="0">
-                <a:solidFill>
-                  <a:srgbClr val="3A3A3A"/>
-                </a:solidFill>
-                <a:latin typeface="Calibri"/>
-              </a:rPr>
-              <a:t>Validar → cargar postulantes → evaluar → ver ranking + certificado.</a:t>
-            </a:r>
-          </a:p>
-          <a:p>
-            <a:pPr algn="l">
-              <a:spcAft>
-                <a:spcPts val="1000"/>
-              </a:spcAft>
-            </a:pPr>
-            <a:r>
-              <a:rPr sz="1800" b="1">
-                <a:solidFill>
-                  <a:srgbClr val="149E8F"/>
-                </a:solidFill>
-                <a:latin typeface="Calibri"/>
-              </a:rPr>
-              <a:t>●  </a:t>
-            </a:r>
-            <a:r>
-              <a:rPr sz="1900" b="0">
-                <a:solidFill>
-                  <a:srgbClr val="3A3A3A"/>
-                </a:solidFill>
-                <a:latin typeface="Calibri"/>
-              </a:rPr>
-              <a:t>Sobre 100 postulantes: 24 elegibles, priorizados en segundos.</a:t>
-            </a:r>
-          </a:p>
-          <a:p>
-            <a:pPr algn="l">
-              <a:spcAft>
-                <a:spcPts val="1000"/>
-              </a:spcAft>
-            </a:pPr>
-            <a:r>
-              <a:rPr sz="1800" b="1">
-                <a:solidFill>
-                  <a:srgbClr val="149E8F"/>
-                </a:solidFill>
-                <a:latin typeface="Calibri"/>
-              </a:rPr>
-              <a:t>●  </a:t>
-            </a:r>
-            <a:r>
-              <a:rPr sz="1900" b="0">
-                <a:solidFill>
-                  <a:srgbClr val="3A3A3A"/>
-                </a:solidFill>
-                <a:latin typeface="Calibri"/>
-              </a:rPr>
-              <a:t>Cada certificado tiene un hash verificable en el explorer de la blockchain.</a:t>
+                  <a:srgbClr val="0F3D5C"/>
+                </a:solidFill>
+                <a:latin typeface="Calibri"/>
+              </a:rPr>
+              <a:t>Blockchain</a:t>
+            </a:r>
+          </a:p>
+          <a:p>
+            <a:pPr algn="ctr">
+              <a:spcAft>
+                <a:spcPts val="200"/>
+              </a:spcAft>
+            </a:pPr>
+            <a:r>
+              <a:rPr sz="1300" b="0">
+                <a:solidFill>
+                  <a:srgbClr val="2E2E2E"/>
+                </a:solidFill>
+                <a:latin typeface="Calibri"/>
+              </a:rPr>
+              <a:t>smart contract en testnet</a:t>
+            </a:r>
+          </a:p>
+          <a:p>
+            <a:pPr algn="ctr">
+              <a:spcAft>
+                <a:spcPts val="200"/>
+              </a:spcAft>
+            </a:pPr>
+            <a:r>
+              <a:rPr sz="1300" b="0">
+                <a:solidFill>
+                  <a:srgbClr val="2E2E2E"/>
+                </a:solidFill>
+                <a:latin typeface="Calibri"/>
+              </a:rPr>
+              <a:t>+ fallback local</a:t>
             </a:r>
           </a:p>
         </p:txBody>
@@ -4517,17 +6399,18 @@
         <p:spPr>
           <a:xfrm>
             <a:off x="0" y="0"/>
-            <a:ext cx="12191695" cy="1143000"/>
+            <a:ext cx="256032" cy="6858000"/>
           </a:xfrm>
           <a:prstGeom prst="rect">
             <a:avLst/>
           </a:prstGeom>
           <a:solidFill>
-            <a:srgbClr val="0F3D5C"/>
+            <a:srgbClr val="149E8F"/>
           </a:solidFill>
           <a:ln>
             <a:noFill/>
           </a:ln>
+          <a:effectLst/>
         </p:spPr>
         <p:style>
           <a:lnRef idx="1">
@@ -4553,14 +6436,58 @@
       </p:sp>
       <p:sp>
         <p:nvSpPr>
-          <p:cNvPr id="3" name="TextBox 2"/>
+          <p:cNvPr id="3" name="Rectangle 2"/>
+          <p:cNvSpPr/>
+          <p:nvPr/>
+        </p:nvSpPr>
+        <p:spPr>
+          <a:xfrm>
+            <a:off x="640080" y="566928"/>
+            <a:ext cx="146304" cy="566928"/>
+          </a:xfrm>
+          <a:prstGeom prst="rect">
+            <a:avLst/>
+          </a:prstGeom>
+          <a:solidFill>
+            <a:srgbClr val="149E8F"/>
+          </a:solidFill>
+          <a:ln>
+            <a:noFill/>
+          </a:ln>
+          <a:effectLst/>
+        </p:spPr>
+        <p:style>
+          <a:lnRef idx="1">
+            <a:schemeClr val="accent1"/>
+          </a:lnRef>
+          <a:fillRef idx="3">
+            <a:schemeClr val="accent1"/>
+          </a:fillRef>
+          <a:effectRef idx="2">
+            <a:schemeClr val="accent1"/>
+          </a:effectRef>
+          <a:fontRef idx="minor">
+            <a:schemeClr val="lt1"/>
+          </a:fontRef>
+        </p:style>
+        <p:txBody>
+          <a:bodyPr rtlCol="0" anchor="ctr"/>
+          <a:lstStyle/>
+          <a:p>
+            <a:pPr algn="ctr"/>
+          </a:p>
+        </p:txBody>
+      </p:sp>
+      <p:sp>
+        <p:nvSpPr>
+          <p:cNvPr id="4" name="TextBox 3"/>
           <p:cNvSpPr txBox="1"/>
           <p:nvPr/>
         </p:nvSpPr>
         <p:spPr>
           <a:xfrm>
-            <a:off x="640080" y="256032"/>
-            <a:ext cx="10058400" cy="822960"/>
+            <a:off x="914400" y="457200"/>
+            <a:ext cx="10607040" cy="868680"/>
           </a:xfrm>
           <a:prstGeom prst="rect">
             <a:avLst/>
@@ -4568,35 +6495,156 @@
           <a:noFill/>
         </p:spPr>
         <p:txBody>
-          <a:bodyPr wrap="square">
+          <a:bodyPr wrap="square" anchor="t">
             <a:spAutoFit/>
           </a:bodyPr>
           <a:lstStyle/>
           <a:p>
-            <a:pPr algn="l"/>
-            <a:r>
-              <a:rPr sz="3200" b="1">
-                <a:solidFill>
-                  <a:srgbClr val="FFFFFF"/>
+            <a:pPr algn="l">
+              <a:spcAft>
+                <a:spcPts val="1000"/>
+              </a:spcAft>
+            </a:pPr>
+            <a:r>
+              <a:rPr sz="3000" b="1">
+                <a:solidFill>
+                  <a:srgbClr val="0F3D5C"/>
                 </a:solidFill>
                 <a:latin typeface="Calibri"/>
               </a:rPr>
               <a:t>Cómo cumple la consigna</a:t>
+            </a:r>
+          </a:p>
+        </p:txBody>
+      </p:sp>
+      <p:sp>
+        <p:nvSpPr>
+          <p:cNvPr id="5" name="TextBox 4"/>
+          <p:cNvSpPr txBox="1"/>
+          <p:nvPr/>
+        </p:nvSpPr>
+        <p:spPr>
+          <a:xfrm>
+            <a:off x="914400" y="1298448"/>
+            <a:ext cx="10789920" cy="457200"/>
+          </a:xfrm>
+          <a:prstGeom prst="rect">
+            <a:avLst/>
+          </a:prstGeom>
+          <a:noFill/>
+        </p:spPr>
+        <p:txBody>
+          <a:bodyPr wrap="square" anchor="t">
+            <a:spAutoFit/>
+          </a:bodyPr>
+          <a:lstStyle/>
+          <a:p>
+            <a:pPr algn="l">
+              <a:spcAft>
+                <a:spcPts val="1000"/>
+              </a:spcAft>
+            </a:pPr>
+            <a:r>
+              <a:rPr sz="1600" b="0">
+                <a:solidFill>
+                  <a:srgbClr val="6B6B6B"/>
+                </a:solidFill>
+                <a:latin typeface="Calibri"/>
+              </a:rPr>
+              <a:t>Las 4 unidades de la materia + IA + Blockchain en un solo flujo</a:t>
+            </a:r>
+          </a:p>
+        </p:txBody>
+      </p:sp>
+      <p:sp>
+        <p:nvSpPr>
+          <p:cNvPr id="6" name="TextBox 5"/>
+          <p:cNvSpPr txBox="1"/>
+          <p:nvPr/>
+        </p:nvSpPr>
+        <p:spPr>
+          <a:xfrm>
+            <a:off x="640080" y="6400800"/>
+            <a:ext cx="7315200" cy="365760"/>
+          </a:xfrm>
+          <a:prstGeom prst="rect">
+            <a:avLst/>
+          </a:prstGeom>
+          <a:noFill/>
+        </p:spPr>
+        <p:txBody>
+          <a:bodyPr wrap="square" anchor="t">
+            <a:spAutoFit/>
+          </a:bodyPr>
+          <a:lstStyle/>
+          <a:p>
+            <a:pPr algn="l">
+              <a:spcAft>
+                <a:spcPts val="1000"/>
+              </a:spcAft>
+            </a:pPr>
+            <a:r>
+              <a:rPr sz="1000" b="0">
+                <a:solidFill>
+                  <a:srgbClr val="C9D6DE"/>
+                </a:solidFill>
+                <a:latin typeface="Calibri"/>
+              </a:rPr>
+              <a:t>VeriBeca · Asignación transparente de becas</a:t>
+            </a:r>
+          </a:p>
+        </p:txBody>
+      </p:sp>
+      <p:sp>
+        <p:nvSpPr>
+          <p:cNvPr id="7" name="TextBox 6"/>
+          <p:cNvSpPr txBox="1"/>
+          <p:nvPr/>
+        </p:nvSpPr>
+        <p:spPr>
+          <a:xfrm>
+            <a:off x="11247120" y="6400800"/>
+            <a:ext cx="731520" cy="365760"/>
+          </a:xfrm>
+          <a:prstGeom prst="rect">
+            <a:avLst/>
+          </a:prstGeom>
+          <a:noFill/>
+        </p:spPr>
+        <p:txBody>
+          <a:bodyPr wrap="square" anchor="t">
+            <a:spAutoFit/>
+          </a:bodyPr>
+          <a:lstStyle/>
+          <a:p>
+            <a:pPr algn="r">
+              <a:spcAft>
+                <a:spcPts val="1000"/>
+              </a:spcAft>
+            </a:pPr>
+            <a:r>
+              <a:rPr sz="1100" b="1">
+                <a:solidFill>
+                  <a:srgbClr val="6B6B6B"/>
+                </a:solidFill>
+                <a:latin typeface="Calibri"/>
+              </a:rPr>
+              <a:t>6</a:t>
             </a:r>
           </a:p>
         </p:txBody>
       </p:sp>
       <p:graphicFrame>
         <p:nvGraphicFramePr>
-          <p:cNvPr id="4" name="Table 3"/>
+          <p:cNvPr id="8" name="Table 7"/>
           <p:cNvGraphicFramePr>
             <a:graphicFrameLocks noGrp="1"/>
           </p:cNvGraphicFramePr>
           <p:nvPr/>
         </p:nvGraphicFramePr>
         <p:xfrm>
-          <a:off x="822960" y="1554480"/>
-          <a:ext cx="10515600" cy="4389120"/>
+          <a:off x="914400" y="1965960"/>
+          <a:ext cx="10332720" cy="4023360"/>
         </p:xfrm>
         <a:graphic>
           <a:graphicData uri="http://schemas.openxmlformats.org/drawingml/2006/table">
@@ -4605,10 +6653,10 @@
                 <a:tableStyleId>{5C22544A-7EE6-4342-B048-85BDC9FD1C3A}</a:tableStyleId>
               </a:tblPr>
               <a:tblGrid>
-                <a:gridCol w="3931920"/>
-                <a:gridCol w="6583680"/>
+                <a:gridCol w="3840480"/>
+                <a:gridCol w="6492240"/>
               </a:tblGrid>
-              <a:tr h="731520">
+              <a:tr h="670560">
                 <a:tc>
                   <a:txBody>
                     <a:bodyPr/>
@@ -4619,6 +6667,7 @@
                           <a:solidFill>
                             <a:srgbClr val="FFFFFF"/>
                           </a:solidFill>
+                          <a:latin typeface="Calibri"/>
                         </a:rPr>
                         <a:t>Tema de la materia</a:t>
                       </a:r>
@@ -4640,6 +6689,7 @@
                           <a:solidFill>
                             <a:srgbClr val="FFFFFF"/>
                           </a:solidFill>
+                          <a:latin typeface="Calibri"/>
                         </a:rPr>
                         <a:t>Cómo se aplica en VeriBeca</a:t>
                       </a:r>
@@ -4652,7 +6702,7 @@
                   </a:tcPr>
                 </a:tc>
               </a:tr>
-              <a:tr h="731520">
+              <a:tr h="670560">
                 <a:tc>
                   <a:txBody>
                     <a:bodyPr/>
@@ -4661,8 +6711,9 @@
                       <a:r>
                         <a:rPr sz="1400" b="1">
                           <a:solidFill>
-                            <a:srgbClr val="3A3A3A"/>
+                            <a:srgbClr val="2E2E2E"/>
                           </a:solidFill>
+                          <a:latin typeface="Calibri"/>
                         </a:rPr>
                         <a:t>Lenguajes de programación</a:t>
                       </a:r>
@@ -4670,7 +6721,7 @@
                   </a:txBody>
                   <a:tcPr>
                     <a:solidFill>
-                      <a:srgbClr val="F4F7F9"/>
+                      <a:srgbClr val="F3F6F9"/>
                     </a:solidFill>
                   </a:tcPr>
                 </a:tc>
@@ -4680,10 +6731,11 @@
                     <a:lstStyle/>
                     <a:p>
                       <a:r>
-                        <a:rPr sz="1400">
+                        <a:rPr sz="1400" b="0">
                           <a:solidFill>
-                            <a:srgbClr val="3A3A3A"/>
+                            <a:srgbClr val="2E2E2E"/>
                           </a:solidFill>
+                          <a:latin typeface="Calibri"/>
                         </a:rPr>
                         <a:t>DSL propio de reglas de elegibilidad</a:t>
                       </a:r>
@@ -4691,12 +6743,12 @@
                   </a:txBody>
                   <a:tcPr>
                     <a:solidFill>
-                      <a:srgbClr val="F4F7F9"/>
+                      <a:srgbClr val="F3F6F9"/>
                     </a:solidFill>
                   </a:tcPr>
                 </a:tc>
               </a:tr>
-              <a:tr h="731520">
+              <a:tr h="670560">
                 <a:tc>
                   <a:txBody>
                     <a:bodyPr/>
@@ -4705,8 +6757,9 @@
                       <a:r>
                         <a:rPr sz="1400" b="1">
                           <a:solidFill>
-                            <a:srgbClr val="3A3A3A"/>
+                            <a:srgbClr val="2E2E2E"/>
                           </a:solidFill>
+                          <a:latin typeface="Calibri"/>
                         </a:rPr>
                         <a:t>Sistemas de tipos</a:t>
                       </a:r>
@@ -4724,10 +6777,11 @@
                     <a:lstStyle/>
                     <a:p>
                       <a:r>
-                        <a:rPr sz="1400">
+                        <a:rPr sz="1400" b="0">
                           <a:solidFill>
-                            <a:srgbClr val="3A3A3A"/>
+                            <a:srgbClr val="2E2E2E"/>
                           </a:solidFill>
+                          <a:latin typeface="Calibri"/>
                         </a:rPr>
                         <a:t>Type-checker que valida las reglas antes de aplicarlas</a:t>
                       </a:r>
@@ -4740,7 +6794,7 @@
                   </a:tcPr>
                 </a:tc>
               </a:tr>
-              <a:tr h="731520">
+              <a:tr h="670560">
                 <a:tc>
                   <a:txBody>
                     <a:bodyPr/>
@@ -4749,8 +6803,9 @@
                       <a:r>
                         <a:rPr sz="1400" b="1">
                           <a:solidFill>
-                            <a:srgbClr val="3A3A3A"/>
+                            <a:srgbClr val="2E2E2E"/>
                           </a:solidFill>
+                          <a:latin typeface="Calibri"/>
                         </a:rPr>
                         <a:t>Diseño de compiladores</a:t>
                       </a:r>
@@ -4758,7 +6813,7 @@
                   </a:txBody>
                   <a:tcPr>
                     <a:solidFill>
-                      <a:srgbClr val="F4F7F9"/>
+                      <a:srgbClr val="F3F6F9"/>
                     </a:solidFill>
                   </a:tcPr>
                 </a:tc>
@@ -4768,10 +6823,11 @@
                     <a:lstStyle/>
                     <a:p>
                       <a:r>
-                        <a:rPr sz="1400">
+                        <a:rPr sz="1400" b="0">
                           <a:solidFill>
-                            <a:srgbClr val="3A3A3A"/>
+                            <a:srgbClr val="2E2E2E"/>
                           </a:solidFill>
+                          <a:latin typeface="Calibri"/>
                         </a:rPr>
                         <a:t>Pipeline lexer → parser → AST → intérprete</a:t>
                       </a:r>
@@ -4779,12 +6835,12 @@
                   </a:txBody>
                   <a:tcPr>
                     <a:solidFill>
-                      <a:srgbClr val="F4F7F9"/>
+                      <a:srgbClr val="F3F6F9"/>
                     </a:solidFill>
                   </a:tcPr>
                 </a:tc>
               </a:tr>
-              <a:tr h="731520">
+              <a:tr h="670560">
                 <a:tc>
                   <a:txBody>
                     <a:bodyPr/>
@@ -4793,8 +6849,9 @@
                       <a:r>
                         <a:rPr sz="1400" b="1">
                           <a:solidFill>
-                            <a:srgbClr val="3A3A3A"/>
+                            <a:srgbClr val="2E2E2E"/>
                           </a:solidFill>
+                          <a:latin typeface="Calibri"/>
                         </a:rPr>
                         <a:t>Seguridad / Blockchain</a:t>
                       </a:r>
@@ -4812,10 +6869,11 @@
                     <a:lstStyle/>
                     <a:p>
                       <a:r>
-                        <a:rPr sz="1400">
+                        <a:rPr sz="1400" b="0">
                           <a:solidFill>
-                            <a:srgbClr val="3A3A3A"/>
+                            <a:srgbClr val="2E2E2E"/>
                           </a:solidFill>
+                          <a:latin typeface="Calibri"/>
                         </a:rPr>
                         <a:t>Hash de cada decisión + smart contract en testnet</a:t>
                       </a:r>
@@ -4828,7 +6886,7 @@
                   </a:tcPr>
                 </a:tc>
               </a:tr>
-              <a:tr h="731520">
+              <a:tr h="670560">
                 <a:tc>
                   <a:txBody>
                     <a:bodyPr/>
@@ -4837,8 +6895,9 @@
                       <a:r>
                         <a:rPr sz="1400" b="1">
                           <a:solidFill>
-                            <a:srgbClr val="3A3A3A"/>
+                            <a:srgbClr val="2E2E2E"/>
                           </a:solidFill>
+                          <a:latin typeface="Calibri"/>
                         </a:rPr>
                         <a:t>Inteligencia Artificial</a:t>
                       </a:r>
@@ -4846,7 +6905,7 @@
                   </a:txBody>
                   <a:tcPr>
                     <a:solidFill>
-                      <a:srgbClr val="F4F7F9"/>
+                      <a:srgbClr val="F3F6F9"/>
                     </a:solidFill>
                   </a:tcPr>
                 </a:tc>
@@ -4856,10 +6915,11 @@
                     <a:lstStyle/>
                     <a:p>
                       <a:r>
-                        <a:rPr sz="1400">
+                        <a:rPr sz="1400" b="0">
                           <a:solidFill>
-                            <a:srgbClr val="3A3A3A"/>
+                            <a:srgbClr val="2E2E2E"/>
                           </a:solidFill>
+                          <a:latin typeface="Calibri"/>
                         </a:rPr>
                         <a:t>Scoring de vulnerabilidad con scikit-learn</a:t>
                       </a:r>
@@ -4867,7 +6927,7 @@
                   </a:txBody>
                   <a:tcPr>
                     <a:solidFill>
-                      <a:srgbClr val="F4F7F9"/>
+                      <a:srgbClr val="F3F6F9"/>
                     </a:solidFill>
                   </a:tcPr>
                 </a:tc>
@@ -4876,41 +6936,6 @@
           </a:graphicData>
         </a:graphic>
       </p:graphicFrame>
-      <p:sp>
-        <p:nvSpPr>
-          <p:cNvPr id="5" name="TextBox 4"/>
-          <p:cNvSpPr txBox="1"/>
-          <p:nvPr/>
-        </p:nvSpPr>
-        <p:spPr>
-          <a:xfrm>
-            <a:off x="11338560" y="6309360"/>
-            <a:ext cx="731520" cy="457200"/>
-          </a:xfrm>
-          <a:prstGeom prst="rect">
-            <a:avLst/>
-          </a:prstGeom>
-          <a:noFill/>
-        </p:spPr>
-        <p:txBody>
-          <a:bodyPr wrap="square">
-            <a:spAutoFit/>
-          </a:bodyPr>
-          <a:lstStyle/>
-          <a:p>
-            <a:pPr algn="r"/>
-            <a:r>
-              <a:rPr sz="1200" b="0">
-                <a:solidFill>
-                  <a:srgbClr val="6B6B6B"/>
-                </a:solidFill>
-                <a:latin typeface="Calibri"/>
-              </a:rPr>
-              <a:t>6</a:t>
-            </a:r>
-          </a:p>
-        </p:txBody>
-      </p:sp>
     </p:spTree>
   </p:cSld>
   <p:clrMapOvr>
@@ -4946,17 +6971,18 @@
         <p:spPr>
           <a:xfrm>
             <a:off x="0" y="0"/>
-            <a:ext cx="12191695" cy="1143000"/>
+            <a:ext cx="256032" cy="6858000"/>
           </a:xfrm>
           <a:prstGeom prst="rect">
             <a:avLst/>
           </a:prstGeom>
           <a:solidFill>
-            <a:srgbClr val="0F3D5C"/>
+            <a:srgbClr val="149E8F"/>
           </a:solidFill>
           <a:ln>
             <a:noFill/>
           </a:ln>
+          <a:effectLst/>
         </p:spPr>
         <p:style>
           <a:lnRef idx="1">
@@ -4982,14 +7008,58 @@
       </p:sp>
       <p:sp>
         <p:nvSpPr>
-          <p:cNvPr id="3" name="TextBox 2"/>
+          <p:cNvPr id="3" name="Rectangle 2"/>
+          <p:cNvSpPr/>
+          <p:nvPr/>
+        </p:nvSpPr>
+        <p:spPr>
+          <a:xfrm>
+            <a:off x="640080" y="566928"/>
+            <a:ext cx="146304" cy="566928"/>
+          </a:xfrm>
+          <a:prstGeom prst="rect">
+            <a:avLst/>
+          </a:prstGeom>
+          <a:solidFill>
+            <a:srgbClr val="149E8F"/>
+          </a:solidFill>
+          <a:ln>
+            <a:noFill/>
+          </a:ln>
+          <a:effectLst/>
+        </p:spPr>
+        <p:style>
+          <a:lnRef idx="1">
+            <a:schemeClr val="accent1"/>
+          </a:lnRef>
+          <a:fillRef idx="3">
+            <a:schemeClr val="accent1"/>
+          </a:fillRef>
+          <a:effectRef idx="2">
+            <a:schemeClr val="accent1"/>
+          </a:effectRef>
+          <a:fontRef idx="minor">
+            <a:schemeClr val="lt1"/>
+          </a:fontRef>
+        </p:style>
+        <p:txBody>
+          <a:bodyPr rtlCol="0" anchor="ctr"/>
+          <a:lstStyle/>
+          <a:p>
+            <a:pPr algn="ctr"/>
+          </a:p>
+        </p:txBody>
+      </p:sp>
+      <p:sp>
+        <p:nvSpPr>
+          <p:cNvPr id="4" name="TextBox 3"/>
           <p:cNvSpPr txBox="1"/>
           <p:nvPr/>
         </p:nvSpPr>
         <p:spPr>
           <a:xfrm>
-            <a:off x="640080" y="256032"/>
-            <a:ext cx="10058400" cy="822960"/>
+            <a:off x="914400" y="457200"/>
+            <a:ext cx="10607040" cy="868680"/>
           </a:xfrm>
           <a:prstGeom prst="rect">
             <a:avLst/>
@@ -4997,16 +7067,20 @@
           <a:noFill/>
         </p:spPr>
         <p:txBody>
-          <a:bodyPr wrap="square">
+          <a:bodyPr wrap="square" anchor="t">
             <a:spAutoFit/>
           </a:bodyPr>
           <a:lstStyle/>
           <a:p>
-            <a:pPr algn="l"/>
-            <a:r>
-              <a:rPr sz="3200" b="1">
-                <a:solidFill>
-                  <a:srgbClr val="FFFFFF"/>
+            <a:pPr algn="l">
+              <a:spcAft>
+                <a:spcPts val="1000"/>
+              </a:spcAft>
+            </a:pPr>
+            <a:r>
+              <a:rPr sz="3000" b="1">
+                <a:solidFill>
+                  <a:srgbClr val="0F3D5C"/>
                 </a:solidFill>
                 <a:latin typeface="Calibri"/>
               </a:rPr>
@@ -5017,14 +7091,14 @@
       </p:sp>
       <p:sp>
         <p:nvSpPr>
-          <p:cNvPr id="4" name="TextBox 3"/>
+          <p:cNvPr id="5" name="TextBox 4"/>
           <p:cNvSpPr txBox="1"/>
           <p:nvPr/>
         </p:nvSpPr>
         <p:spPr>
           <a:xfrm>
-            <a:off x="11338560" y="6309360"/>
-            <a:ext cx="731520" cy="457200"/>
+            <a:off x="914400" y="1298448"/>
+            <a:ext cx="10789920" cy="457200"/>
           </a:xfrm>
           <a:prstGeom prst="rect">
             <a:avLst/>
@@ -5032,34 +7106,38 @@
           <a:noFill/>
         </p:spPr>
         <p:txBody>
-          <a:bodyPr wrap="square">
+          <a:bodyPr wrap="square" anchor="t">
             <a:spAutoFit/>
           </a:bodyPr>
           <a:lstStyle/>
           <a:p>
-            <a:pPr algn="r"/>
-            <a:r>
-              <a:rPr sz="1200" b="0">
+            <a:pPr algn="l">
+              <a:spcAft>
+                <a:spcPts val="1000"/>
+              </a:spcAft>
+            </a:pPr>
+            <a:r>
+              <a:rPr sz="1600" b="0">
                 <a:solidFill>
                   <a:srgbClr val="6B6B6B"/>
                 </a:solidFill>
                 <a:latin typeface="Calibri"/>
               </a:rPr>
-              <a:t>7</a:t>
-            </a:r>
-          </a:p>
-        </p:txBody>
-      </p:sp>
-      <p:sp>
-        <p:nvSpPr>
-          <p:cNvPr id="5" name="TextBox 4"/>
+              <a:t>Por qué VeriBeca es distinto</a:t>
+            </a:r>
+          </a:p>
+        </p:txBody>
+      </p:sp>
+      <p:sp>
+        <p:nvSpPr>
+          <p:cNvPr id="6" name="TextBox 5"/>
           <p:cNvSpPr txBox="1"/>
           <p:nvPr/>
         </p:nvSpPr>
         <p:spPr>
           <a:xfrm>
-            <a:off x="731520" y="1554480"/>
-            <a:ext cx="10698480" cy="4754880"/>
+            <a:off x="640080" y="6400800"/>
+            <a:ext cx="7315200" cy="365760"/>
           </a:xfrm>
           <a:prstGeom prst="rect">
             <a:avLst/>
@@ -5067,7 +7145,7 @@
           <a:noFill/>
         </p:spPr>
         <p:txBody>
-          <a:bodyPr wrap="square">
+          <a:bodyPr wrap="square" anchor="t">
             <a:spAutoFit/>
           </a:bodyPr>
           <a:lstStyle/>
@@ -5078,72 +7156,487 @@
               </a:spcAft>
             </a:pPr>
             <a:r>
-              <a:rPr sz="1800" b="1">
-                <a:solidFill>
-                  <a:srgbClr val="149E8F"/>
-                </a:solidFill>
-                <a:latin typeface="Calibri"/>
-              </a:rPr>
-              <a:t>●  </a:t>
-            </a:r>
-            <a:r>
-              <a:rPr sz="1900" b="0">
-                <a:solidFill>
-                  <a:srgbClr val="3A3A3A"/>
-                </a:solidFill>
-                <a:latin typeface="Calibri"/>
-              </a:rPr>
-              <a:t>No es 'blockchain de moda': el hash on-chain resuelve la auditabilidad.</a:t>
-            </a:r>
-          </a:p>
+              <a:rPr sz="1000" b="0">
+                <a:solidFill>
+                  <a:srgbClr val="C9D6DE"/>
+                </a:solidFill>
+                <a:latin typeface="Calibri"/>
+              </a:rPr>
+              <a:t>VeriBeca · Asignación transparente de becas</a:t>
+            </a:r>
+          </a:p>
+        </p:txBody>
+      </p:sp>
+      <p:sp>
+        <p:nvSpPr>
+          <p:cNvPr id="7" name="TextBox 6"/>
+          <p:cNvSpPr txBox="1"/>
+          <p:nvPr/>
+        </p:nvSpPr>
+        <p:spPr>
+          <a:xfrm>
+            <a:off x="11247120" y="6400800"/>
+            <a:ext cx="731520" cy="365760"/>
+          </a:xfrm>
+          <a:prstGeom prst="rect">
+            <a:avLst/>
+          </a:prstGeom>
+          <a:noFill/>
+        </p:spPr>
+        <p:txBody>
+          <a:bodyPr wrap="square" anchor="t">
+            <a:spAutoFit/>
+          </a:bodyPr>
+          <a:lstStyle/>
+          <a:p>
+            <a:pPr algn="r">
+              <a:spcAft>
+                <a:spcPts val="1000"/>
+              </a:spcAft>
+            </a:pPr>
+            <a:r>
+              <a:rPr sz="1100" b="1">
+                <a:solidFill>
+                  <a:srgbClr val="6B6B6B"/>
+                </a:solidFill>
+                <a:latin typeface="Calibri"/>
+              </a:rPr>
+              <a:t>7</a:t>
+            </a:r>
+          </a:p>
+        </p:txBody>
+      </p:sp>
+      <p:sp>
+        <p:nvSpPr>
+          <p:cNvPr id="8" name="Rounded Rectangle 7"/>
+          <p:cNvSpPr/>
+          <p:nvPr/>
+        </p:nvSpPr>
+        <p:spPr>
+          <a:xfrm>
+            <a:off x="914400" y="2103120"/>
+            <a:ext cx="3383280" cy="3383280"/>
+          </a:xfrm>
+          <a:prstGeom prst="roundRect">
+            <a:avLst/>
+          </a:prstGeom>
+          <a:solidFill>
+            <a:srgbClr val="F3F6F9"/>
+          </a:solidFill>
+          <a:ln w="19050">
+            <a:solidFill>
+              <a:srgbClr val="149E8F"/>
+            </a:solidFill>
+          </a:ln>
+          <a:effectLst/>
+        </p:spPr>
+        <p:style>
+          <a:lnRef idx="1">
+            <a:schemeClr val="accent1"/>
+          </a:lnRef>
+          <a:fillRef idx="3">
+            <a:schemeClr val="accent1"/>
+          </a:fillRef>
+          <a:effectRef idx="2">
+            <a:schemeClr val="accent1"/>
+          </a:effectRef>
+          <a:fontRef idx="minor">
+            <a:schemeClr val="lt1"/>
+          </a:fontRef>
+        </p:style>
+        <p:txBody>
+          <a:bodyPr rtlCol="0" anchor="ctr"/>
+          <a:lstStyle/>
+          <a:p>
+            <a:pPr algn="ctr"/>
+          </a:p>
+        </p:txBody>
+      </p:sp>
+      <p:sp>
+        <p:nvSpPr>
+          <p:cNvPr id="9" name="Rectangle 8"/>
+          <p:cNvSpPr/>
+          <p:nvPr/>
+        </p:nvSpPr>
+        <p:spPr>
+          <a:xfrm>
+            <a:off x="914400" y="2103120"/>
+            <a:ext cx="3383280" cy="109728"/>
+          </a:xfrm>
+          <a:prstGeom prst="rect">
+            <a:avLst/>
+          </a:prstGeom>
+          <a:solidFill>
+            <a:srgbClr val="149E8F"/>
+          </a:solidFill>
+          <a:ln>
+            <a:noFill/>
+          </a:ln>
+          <a:effectLst/>
+        </p:spPr>
+        <p:style>
+          <a:lnRef idx="1">
+            <a:schemeClr val="accent1"/>
+          </a:lnRef>
+          <a:fillRef idx="3">
+            <a:schemeClr val="accent1"/>
+          </a:fillRef>
+          <a:effectRef idx="2">
+            <a:schemeClr val="accent1"/>
+          </a:effectRef>
+          <a:fontRef idx="minor">
+            <a:schemeClr val="lt1"/>
+          </a:fontRef>
+        </p:style>
+        <p:txBody>
+          <a:bodyPr rtlCol="0" anchor="ctr"/>
+          <a:lstStyle/>
+          <a:p>
+            <a:pPr algn="ctr"/>
+          </a:p>
+        </p:txBody>
+      </p:sp>
+      <p:sp>
+        <p:nvSpPr>
+          <p:cNvPr id="10" name="TextBox 9"/>
+          <p:cNvSpPr txBox="1"/>
+          <p:nvPr/>
+        </p:nvSpPr>
+        <p:spPr>
+          <a:xfrm>
+            <a:off x="1188720" y="2514600"/>
+            <a:ext cx="2834640" cy="2743200"/>
+          </a:xfrm>
+          <a:prstGeom prst="rect">
+            <a:avLst/>
+          </a:prstGeom>
+          <a:noFill/>
+        </p:spPr>
+        <p:txBody>
+          <a:bodyPr wrap="square" anchor="t">
+            <a:spAutoFit/>
+          </a:bodyPr>
+          <a:lstStyle/>
           <a:p>
             <a:pPr algn="l">
               <a:spcAft>
+                <a:spcPts val="1200"/>
+              </a:spcAft>
+            </a:pPr>
+            <a:r>
+              <a:rPr sz="1900" b="1">
+                <a:solidFill>
+                  <a:srgbClr val="0F3D5C"/>
+                </a:solidFill>
+                <a:latin typeface="Calibri"/>
+              </a:rPr>
+              <a:t>Auditabilidad real</a:t>
+            </a:r>
+          </a:p>
+          <a:p>
+            <a:pPr algn="l">
+              <a:spcAft>
                 <a:spcPts val="1000"/>
               </a:spcAft>
             </a:pPr>
             <a:r>
-              <a:rPr sz="1800" b="1">
-                <a:solidFill>
-                  <a:srgbClr val="149E8F"/>
-                </a:solidFill>
-                <a:latin typeface="Calibri"/>
-              </a:rPr>
-              <a:t>●  </a:t>
-            </a:r>
-            <a:r>
-              <a:rPr sz="1900" b="0">
-                <a:solidFill>
-                  <a:srgbClr val="3A3A3A"/>
-                </a:solidFill>
-                <a:latin typeface="Calibri"/>
-              </a:rPr>
-              <a:t>Reglas tipadas que evitan errores antes de afectar a personas reales.</a:t>
-            </a:r>
-          </a:p>
+              <a:rPr sz="1500" b="0">
+                <a:solidFill>
+                  <a:srgbClr val="2E2E2E"/>
+                </a:solidFill>
+                <a:latin typeface="Calibri"/>
+              </a:rPr>
+              <a:t>No es 'blockchain de moda': el hash on-chain resuelve algo concreto — que una decisión no se pueda alterar y cualquiera la verifique.</a:t>
+            </a:r>
+          </a:p>
+        </p:txBody>
+      </p:sp>
+      <p:sp>
+        <p:nvSpPr>
+          <p:cNvPr id="11" name="Rounded Rectangle 10"/>
+          <p:cNvSpPr/>
+          <p:nvPr/>
+        </p:nvSpPr>
+        <p:spPr>
+          <a:xfrm>
+            <a:off x="4544568" y="2103120"/>
+            <a:ext cx="3383280" cy="3383280"/>
+          </a:xfrm>
+          <a:prstGeom prst="roundRect">
+            <a:avLst/>
+          </a:prstGeom>
+          <a:solidFill>
+            <a:srgbClr val="F3F6F9"/>
+          </a:solidFill>
+          <a:ln w="19050">
+            <a:solidFill>
+              <a:srgbClr val="149E8F"/>
+            </a:solidFill>
+          </a:ln>
+          <a:effectLst/>
+        </p:spPr>
+        <p:style>
+          <a:lnRef idx="1">
+            <a:schemeClr val="accent1"/>
+          </a:lnRef>
+          <a:fillRef idx="3">
+            <a:schemeClr val="accent1"/>
+          </a:fillRef>
+          <a:effectRef idx="2">
+            <a:schemeClr val="accent1"/>
+          </a:effectRef>
+          <a:fontRef idx="minor">
+            <a:schemeClr val="lt1"/>
+          </a:fontRef>
+        </p:style>
+        <p:txBody>
+          <a:bodyPr rtlCol="0" anchor="ctr"/>
+          <a:lstStyle/>
+          <a:p>
+            <a:pPr algn="ctr"/>
+          </a:p>
+        </p:txBody>
+      </p:sp>
+      <p:sp>
+        <p:nvSpPr>
+          <p:cNvPr id="12" name="Rectangle 11"/>
+          <p:cNvSpPr/>
+          <p:nvPr/>
+        </p:nvSpPr>
+        <p:spPr>
+          <a:xfrm>
+            <a:off x="4544568" y="2103120"/>
+            <a:ext cx="3383280" cy="109728"/>
+          </a:xfrm>
+          <a:prstGeom prst="rect">
+            <a:avLst/>
+          </a:prstGeom>
+          <a:solidFill>
+            <a:srgbClr val="149E8F"/>
+          </a:solidFill>
+          <a:ln>
+            <a:noFill/>
+          </a:ln>
+          <a:effectLst/>
+        </p:spPr>
+        <p:style>
+          <a:lnRef idx="1">
+            <a:schemeClr val="accent1"/>
+          </a:lnRef>
+          <a:fillRef idx="3">
+            <a:schemeClr val="accent1"/>
+          </a:fillRef>
+          <a:effectRef idx="2">
+            <a:schemeClr val="accent1"/>
+          </a:effectRef>
+          <a:fontRef idx="minor">
+            <a:schemeClr val="lt1"/>
+          </a:fontRef>
+        </p:style>
+        <p:txBody>
+          <a:bodyPr rtlCol="0" anchor="ctr"/>
+          <a:lstStyle/>
+          <a:p>
+            <a:pPr algn="ctr"/>
+          </a:p>
+        </p:txBody>
+      </p:sp>
+      <p:sp>
+        <p:nvSpPr>
+          <p:cNvPr id="13" name="TextBox 12"/>
+          <p:cNvSpPr txBox="1"/>
+          <p:nvPr/>
+        </p:nvSpPr>
+        <p:spPr>
+          <a:xfrm>
+            <a:off x="4818888" y="2514600"/>
+            <a:ext cx="2834640" cy="2743200"/>
+          </a:xfrm>
+          <a:prstGeom prst="rect">
+            <a:avLst/>
+          </a:prstGeom>
+          <a:noFill/>
+        </p:spPr>
+        <p:txBody>
+          <a:bodyPr wrap="square" anchor="t">
+            <a:spAutoFit/>
+          </a:bodyPr>
+          <a:lstStyle/>
           <a:p>
             <a:pPr algn="l">
               <a:spcAft>
+                <a:spcPts val="1200"/>
+              </a:spcAft>
+            </a:pPr>
+            <a:r>
+              <a:rPr sz="1900" b="1">
+                <a:solidFill>
+                  <a:srgbClr val="0F3D5C"/>
+                </a:solidFill>
+                <a:latin typeface="Calibri"/>
+              </a:rPr>
+              <a:t>Reglas tipadas</a:t>
+            </a:r>
+          </a:p>
+          <a:p>
+            <a:pPr algn="l">
+              <a:spcAft>
                 <a:spcPts val="1000"/>
               </a:spcAft>
             </a:pPr>
             <a:r>
-              <a:rPr sz="1800" b="1">
-                <a:solidFill>
-                  <a:srgbClr val="149E8F"/>
-                </a:solidFill>
-                <a:latin typeface="Calibri"/>
-              </a:rPr>
-              <a:t>●  </a:t>
-            </a:r>
-            <a:r>
-              <a:rPr sz="1900" b="0">
-                <a:solidFill>
-                  <a:srgbClr val="3A3A3A"/>
-                </a:solidFill>
-                <a:latin typeface="Calibri"/>
-              </a:rPr>
-              <a:t>Difícil de copiar: combina compiladores + blockchain + IA en un flujo.</a:t>
+              <a:rPr sz="1500" b="0">
+                <a:solidFill>
+                  <a:srgbClr val="2E2E2E"/>
+                </a:solidFill>
+                <a:latin typeface="Calibri"/>
+              </a:rPr>
+              <a:t>El type-checker detecta reglas mal escritas antes de aplicarlas, evitando errores que perjudiquen a personas reales.</a:t>
+            </a:r>
+          </a:p>
+        </p:txBody>
+      </p:sp>
+      <p:sp>
+        <p:nvSpPr>
+          <p:cNvPr id="14" name="Rounded Rectangle 13"/>
+          <p:cNvSpPr/>
+          <p:nvPr/>
+        </p:nvSpPr>
+        <p:spPr>
+          <a:xfrm>
+            <a:off x="8174736" y="2103120"/>
+            <a:ext cx="3383280" cy="3383280"/>
+          </a:xfrm>
+          <a:prstGeom prst="roundRect">
+            <a:avLst/>
+          </a:prstGeom>
+          <a:solidFill>
+            <a:srgbClr val="F3F6F9"/>
+          </a:solidFill>
+          <a:ln w="19050">
+            <a:solidFill>
+              <a:srgbClr val="149E8F"/>
+            </a:solidFill>
+          </a:ln>
+          <a:effectLst/>
+        </p:spPr>
+        <p:style>
+          <a:lnRef idx="1">
+            <a:schemeClr val="accent1"/>
+          </a:lnRef>
+          <a:fillRef idx="3">
+            <a:schemeClr val="accent1"/>
+          </a:fillRef>
+          <a:effectRef idx="2">
+            <a:schemeClr val="accent1"/>
+          </a:effectRef>
+          <a:fontRef idx="minor">
+            <a:schemeClr val="lt1"/>
+          </a:fontRef>
+        </p:style>
+        <p:txBody>
+          <a:bodyPr rtlCol="0" anchor="ctr"/>
+          <a:lstStyle/>
+          <a:p>
+            <a:pPr algn="ctr"/>
+          </a:p>
+        </p:txBody>
+      </p:sp>
+      <p:sp>
+        <p:nvSpPr>
+          <p:cNvPr id="15" name="Rectangle 14"/>
+          <p:cNvSpPr/>
+          <p:nvPr/>
+        </p:nvSpPr>
+        <p:spPr>
+          <a:xfrm>
+            <a:off x="8174736" y="2103120"/>
+            <a:ext cx="3383280" cy="109728"/>
+          </a:xfrm>
+          <a:prstGeom prst="rect">
+            <a:avLst/>
+          </a:prstGeom>
+          <a:solidFill>
+            <a:srgbClr val="149E8F"/>
+          </a:solidFill>
+          <a:ln>
+            <a:noFill/>
+          </a:ln>
+          <a:effectLst/>
+        </p:spPr>
+        <p:style>
+          <a:lnRef idx="1">
+            <a:schemeClr val="accent1"/>
+          </a:lnRef>
+          <a:fillRef idx="3">
+            <a:schemeClr val="accent1"/>
+          </a:fillRef>
+          <a:effectRef idx="2">
+            <a:schemeClr val="accent1"/>
+          </a:effectRef>
+          <a:fontRef idx="minor">
+            <a:schemeClr val="lt1"/>
+          </a:fontRef>
+        </p:style>
+        <p:txBody>
+          <a:bodyPr rtlCol="0" anchor="ctr"/>
+          <a:lstStyle/>
+          <a:p>
+            <a:pPr algn="ctr"/>
+          </a:p>
+        </p:txBody>
+      </p:sp>
+      <p:sp>
+        <p:nvSpPr>
+          <p:cNvPr id="16" name="TextBox 15"/>
+          <p:cNvSpPr txBox="1"/>
+          <p:nvPr/>
+        </p:nvSpPr>
+        <p:spPr>
+          <a:xfrm>
+            <a:off x="8449056" y="2514600"/>
+            <a:ext cx="2834640" cy="2743200"/>
+          </a:xfrm>
+          <a:prstGeom prst="rect">
+            <a:avLst/>
+          </a:prstGeom>
+          <a:noFill/>
+        </p:spPr>
+        <p:txBody>
+          <a:bodyPr wrap="square" anchor="t">
+            <a:spAutoFit/>
+          </a:bodyPr>
+          <a:lstStyle/>
+          <a:p>
+            <a:pPr algn="l">
+              <a:spcAft>
+                <a:spcPts val="1200"/>
+              </a:spcAft>
+            </a:pPr>
+            <a:r>
+              <a:rPr sz="1900" b="1">
+                <a:solidFill>
+                  <a:srgbClr val="0F3D5C"/>
+                </a:solidFill>
+                <a:latin typeface="Calibri"/>
+              </a:rPr>
+              <a:t>Difícil de copiar</a:t>
+            </a:r>
+          </a:p>
+          <a:p>
+            <a:pPr algn="l">
+              <a:spcAft>
+                <a:spcPts val="1000"/>
+              </a:spcAft>
+            </a:pPr>
+            <a:r>
+              <a:rPr sz="1500" b="0">
+                <a:solidFill>
+                  <a:srgbClr val="2E2E2E"/>
+                </a:solidFill>
+                <a:latin typeface="Calibri"/>
+              </a:rPr>
+              <a:t>Combina lenguajes, compiladores, blockchain e IA en un único flujo integrado.</a:t>
             </a:r>
           </a:p>
         </p:txBody>
@@ -5183,9 +7676,253 @@
         <p:spPr>
           <a:xfrm>
             <a:off x="0" y="0"/>
-            <a:ext cx="12191695" cy="1143000"/>
+            <a:ext cx="256032" cy="6858000"/>
           </a:xfrm>
           <a:prstGeom prst="rect">
+            <a:avLst/>
+          </a:prstGeom>
+          <a:solidFill>
+            <a:srgbClr val="149E8F"/>
+          </a:solidFill>
+          <a:ln>
+            <a:noFill/>
+          </a:ln>
+          <a:effectLst/>
+        </p:spPr>
+        <p:style>
+          <a:lnRef idx="1">
+            <a:schemeClr val="accent1"/>
+          </a:lnRef>
+          <a:fillRef idx="3">
+            <a:schemeClr val="accent1"/>
+          </a:fillRef>
+          <a:effectRef idx="2">
+            <a:schemeClr val="accent1"/>
+          </a:effectRef>
+          <a:fontRef idx="minor">
+            <a:schemeClr val="lt1"/>
+          </a:fontRef>
+        </p:style>
+        <p:txBody>
+          <a:bodyPr rtlCol="0" anchor="ctr"/>
+          <a:lstStyle/>
+          <a:p>
+            <a:pPr algn="ctr"/>
+          </a:p>
+        </p:txBody>
+      </p:sp>
+      <p:sp>
+        <p:nvSpPr>
+          <p:cNvPr id="3" name="Rectangle 2"/>
+          <p:cNvSpPr/>
+          <p:nvPr/>
+        </p:nvSpPr>
+        <p:spPr>
+          <a:xfrm>
+            <a:off x="640080" y="566928"/>
+            <a:ext cx="146304" cy="566928"/>
+          </a:xfrm>
+          <a:prstGeom prst="rect">
+            <a:avLst/>
+          </a:prstGeom>
+          <a:solidFill>
+            <a:srgbClr val="149E8F"/>
+          </a:solidFill>
+          <a:ln>
+            <a:noFill/>
+          </a:ln>
+          <a:effectLst/>
+        </p:spPr>
+        <p:style>
+          <a:lnRef idx="1">
+            <a:schemeClr val="accent1"/>
+          </a:lnRef>
+          <a:fillRef idx="3">
+            <a:schemeClr val="accent1"/>
+          </a:fillRef>
+          <a:effectRef idx="2">
+            <a:schemeClr val="accent1"/>
+          </a:effectRef>
+          <a:fontRef idx="minor">
+            <a:schemeClr val="lt1"/>
+          </a:fontRef>
+        </p:style>
+        <p:txBody>
+          <a:bodyPr rtlCol="0" anchor="ctr"/>
+          <a:lstStyle/>
+          <a:p>
+            <a:pPr algn="ctr"/>
+          </a:p>
+        </p:txBody>
+      </p:sp>
+      <p:sp>
+        <p:nvSpPr>
+          <p:cNvPr id="4" name="TextBox 3"/>
+          <p:cNvSpPr txBox="1"/>
+          <p:nvPr/>
+        </p:nvSpPr>
+        <p:spPr>
+          <a:xfrm>
+            <a:off x="914400" y="457200"/>
+            <a:ext cx="10607040" cy="868680"/>
+          </a:xfrm>
+          <a:prstGeom prst="rect">
+            <a:avLst/>
+          </a:prstGeom>
+          <a:noFill/>
+        </p:spPr>
+        <p:txBody>
+          <a:bodyPr wrap="square" anchor="t">
+            <a:spAutoFit/>
+          </a:bodyPr>
+          <a:lstStyle/>
+          <a:p>
+            <a:pPr algn="l">
+              <a:spcAft>
+                <a:spcPts val="1000"/>
+              </a:spcAft>
+            </a:pPr>
+            <a:r>
+              <a:rPr sz="3000" b="1">
+                <a:solidFill>
+                  <a:srgbClr val="0F3D5C"/>
+                </a:solidFill>
+                <a:latin typeface="Calibri"/>
+              </a:rPr>
+              <a:t>Impacto y métricas</a:t>
+            </a:r>
+          </a:p>
+        </p:txBody>
+      </p:sp>
+      <p:sp>
+        <p:nvSpPr>
+          <p:cNvPr id="5" name="TextBox 4"/>
+          <p:cNvSpPr txBox="1"/>
+          <p:nvPr/>
+        </p:nvSpPr>
+        <p:spPr>
+          <a:xfrm>
+            <a:off x="914400" y="1298448"/>
+            <a:ext cx="10789920" cy="457200"/>
+          </a:xfrm>
+          <a:prstGeom prst="rect">
+            <a:avLst/>
+          </a:prstGeom>
+          <a:noFill/>
+        </p:spPr>
+        <p:txBody>
+          <a:bodyPr wrap="square" anchor="t">
+            <a:spAutoFit/>
+          </a:bodyPr>
+          <a:lstStyle/>
+          <a:p>
+            <a:pPr algn="l">
+              <a:spcAft>
+                <a:spcPts val="1000"/>
+              </a:spcAft>
+            </a:pPr>
+            <a:r>
+              <a:rPr sz="1600" b="0">
+                <a:solidFill>
+                  <a:srgbClr val="6B6B6B"/>
+                </a:solidFill>
+                <a:latin typeface="Calibri"/>
+              </a:rPr>
+              <a:t>Qué cambio concreto genera y cómo se mide</a:t>
+            </a:r>
+          </a:p>
+        </p:txBody>
+      </p:sp>
+      <p:sp>
+        <p:nvSpPr>
+          <p:cNvPr id="6" name="TextBox 5"/>
+          <p:cNvSpPr txBox="1"/>
+          <p:nvPr/>
+        </p:nvSpPr>
+        <p:spPr>
+          <a:xfrm>
+            <a:off x="640080" y="6400800"/>
+            <a:ext cx="7315200" cy="365760"/>
+          </a:xfrm>
+          <a:prstGeom prst="rect">
+            <a:avLst/>
+          </a:prstGeom>
+          <a:noFill/>
+        </p:spPr>
+        <p:txBody>
+          <a:bodyPr wrap="square" anchor="t">
+            <a:spAutoFit/>
+          </a:bodyPr>
+          <a:lstStyle/>
+          <a:p>
+            <a:pPr algn="l">
+              <a:spcAft>
+                <a:spcPts val="1000"/>
+              </a:spcAft>
+            </a:pPr>
+            <a:r>
+              <a:rPr sz="1000" b="0">
+                <a:solidFill>
+                  <a:srgbClr val="C9D6DE"/>
+                </a:solidFill>
+                <a:latin typeface="Calibri"/>
+              </a:rPr>
+              <a:t>VeriBeca · Asignación transparente de becas</a:t>
+            </a:r>
+          </a:p>
+        </p:txBody>
+      </p:sp>
+      <p:sp>
+        <p:nvSpPr>
+          <p:cNvPr id="7" name="TextBox 6"/>
+          <p:cNvSpPr txBox="1"/>
+          <p:nvPr/>
+        </p:nvSpPr>
+        <p:spPr>
+          <a:xfrm>
+            <a:off x="11247120" y="6400800"/>
+            <a:ext cx="731520" cy="365760"/>
+          </a:xfrm>
+          <a:prstGeom prst="rect">
+            <a:avLst/>
+          </a:prstGeom>
+          <a:noFill/>
+        </p:spPr>
+        <p:txBody>
+          <a:bodyPr wrap="square" anchor="t">
+            <a:spAutoFit/>
+          </a:bodyPr>
+          <a:lstStyle/>
+          <a:p>
+            <a:pPr algn="r">
+              <a:spcAft>
+                <a:spcPts val="1000"/>
+              </a:spcAft>
+            </a:pPr>
+            <a:r>
+              <a:rPr sz="1100" b="1">
+                <a:solidFill>
+                  <a:srgbClr val="6B6B6B"/>
+                </a:solidFill>
+                <a:latin typeface="Calibri"/>
+              </a:rPr>
+              <a:t>8</a:t>
+            </a:r>
+          </a:p>
+        </p:txBody>
+      </p:sp>
+      <p:sp>
+        <p:nvSpPr>
+          <p:cNvPr id="8" name="Rounded Rectangle 7"/>
+          <p:cNvSpPr/>
+          <p:nvPr/>
+        </p:nvSpPr>
+        <p:spPr>
+          <a:xfrm>
+            <a:off x="914400" y="2011680"/>
+            <a:ext cx="2606040" cy="1828800"/>
+          </a:xfrm>
+          <a:prstGeom prst="roundRect">
             <a:avLst/>
           </a:prstGeom>
           <a:solidFill>
@@ -5194,6 +7931,7 @@
           <a:ln>
             <a:noFill/>
           </a:ln>
+          <a:effectLst/>
         </p:spPr>
         <p:style>
           <a:lnRef idx="1">
@@ -5219,14 +7957,14 @@
       </p:sp>
       <p:sp>
         <p:nvSpPr>
-          <p:cNvPr id="3" name="TextBox 2"/>
+          <p:cNvPr id="9" name="TextBox 8"/>
           <p:cNvSpPr txBox="1"/>
           <p:nvPr/>
         </p:nvSpPr>
         <p:spPr>
           <a:xfrm>
-            <a:off x="640080" y="256032"/>
-            <a:ext cx="10058400" cy="822960"/>
+            <a:off x="914400" y="2148840"/>
+            <a:ext cx="2606040" cy="1645920"/>
           </a:xfrm>
           <a:prstGeom prst="rect">
             <a:avLst/>
@@ -5234,34 +7972,114 @@
           <a:noFill/>
         </p:spPr>
         <p:txBody>
-          <a:bodyPr wrap="square">
+          <a:bodyPr wrap="square" anchor="ctr">
             <a:spAutoFit/>
           </a:bodyPr>
           <a:lstStyle/>
           <a:p>
-            <a:pPr algn="l"/>
-            <a:r>
-              <a:rPr sz="3200" b="1">
+            <a:pPr algn="ctr">
+              <a:spcAft>
+                <a:spcPts val="400"/>
+              </a:spcAft>
+            </a:pPr>
+            <a:r>
+              <a:rPr sz="4000" b="1">
                 <a:solidFill>
                   <a:srgbClr val="FFFFFF"/>
                 </a:solidFill>
                 <a:latin typeface="Calibri"/>
               </a:rPr>
-              <a:t>Impacto y métricas</a:t>
-            </a:r>
-          </a:p>
-        </p:txBody>
-      </p:sp>
-      <p:sp>
-        <p:nvSpPr>
-          <p:cNvPr id="4" name="TextBox 3"/>
+              <a:t>−80%</a:t>
+            </a:r>
+          </a:p>
+          <a:p>
+            <a:pPr algn="ctr">
+              <a:spcAft>
+                <a:spcPts val="0"/>
+              </a:spcAft>
+            </a:pPr>
+            <a:r>
+              <a:rPr sz="1200" b="0">
+                <a:solidFill>
+                  <a:srgbClr val="C9D6DE"/>
+                </a:solidFill>
+                <a:latin typeface="Calibri"/>
+              </a:rPr>
+              <a:t>tiempo de evaluación</a:t>
+            </a:r>
+          </a:p>
+          <a:p>
+            <a:pPr algn="ctr">
+              <a:spcAft>
+                <a:spcPts val="0"/>
+              </a:spcAft>
+            </a:pPr>
+            <a:r>
+              <a:rPr sz="1200" b="0">
+                <a:solidFill>
+                  <a:srgbClr val="C9D6DE"/>
+                </a:solidFill>
+                <a:latin typeface="Calibri"/>
+              </a:rPr>
+              <a:t>vs. proceso manual</a:t>
+            </a:r>
+          </a:p>
+        </p:txBody>
+      </p:sp>
+      <p:sp>
+        <p:nvSpPr>
+          <p:cNvPr id="10" name="Rounded Rectangle 9"/>
+          <p:cNvSpPr/>
+          <p:nvPr/>
+        </p:nvSpPr>
+        <p:spPr>
+          <a:xfrm>
+            <a:off x="3694176" y="2011680"/>
+            <a:ext cx="2606040" cy="1828800"/>
+          </a:xfrm>
+          <a:prstGeom prst="roundRect">
+            <a:avLst/>
+          </a:prstGeom>
+          <a:solidFill>
+            <a:srgbClr val="0F3D5C"/>
+          </a:solidFill>
+          <a:ln>
+            <a:noFill/>
+          </a:ln>
+          <a:effectLst/>
+        </p:spPr>
+        <p:style>
+          <a:lnRef idx="1">
+            <a:schemeClr val="accent1"/>
+          </a:lnRef>
+          <a:fillRef idx="3">
+            <a:schemeClr val="accent1"/>
+          </a:fillRef>
+          <a:effectRef idx="2">
+            <a:schemeClr val="accent1"/>
+          </a:effectRef>
+          <a:fontRef idx="minor">
+            <a:schemeClr val="lt1"/>
+          </a:fontRef>
+        </p:style>
+        <p:txBody>
+          <a:bodyPr rtlCol="0" anchor="ctr"/>
+          <a:lstStyle/>
+          <a:p>
+            <a:pPr algn="ctr"/>
+          </a:p>
+        </p:txBody>
+      </p:sp>
+      <p:sp>
+        <p:nvSpPr>
+          <p:cNvPr id="11" name="TextBox 10"/>
           <p:cNvSpPr txBox="1"/>
           <p:nvPr/>
         </p:nvSpPr>
         <p:spPr>
           <a:xfrm>
-            <a:off x="11338560" y="6309360"/>
-            <a:ext cx="731520" cy="457200"/>
+            <a:off x="3694176" y="2148840"/>
+            <a:ext cx="2606040" cy="1645920"/>
           </a:xfrm>
           <a:prstGeom prst="rect">
             <a:avLst/>
@@ -5269,34 +8087,114 @@
           <a:noFill/>
         </p:spPr>
         <p:txBody>
-          <a:bodyPr wrap="square">
+          <a:bodyPr wrap="square" anchor="ctr">
             <a:spAutoFit/>
           </a:bodyPr>
           <a:lstStyle/>
           <a:p>
-            <a:pPr algn="r"/>
+            <a:pPr algn="ctr">
+              <a:spcAft>
+                <a:spcPts val="400"/>
+              </a:spcAft>
+            </a:pPr>
+            <a:r>
+              <a:rPr sz="4000" b="1">
+                <a:solidFill>
+                  <a:srgbClr val="FFFFFF"/>
+                </a:solidFill>
+                <a:latin typeface="Calibri"/>
+              </a:rPr>
+              <a:t>100%</a:t>
+            </a:r>
+          </a:p>
+          <a:p>
+            <a:pPr algn="ctr">
+              <a:spcAft>
+                <a:spcPts val="0"/>
+              </a:spcAft>
+            </a:pPr>
             <a:r>
               <a:rPr sz="1200" b="0">
                 <a:solidFill>
-                  <a:srgbClr val="6B6B6B"/>
-                </a:solidFill>
-                <a:latin typeface="Calibri"/>
-              </a:rPr>
-              <a:t>8</a:t>
-            </a:r>
-          </a:p>
-        </p:txBody>
-      </p:sp>
-      <p:sp>
-        <p:nvSpPr>
-          <p:cNvPr id="5" name="TextBox 4"/>
+                  <a:srgbClr val="C9D6DE"/>
+                </a:solidFill>
+                <a:latin typeface="Calibri"/>
+              </a:rPr>
+              <a:t>decisiones con</a:t>
+            </a:r>
+          </a:p>
+          <a:p>
+            <a:pPr algn="ctr">
+              <a:spcAft>
+                <a:spcPts val="0"/>
+              </a:spcAft>
+            </a:pPr>
+            <a:r>
+              <a:rPr sz="1200" b="0">
+                <a:solidFill>
+                  <a:srgbClr val="C9D6DE"/>
+                </a:solidFill>
+                <a:latin typeface="Calibri"/>
+              </a:rPr>
+              <a:t>certificado verificable</a:t>
+            </a:r>
+          </a:p>
+        </p:txBody>
+      </p:sp>
+      <p:sp>
+        <p:nvSpPr>
+          <p:cNvPr id="12" name="Rounded Rectangle 11"/>
+          <p:cNvSpPr/>
+          <p:nvPr/>
+        </p:nvSpPr>
+        <p:spPr>
+          <a:xfrm>
+            <a:off x="6473952" y="2011680"/>
+            <a:ext cx="2606040" cy="1828800"/>
+          </a:xfrm>
+          <a:prstGeom prst="roundRect">
+            <a:avLst/>
+          </a:prstGeom>
+          <a:solidFill>
+            <a:srgbClr val="0F3D5C"/>
+          </a:solidFill>
+          <a:ln>
+            <a:noFill/>
+          </a:ln>
+          <a:effectLst/>
+        </p:spPr>
+        <p:style>
+          <a:lnRef idx="1">
+            <a:schemeClr val="accent1"/>
+          </a:lnRef>
+          <a:fillRef idx="3">
+            <a:schemeClr val="accent1"/>
+          </a:fillRef>
+          <a:effectRef idx="2">
+            <a:schemeClr val="accent1"/>
+          </a:effectRef>
+          <a:fontRef idx="minor">
+            <a:schemeClr val="lt1"/>
+          </a:fontRef>
+        </p:style>
+        <p:txBody>
+          <a:bodyPr rtlCol="0" anchor="ctr"/>
+          <a:lstStyle/>
+          <a:p>
+            <a:pPr algn="ctr"/>
+          </a:p>
+        </p:txBody>
+      </p:sp>
+      <p:sp>
+        <p:nvSpPr>
+          <p:cNvPr id="13" name="TextBox 12"/>
           <p:cNvSpPr txBox="1"/>
           <p:nvPr/>
         </p:nvSpPr>
         <p:spPr>
           <a:xfrm>
-            <a:off x="731520" y="1554480"/>
-            <a:ext cx="10698480" cy="4754880"/>
+            <a:off x="6473952" y="2148840"/>
+            <a:ext cx="2606040" cy="1645920"/>
           </a:xfrm>
           <a:prstGeom prst="rect">
             <a:avLst/>
@@ -5304,18 +8202,204 @@
           <a:noFill/>
         </p:spPr>
         <p:txBody>
-          <a:bodyPr wrap="square">
+          <a:bodyPr wrap="square" anchor="ctr">
             <a:spAutoFit/>
           </a:bodyPr>
           <a:lstStyle/>
           <a:p>
+            <a:pPr algn="ctr">
+              <a:spcAft>
+                <a:spcPts val="400"/>
+              </a:spcAft>
+            </a:pPr>
+            <a:r>
+              <a:rPr sz="4000" b="1">
+                <a:solidFill>
+                  <a:srgbClr val="FFFFFF"/>
+                </a:solidFill>
+                <a:latin typeface="Calibri"/>
+              </a:rPr>
+              <a:t>27</a:t>
+            </a:r>
+          </a:p>
+          <a:p>
+            <a:pPr algn="ctr">
+              <a:spcAft>
+                <a:spcPts val="0"/>
+              </a:spcAft>
+            </a:pPr>
+            <a:r>
+              <a:rPr sz="1200" b="0">
+                <a:solidFill>
+                  <a:srgbClr val="C9D6DE"/>
+                </a:solidFill>
+                <a:latin typeface="Calibri"/>
+              </a:rPr>
+              <a:t>pruebas automáticas</a:t>
+            </a:r>
+          </a:p>
+          <a:p>
+            <a:pPr algn="ctr">
+              <a:spcAft>
+                <a:spcPts val="0"/>
+              </a:spcAft>
+            </a:pPr>
+            <a:r>
+              <a:rPr sz="1200" b="0">
+                <a:solidFill>
+                  <a:srgbClr val="C9D6DE"/>
+                </a:solidFill>
+                <a:latin typeface="Calibri"/>
+              </a:rPr>
+              <a:t>en verde</a:t>
+            </a:r>
+          </a:p>
+        </p:txBody>
+      </p:sp>
+      <p:sp>
+        <p:nvSpPr>
+          <p:cNvPr id="14" name="Rounded Rectangle 13"/>
+          <p:cNvSpPr/>
+          <p:nvPr/>
+        </p:nvSpPr>
+        <p:spPr>
+          <a:xfrm>
+            <a:off x="9253728" y="2011680"/>
+            <a:ext cx="2606040" cy="1828800"/>
+          </a:xfrm>
+          <a:prstGeom prst="roundRect">
+            <a:avLst/>
+          </a:prstGeom>
+          <a:solidFill>
+            <a:srgbClr val="0F3D5C"/>
+          </a:solidFill>
+          <a:ln>
+            <a:noFill/>
+          </a:ln>
+          <a:effectLst/>
+        </p:spPr>
+        <p:style>
+          <a:lnRef idx="1">
+            <a:schemeClr val="accent1"/>
+          </a:lnRef>
+          <a:fillRef idx="3">
+            <a:schemeClr val="accent1"/>
+          </a:fillRef>
+          <a:effectRef idx="2">
+            <a:schemeClr val="accent1"/>
+          </a:effectRef>
+          <a:fontRef idx="minor">
+            <a:schemeClr val="lt1"/>
+          </a:fontRef>
+        </p:style>
+        <p:txBody>
+          <a:bodyPr rtlCol="0" anchor="ctr"/>
+          <a:lstStyle/>
+          <a:p>
+            <a:pPr algn="ctr"/>
+          </a:p>
+        </p:txBody>
+      </p:sp>
+      <p:sp>
+        <p:nvSpPr>
+          <p:cNvPr id="15" name="TextBox 14"/>
+          <p:cNvSpPr txBox="1"/>
+          <p:nvPr/>
+        </p:nvSpPr>
+        <p:spPr>
+          <a:xfrm>
+            <a:off x="9253728" y="2148840"/>
+            <a:ext cx="2606040" cy="1645920"/>
+          </a:xfrm>
+          <a:prstGeom prst="rect">
+            <a:avLst/>
+          </a:prstGeom>
+          <a:noFill/>
+        </p:spPr>
+        <p:txBody>
+          <a:bodyPr wrap="square" anchor="ctr">
+            <a:spAutoFit/>
+          </a:bodyPr>
+          <a:lstStyle/>
+          <a:p>
+            <a:pPr algn="ctr">
+              <a:spcAft>
+                <a:spcPts val="400"/>
+              </a:spcAft>
+            </a:pPr>
+            <a:r>
+              <a:rPr sz="4000" b="1">
+                <a:solidFill>
+                  <a:srgbClr val="FFFFFF"/>
+                </a:solidFill>
+                <a:latin typeface="Calibri"/>
+              </a:rPr>
+              <a:t>1</a:t>
+            </a:r>
+          </a:p>
+          <a:p>
+            <a:pPr algn="ctr">
+              <a:spcAft>
+                <a:spcPts val="0"/>
+              </a:spcAft>
+            </a:pPr>
+            <a:r>
+              <a:rPr sz="1200" b="0">
+                <a:solidFill>
+                  <a:srgbClr val="C9D6DE"/>
+                </a:solidFill>
+                <a:latin typeface="Calibri"/>
+              </a:rPr>
+              <a:t>transacción real</a:t>
+            </a:r>
+          </a:p>
+          <a:p>
+            <a:pPr algn="ctr">
+              <a:spcAft>
+                <a:spcPts val="0"/>
+              </a:spcAft>
+            </a:pPr>
+            <a:r>
+              <a:rPr sz="1200" b="0">
+                <a:solidFill>
+                  <a:srgbClr val="C9D6DE"/>
+                </a:solidFill>
+                <a:latin typeface="Calibri"/>
+              </a:rPr>
+              <a:t>en testnet (Sepolia)</a:t>
+            </a:r>
+          </a:p>
+        </p:txBody>
+      </p:sp>
+      <p:sp>
+        <p:nvSpPr>
+          <p:cNvPr id="16" name="TextBox 15"/>
+          <p:cNvSpPr txBox="1"/>
+          <p:nvPr/>
+        </p:nvSpPr>
+        <p:spPr>
+          <a:xfrm>
+            <a:off x="914400" y="4297680"/>
+            <a:ext cx="10332720" cy="1828800"/>
+          </a:xfrm>
+          <a:prstGeom prst="rect">
+            <a:avLst/>
+          </a:prstGeom>
+          <a:noFill/>
+        </p:spPr>
+        <p:txBody>
+          <a:bodyPr wrap="square" anchor="t">
+            <a:spAutoFit/>
+          </a:bodyPr>
+          <a:lstStyle/>
+          <a:p>
             <a:pPr algn="l">
               <a:spcAft>
                 <a:spcPts val="1000"/>
               </a:spcAft>
             </a:pPr>
             <a:r>
-              <a:rPr sz="1800" b="1">
+              <a:rPr sz="1400" b="1">
                 <a:solidFill>
                   <a:srgbClr val="149E8F"/>
                 </a:solidFill>
@@ -5324,13 +8408,13 @@
               <a:t>●  </a:t>
             </a:r>
             <a:r>
-              <a:rPr sz="1900" b="0">
-                <a:solidFill>
-                  <a:srgbClr val="3A3A3A"/>
-                </a:solidFill>
-                <a:latin typeface="Calibri"/>
-              </a:rPr>
-              <a:t>Reducción del tiempo de evaluación frente al proceso manual.</a:t>
+              <a:rPr sz="1600" b="0">
+                <a:solidFill>
+                  <a:srgbClr val="2E2E2E"/>
+                </a:solidFill>
+                <a:latin typeface="Calibri"/>
+              </a:rPr>
+              <a:t>Beneficiarios: postulantes (decisiones justas) e instituciones (procesos defendibles).</a:t>
             </a:r>
           </a:p>
           <a:p>
@@ -5340,7 +8424,7 @@
               </a:spcAft>
             </a:pPr>
             <a:r>
-              <a:rPr sz="1800" b="1">
+              <a:rPr sz="1400" b="1">
                 <a:solidFill>
                   <a:srgbClr val="149E8F"/>
                 </a:solidFill>
@@ -5349,13 +8433,13 @@
               <a:t>●  </a:t>
             </a:r>
             <a:r>
-              <a:rPr sz="1900" b="0">
-                <a:solidFill>
-                  <a:srgbClr val="3A3A3A"/>
-                </a:solidFill>
-                <a:latin typeface="Calibri"/>
-              </a:rPr>
-              <a:t>100% de las decisiones con certificado verificable.</a:t>
+              <a:rPr sz="1600" b="0">
+                <a:solidFill>
+                  <a:srgbClr val="2E2E2E"/>
+                </a:solidFill>
+                <a:latin typeface="Calibri"/>
+              </a:rPr>
+              <a:t>Impacto social: más confianza y menos discrecionalidad en la asignación de ayudas.</a:t>
             </a:r>
           </a:p>
           <a:p>
@@ -5365,7 +8449,7 @@
               </a:spcAft>
             </a:pPr>
             <a:r>
-              <a:rPr sz="1800" b="1">
+              <a:rPr sz="1400" b="1">
                 <a:solidFill>
                   <a:srgbClr val="149E8F"/>
                 </a:solidFill>
@@ -5374,38 +8458,13 @@
               <a:t>●  </a:t>
             </a:r>
             <a:r>
-              <a:rPr sz="1900" b="0">
-                <a:solidFill>
-                  <a:srgbClr val="3A3A3A"/>
-                </a:solidFill>
-                <a:latin typeface="Calibri"/>
-              </a:rPr>
-              <a:t>Beneficiarios: postulantes (justicia) e instituciones (procesos defendibles).</a:t>
-            </a:r>
-          </a:p>
-          <a:p>
-            <a:pPr algn="l">
-              <a:spcAft>
-                <a:spcPts val="1000"/>
-              </a:spcAft>
-            </a:pPr>
-            <a:r>
-              <a:rPr sz="1800" b="1">
-                <a:solidFill>
-                  <a:srgbClr val="149E8F"/>
-                </a:solidFill>
-                <a:latin typeface="Calibri"/>
-              </a:rPr>
-              <a:t>●  </a:t>
-            </a:r>
-            <a:r>
-              <a:rPr sz="1900" b="0">
-                <a:solidFill>
-                  <a:srgbClr val="3A3A3A"/>
-                </a:solidFill>
-                <a:latin typeface="Calibri"/>
-              </a:rPr>
-              <a:t>Impacto ambiental: testnet PoS de bajo consumo (Ethereum Sepolia).</a:t>
+              <a:rPr sz="1600" b="0">
+                <a:solidFill>
+                  <a:srgbClr val="2E2E2E"/>
+                </a:solidFill>
+                <a:latin typeface="Calibri"/>
+              </a:rPr>
+              <a:t>Impacto ambiental: testnet PoS de bajo consumo energético (Ethereum Sepolia).</a:t>
             </a:r>
           </a:p>
         </p:txBody>
@@ -5445,17 +8504,18 @@
         <p:spPr>
           <a:xfrm>
             <a:off x="0" y="0"/>
-            <a:ext cx="12191695" cy="1143000"/>
+            <a:ext cx="256032" cy="6858000"/>
           </a:xfrm>
           <a:prstGeom prst="rect">
             <a:avLst/>
           </a:prstGeom>
           <a:solidFill>
-            <a:srgbClr val="0F3D5C"/>
+            <a:srgbClr val="149E8F"/>
           </a:solidFill>
           <a:ln>
             <a:noFill/>
           </a:ln>
+          <a:effectLst/>
         </p:spPr>
         <p:style>
           <a:lnRef idx="1">
@@ -5481,14 +8541,58 @@
       </p:sp>
       <p:sp>
         <p:nvSpPr>
-          <p:cNvPr id="3" name="TextBox 2"/>
+          <p:cNvPr id="3" name="Rectangle 2"/>
+          <p:cNvSpPr/>
+          <p:nvPr/>
+        </p:nvSpPr>
+        <p:spPr>
+          <a:xfrm>
+            <a:off x="640080" y="566928"/>
+            <a:ext cx="146304" cy="566928"/>
+          </a:xfrm>
+          <a:prstGeom prst="rect">
+            <a:avLst/>
+          </a:prstGeom>
+          <a:solidFill>
+            <a:srgbClr val="149E8F"/>
+          </a:solidFill>
+          <a:ln>
+            <a:noFill/>
+          </a:ln>
+          <a:effectLst/>
+        </p:spPr>
+        <p:style>
+          <a:lnRef idx="1">
+            <a:schemeClr val="accent1"/>
+          </a:lnRef>
+          <a:fillRef idx="3">
+            <a:schemeClr val="accent1"/>
+          </a:fillRef>
+          <a:effectRef idx="2">
+            <a:schemeClr val="accent1"/>
+          </a:effectRef>
+          <a:fontRef idx="minor">
+            <a:schemeClr val="lt1"/>
+          </a:fontRef>
+        </p:style>
+        <p:txBody>
+          <a:bodyPr rtlCol="0" anchor="ctr"/>
+          <a:lstStyle/>
+          <a:p>
+            <a:pPr algn="ctr"/>
+          </a:p>
+        </p:txBody>
+      </p:sp>
+      <p:sp>
+        <p:nvSpPr>
+          <p:cNvPr id="4" name="TextBox 3"/>
           <p:cNvSpPr txBox="1"/>
           <p:nvPr/>
         </p:nvSpPr>
         <p:spPr>
           <a:xfrm>
-            <a:off x="640080" y="256032"/>
-            <a:ext cx="10058400" cy="822960"/>
+            <a:off x="914400" y="457200"/>
+            <a:ext cx="10607040" cy="868680"/>
           </a:xfrm>
           <a:prstGeom prst="rect">
             <a:avLst/>
@@ -5496,34 +8600,38 @@
           <a:noFill/>
         </p:spPr>
         <p:txBody>
-          <a:bodyPr wrap="square">
+          <a:bodyPr wrap="square" anchor="t">
             <a:spAutoFit/>
           </a:bodyPr>
           <a:lstStyle/>
           <a:p>
-            <a:pPr algn="l"/>
-            <a:r>
-              <a:rPr sz="3200" b="1">
-                <a:solidFill>
-                  <a:srgbClr val="FFFFFF"/>
-                </a:solidFill>
-                <a:latin typeface="Calibri"/>
-              </a:rPr>
-              <a:t>Viabilidad y sostenibilidad</a:t>
-            </a:r>
-          </a:p>
-        </p:txBody>
-      </p:sp>
-      <p:sp>
-        <p:nvSpPr>
-          <p:cNvPr id="4" name="TextBox 3"/>
+            <a:pPr algn="l">
+              <a:spcAft>
+                <a:spcPts val="1000"/>
+              </a:spcAft>
+            </a:pPr>
+            <a:r>
+              <a:rPr sz="3000" b="1">
+                <a:solidFill>
+                  <a:srgbClr val="0F3D5C"/>
+                </a:solidFill>
+                <a:latin typeface="Calibri"/>
+              </a:rPr>
+              <a:t>Viabilidad, sostenibilidad y equipo</a:t>
+            </a:r>
+          </a:p>
+        </p:txBody>
+      </p:sp>
+      <p:sp>
+        <p:nvSpPr>
+          <p:cNvPr id="5" name="TextBox 4"/>
           <p:cNvSpPr txBox="1"/>
           <p:nvPr/>
         </p:nvSpPr>
         <p:spPr>
           <a:xfrm>
-            <a:off x="11338560" y="6309360"/>
-            <a:ext cx="731520" cy="457200"/>
+            <a:off x="914400" y="1298448"/>
+            <a:ext cx="10789920" cy="457200"/>
           </a:xfrm>
           <a:prstGeom prst="rect">
             <a:avLst/>
@@ -5531,34 +8639,38 @@
           <a:noFill/>
         </p:spPr>
         <p:txBody>
-          <a:bodyPr wrap="square">
+          <a:bodyPr wrap="square" anchor="t">
             <a:spAutoFit/>
           </a:bodyPr>
           <a:lstStyle/>
           <a:p>
-            <a:pPr algn="r"/>
-            <a:r>
-              <a:rPr sz="1200" b="0">
+            <a:pPr algn="l">
+              <a:spcAft>
+                <a:spcPts val="1000"/>
+              </a:spcAft>
+            </a:pPr>
+            <a:r>
+              <a:rPr sz="1600" b="0">
                 <a:solidFill>
                   <a:srgbClr val="6B6B6B"/>
                 </a:solidFill>
                 <a:latin typeface="Calibri"/>
               </a:rPr>
-              <a:t>9</a:t>
-            </a:r>
-          </a:p>
-        </p:txBody>
-      </p:sp>
-      <p:sp>
-        <p:nvSpPr>
-          <p:cNvPr id="5" name="TextBox 4"/>
+              <a:t>Cómo se sostiene y cómo trabajamos</a:t>
+            </a:r>
+          </a:p>
+        </p:txBody>
+      </p:sp>
+      <p:sp>
+        <p:nvSpPr>
+          <p:cNvPr id="6" name="TextBox 5"/>
           <p:cNvSpPr txBox="1"/>
           <p:nvPr/>
         </p:nvSpPr>
         <p:spPr>
           <a:xfrm>
-            <a:off x="731520" y="1554480"/>
-            <a:ext cx="10698480" cy="4754880"/>
+            <a:off x="640080" y="6400800"/>
+            <a:ext cx="7315200" cy="365760"/>
           </a:xfrm>
           <a:prstGeom prst="rect">
             <a:avLst/>
@@ -5566,7 +8678,7 @@
           <a:noFill/>
         </p:spPr>
         <p:txBody>
-          <a:bodyPr wrap="square">
+          <a:bodyPr wrap="square" anchor="t">
             <a:spAutoFit/>
           </a:bodyPr>
           <a:lstStyle/>
@@ -5577,8 +8689,102 @@
               </a:spcAft>
             </a:pPr>
             <a:r>
+              <a:rPr sz="1000" b="0">
+                <a:solidFill>
+                  <a:srgbClr val="C9D6DE"/>
+                </a:solidFill>
+                <a:latin typeface="Calibri"/>
+              </a:rPr>
+              <a:t>VeriBeca · Asignación transparente de becas</a:t>
+            </a:r>
+          </a:p>
+        </p:txBody>
+      </p:sp>
+      <p:sp>
+        <p:nvSpPr>
+          <p:cNvPr id="7" name="TextBox 6"/>
+          <p:cNvSpPr txBox="1"/>
+          <p:nvPr/>
+        </p:nvSpPr>
+        <p:spPr>
+          <a:xfrm>
+            <a:off x="11247120" y="6400800"/>
+            <a:ext cx="731520" cy="365760"/>
+          </a:xfrm>
+          <a:prstGeom prst="rect">
+            <a:avLst/>
+          </a:prstGeom>
+          <a:noFill/>
+        </p:spPr>
+        <p:txBody>
+          <a:bodyPr wrap="square" anchor="t">
+            <a:spAutoFit/>
+          </a:bodyPr>
+          <a:lstStyle/>
+          <a:p>
+            <a:pPr algn="r">
+              <a:spcAft>
+                <a:spcPts val="1000"/>
+              </a:spcAft>
+            </a:pPr>
+            <a:r>
+              <a:rPr sz="1100" b="1">
+                <a:solidFill>
+                  <a:srgbClr val="6B6B6B"/>
+                </a:solidFill>
+                <a:latin typeface="Calibri"/>
+              </a:rPr>
+              <a:t>9</a:t>
+            </a:r>
+          </a:p>
+        </p:txBody>
+      </p:sp>
+      <p:sp>
+        <p:nvSpPr>
+          <p:cNvPr id="8" name="TextBox 7"/>
+          <p:cNvSpPr txBox="1"/>
+          <p:nvPr/>
+        </p:nvSpPr>
+        <p:spPr>
+          <a:xfrm>
+            <a:off x="914400" y="1965960"/>
+            <a:ext cx="6126480" cy="4206240"/>
+          </a:xfrm>
+          <a:prstGeom prst="rect">
+            <a:avLst/>
+          </a:prstGeom>
+          <a:noFill/>
+        </p:spPr>
+        <p:txBody>
+          <a:bodyPr wrap="square" anchor="t">
+            <a:spAutoFit/>
+          </a:bodyPr>
+          <a:lstStyle/>
+          <a:p>
+            <a:pPr algn="l">
+              <a:spcAft>
+                <a:spcPts val="800"/>
+              </a:spcAft>
+            </a:pPr>
+            <a:r>
               <a:rPr sz="1800" b="1">
                 <a:solidFill>
+                  <a:srgbClr val="0E6F64"/>
+                </a:solidFill>
+                <a:latin typeface="Calibri"/>
+              </a:rPr>
+              <a:t>Viabilidad</a:t>
+            </a:r>
+          </a:p>
+          <a:p>
+            <a:pPr algn="l">
+              <a:spcAft>
+                <a:spcPts val="1000"/>
+              </a:spcAft>
+            </a:pPr>
+            <a:r>
+              <a:rPr sz="1300" b="1">
+                <a:solidFill>
                   <a:srgbClr val="149E8F"/>
                 </a:solidFill>
                 <a:latin typeface="Calibri"/>
@@ -5586,13 +8792,13 @@
               <a:t>●  </a:t>
             </a:r>
             <a:r>
-              <a:rPr sz="1900" b="0">
-                <a:solidFill>
-                  <a:srgbClr val="3A3A3A"/>
-                </a:solidFill>
-                <a:latin typeface="Calibri"/>
-              </a:rPr>
-              <a:t>Técnica: MVP funcionando end-to-end, 27 pruebas automáticas, tx real en testnet.</a:t>
+              <a:rPr sz="1500" b="0">
+                <a:solidFill>
+                  <a:srgbClr val="2E2E2E"/>
+                </a:solidFill>
+                <a:latin typeface="Calibri"/>
+              </a:rPr>
+              <a:t>Técnica: MVP funcionando end-to-end, con tests y tx real en testnet.</a:t>
             </a:r>
           </a:p>
           <a:p>
@@ -5602,8 +8808,74 @@
               </a:spcAft>
             </a:pPr>
             <a:r>
+              <a:rPr sz="1300" b="1">
+                <a:solidFill>
+                  <a:srgbClr val="149E8F"/>
+                </a:solidFill>
+                <a:latin typeface="Calibri"/>
+              </a:rPr>
+              <a:t>●  </a:t>
+            </a:r>
+            <a:r>
+              <a:rPr sz="1500" b="0">
+                <a:solidFill>
+                  <a:srgbClr val="2E2E2E"/>
+                </a:solidFill>
+                <a:latin typeface="Calibri"/>
+              </a:rPr>
+              <a:t>Económica: modelo SaaS por institución; costos bajos.</a:t>
+            </a:r>
+          </a:p>
+          <a:p>
+            <a:pPr algn="l">
+              <a:spcAft>
+                <a:spcPts val="1000"/>
+              </a:spcAft>
+            </a:pPr>
+            <a:r>
+              <a:rPr sz="1300" b="1">
+                <a:solidFill>
+                  <a:srgbClr val="149E8F"/>
+                </a:solidFill>
+                <a:latin typeface="Calibri"/>
+              </a:rPr>
+              <a:t>●  </a:t>
+            </a:r>
+            <a:r>
+              <a:rPr sz="1500" b="0">
+                <a:solidFill>
+                  <a:srgbClr val="2E2E2E"/>
+                </a:solidFill>
+                <a:latin typeface="Calibri"/>
+              </a:rPr>
+              <a:t>Operativa: la institución solo escribe reglas y carga postulantes.</a:t>
+            </a:r>
+          </a:p>
+          <a:p>
+            <a:pPr algn="l">
+              <a:spcAft>
+                <a:spcPts val="800"/>
+              </a:spcAft>
+            </a:pPr>
+            <a:r>
               <a:rPr sz="1800" b="1">
                 <a:solidFill>
+                  <a:srgbClr val="0E6F64"/>
+                </a:solidFill>
+                <a:latin typeface="Calibri"/>
+              </a:rPr>
+              <a:t>Sostenibilidad</a:t>
+            </a:r>
+          </a:p>
+          <a:p>
+            <a:pPr algn="l">
+              <a:spcAft>
+                <a:spcPts val="1000"/>
+              </a:spcAft>
+            </a:pPr>
+            <a:r>
+              <a:rPr sz="1300" b="1">
+                <a:solidFill>
                   <a:srgbClr val="149E8F"/>
                 </a:solidFill>
                 <a:latin typeface="Calibri"/>
@@ -5611,13 +8883,13 @@
               <a:t>●  </a:t>
             </a:r>
             <a:r>
-              <a:rPr sz="1900" b="0">
-                <a:solidFill>
-                  <a:srgbClr val="3A3A3A"/>
-                </a:solidFill>
-                <a:latin typeface="Calibri"/>
-              </a:rPr>
-              <a:t>Económica: modelo SaaS por institución; costos bajos.</a:t>
+              <a:rPr sz="1500" b="0">
+                <a:solidFill>
+                  <a:srgbClr val="2E2E2E"/>
+                </a:solidFill>
+                <a:latin typeface="Calibri"/>
+              </a:rPr>
+              <a:t>Suscripción + servicios de implementación.</a:t>
             </a:r>
           </a:p>
           <a:p>
@@ -5627,7 +8899,7 @@
               </a:spcAft>
             </a:pPr>
             <a:r>
-              <a:rPr sz="1800" b="1">
+              <a:rPr sz="1300" b="1">
                 <a:solidFill>
                   <a:srgbClr val="149E8F"/>
                 </a:solidFill>
@@ -5636,13 +8908,189 @@
               <a:t>●  </a:t>
             </a:r>
             <a:r>
-              <a:rPr sz="1900" b="0">
-                <a:solidFill>
-                  <a:srgbClr val="3A3A3A"/>
-                </a:solidFill>
-                <a:latin typeface="Calibri"/>
-              </a:rPr>
-              <a:t>Aliados: bienestar universitario, municipios, fundaciones de transparencia.</a:t>
+              <a:rPr sz="1500" b="0">
+                <a:solidFill>
+                  <a:srgbClr val="2E2E2E"/>
+                </a:solidFill>
+                <a:latin typeface="Calibri"/>
+              </a:rPr>
+              <a:t>Aliados: bienestar universitario, municipios, ONGs, fundaciones.</a:t>
+            </a:r>
+          </a:p>
+        </p:txBody>
+      </p:sp>
+      <p:sp>
+        <p:nvSpPr>
+          <p:cNvPr id="9" name="Rounded Rectangle 8"/>
+          <p:cNvSpPr/>
+          <p:nvPr/>
+        </p:nvSpPr>
+        <p:spPr>
+          <a:xfrm>
+            <a:off x="7406640" y="1965960"/>
+            <a:ext cx="4023360" cy="4114800"/>
+          </a:xfrm>
+          <a:prstGeom prst="roundRect">
+            <a:avLst/>
+          </a:prstGeom>
+          <a:solidFill>
+            <a:srgbClr val="F3F6F9"/>
+          </a:solidFill>
+          <a:ln w="19050">
+            <a:solidFill>
+              <a:srgbClr val="165A86"/>
+            </a:solidFill>
+          </a:ln>
+          <a:effectLst/>
+        </p:spPr>
+        <p:style>
+          <a:lnRef idx="1">
+            <a:schemeClr val="accent1"/>
+          </a:lnRef>
+          <a:fillRef idx="3">
+            <a:schemeClr val="accent1"/>
+          </a:fillRef>
+          <a:effectRef idx="2">
+            <a:schemeClr val="accent1"/>
+          </a:effectRef>
+          <a:fontRef idx="minor">
+            <a:schemeClr val="lt1"/>
+          </a:fontRef>
+        </p:style>
+        <p:txBody>
+          <a:bodyPr rtlCol="0" anchor="ctr"/>
+          <a:lstStyle/>
+          <a:p>
+            <a:pPr algn="ctr"/>
+          </a:p>
+        </p:txBody>
+      </p:sp>
+      <p:sp>
+        <p:nvSpPr>
+          <p:cNvPr id="10" name="TextBox 9"/>
+          <p:cNvSpPr txBox="1"/>
+          <p:nvPr/>
+        </p:nvSpPr>
+        <p:spPr>
+          <a:xfrm>
+            <a:off x="7680960" y="2240280"/>
+            <a:ext cx="3520440" cy="3657600"/>
+          </a:xfrm>
+          <a:prstGeom prst="rect">
+            <a:avLst/>
+          </a:prstGeom>
+          <a:noFill/>
+        </p:spPr>
+        <p:txBody>
+          <a:bodyPr wrap="square" anchor="t">
+            <a:spAutoFit/>
+          </a:bodyPr>
+          <a:lstStyle/>
+          <a:p>
+            <a:pPr algn="l">
+              <a:spcAft>
+                <a:spcPts val="1200"/>
+              </a:spcAft>
+            </a:pPr>
+            <a:r>
+              <a:rPr sz="1700" b="1">
+                <a:solidFill>
+                  <a:srgbClr val="0F3D5C"/>
+                </a:solidFill>
+                <a:latin typeface="Calibri"/>
+              </a:rPr>
+              <a:t>Equipo (3 integrantes)</a:t>
+            </a:r>
+          </a:p>
+          <a:p>
+            <a:pPr algn="l">
+              <a:spcAft>
+                <a:spcPts val="1000"/>
+              </a:spcAft>
+            </a:pPr>
+            <a:r>
+              <a:rPr sz="1400" b="1">
+                <a:solidFill>
+                  <a:srgbClr val="149E8F"/>
+                </a:solidFill>
+                <a:latin typeface="Calibri"/>
+              </a:rPr>
+              <a:t>▸ </a:t>
+            </a:r>
+            <a:r>
+              <a:rPr sz="1400" b="0">
+                <a:solidFill>
+                  <a:srgbClr val="2E2E2E"/>
+                </a:solidFill>
+                <a:latin typeface="Calibri"/>
+              </a:rPr>
+              <a:t>Lenguajes, compiladores y tipos (DSL)</a:t>
+            </a:r>
+          </a:p>
+          <a:p>
+            <a:pPr algn="l">
+              <a:spcAft>
+                <a:spcPts val="1000"/>
+              </a:spcAft>
+            </a:pPr>
+            <a:r>
+              <a:rPr sz="1400" b="1">
+                <a:solidFill>
+                  <a:srgbClr val="149E8F"/>
+                </a:solidFill>
+                <a:latin typeface="Calibri"/>
+              </a:rPr>
+              <a:t>▸ </a:t>
+            </a:r>
+            <a:r>
+              <a:rPr sz="1400" b="0">
+                <a:solidFill>
+                  <a:srgbClr val="2E2E2E"/>
+                </a:solidFill>
+                <a:latin typeface="Calibri"/>
+              </a:rPr>
+              <a:t>IA y backend</a:t>
+            </a:r>
+          </a:p>
+          <a:p>
+            <a:pPr algn="l">
+              <a:spcAft>
+                <a:spcPts val="1000"/>
+              </a:spcAft>
+            </a:pPr>
+            <a:r>
+              <a:rPr sz="1400" b="1">
+                <a:solidFill>
+                  <a:srgbClr val="149E8F"/>
+                </a:solidFill>
+                <a:latin typeface="Calibri"/>
+              </a:rPr>
+              <a:t>▸ </a:t>
+            </a:r>
+            <a:r>
+              <a:rPr sz="1400" b="0">
+                <a:solidFill>
+                  <a:srgbClr val="2E2E2E"/>
+                </a:solidFill>
+                <a:latin typeface="Calibri"/>
+              </a:rPr>
+              <a:t>Blockchain, frontend y documentación</a:t>
+            </a:r>
+          </a:p>
+          <a:p>
+            <a:pPr algn="l">
+              <a:spcAft>
+                <a:spcPts val="1000"/>
+              </a:spcAft>
+            </a:pPr>
+            <a:r>
+              <a:rPr sz="1300" b="0">
+                <a:solidFill>
+                  <a:srgbClr val="6B6B6B"/>
+                </a:solidFill>
+                <a:latin typeface="Calibri"/>
+              </a:rPr>
+              <a:t>Metodología ágil: backlog por épicas, módulos en paralelo, commits frecuentes.</a:t>
             </a:r>
           </a:p>
         </p:txBody>

--- a/docs/VeriBeca-Pitch.pptx
+++ b/docs/VeriBeca-Pitch.pptx
@@ -5,18 +5,18 @@
     <p:sldMasterId id="2147483648" r:id="rId1"/>
   </p:sldMasterIdLst>
   <p:sldIdLst>
-    <p:sldId id="256" r:id="rId7"/>
-    <p:sldId id="257" r:id="rId8"/>
-    <p:sldId id="258" r:id="rId9"/>
-    <p:sldId id="259" r:id="rId10"/>
-    <p:sldId id="260" r:id="rId11"/>
-    <p:sldId id="261" r:id="rId12"/>
-    <p:sldId id="262" r:id="rId13"/>
-    <p:sldId id="263" r:id="rId14"/>
-    <p:sldId id="264" r:id="rId15"/>
-    <p:sldId id="265" r:id="rId16"/>
+    <p:sldId id="256" r:id="rId2"/>
+    <p:sldId id="257" r:id="rId3"/>
+    <p:sldId id="258" r:id="rId4"/>
+    <p:sldId id="259" r:id="rId5"/>
+    <p:sldId id="260" r:id="rId6"/>
+    <p:sldId id="261" r:id="rId7"/>
+    <p:sldId id="262" r:id="rId8"/>
+    <p:sldId id="263" r:id="rId9"/>
+    <p:sldId id="264" r:id="rId10"/>
+    <p:sldId id="265" r:id="rId11"/>
   </p:sldIdLst>
-  <p:sldSz cx="12191695" cy="6858000" type="screen4x3"/>
+  <p:sldSz cx="12192000" cy="6858000"/>
   <p:notesSz cx="6858000" cy="9144000"/>
   <p:defaultTextStyle>
     <a:defPPr>
@@ -113,6 +113,22 @@
       </a:defRPr>
     </a:lvl9pPr>
   </p:defaultTextStyle>
+  <p:extLst>
+    <p:ext uri="{EFAFB233-063F-42B5-8137-9DF3F51BA10A}">
+      <p15:sldGuideLst xmlns:p15="http://schemas.microsoft.com/office/powerpoint/2012/main">
+        <p15:guide id="1" orient="horz" pos="2160">
+          <p15:clr>
+            <a:srgbClr val="A4A3A4"/>
+          </p15:clr>
+        </p15:guide>
+        <p15:guide id="2" pos="2880">
+          <p15:clr>
+            <a:srgbClr val="A4A3A4"/>
+          </p15:clr>
+        </p15:guide>
+      </p15:sldGuideLst>
+    </p:ext>
+  </p:extLst>
 </p:presentation>
 </file>
 
@@ -154,10 +170,9 @@
           <a:lstStyle/>
           <a:p>
             <a:r>
-              <a:rPr lang="en-US" smtClean="0"/>
+              <a:rPr lang="en-US"/>
               <a:t>Click to edit Master title style</a:t>
             </a:r>
-            <a:endParaRPr lang="en-US"/>
           </a:p>
         </p:txBody>
       </p:sp>
@@ -273,10 +288,9 @@
           </a:lstStyle>
           <a:p>
             <a:r>
-              <a:rPr lang="en-US" smtClean="0"/>
+              <a:rPr lang="en-US"/>
               <a:t>Click to edit Master subtitle style</a:t>
             </a:r>
-            <a:endParaRPr lang="en-US"/>
           </a:p>
         </p:txBody>
       </p:sp>
@@ -297,7 +311,7 @@
           <a:p>
             <a:fld id="{5BCAD085-E8A6-8845-BD4E-CB4CCA059FC4}" type="datetimeFigureOut">
               <a:rPr lang="en-US" smtClean="0"/>
-              <a:t>1/27/13</a:t>
+              <a:t>6/17/2026</a:t>
             </a:fld>
             <a:endParaRPr lang="en-US"/>
           </a:p>
@@ -339,7 +353,7 @@
           <a:p>
             <a:fld id="{C1FF6DA9-008F-8B48-92A6-B652298478BF}" type="slidenum">
               <a:rPr lang="en-US" smtClean="0"/>
-              <a:t>‹#›</a:t>
+              <a:t>‹Nº›</a:t>
             </a:fld>
             <a:endParaRPr lang="en-US"/>
           </a:p>
@@ -391,10 +405,9 @@
           <a:lstStyle/>
           <a:p>
             <a:r>
-              <a:rPr lang="en-US" smtClean="0"/>
+              <a:rPr lang="en-US"/>
               <a:t>Click to edit Master title style</a:t>
             </a:r>
-            <a:endParaRPr lang="en-US"/>
           </a:p>
         </p:txBody>
       </p:sp>
@@ -415,38 +428,37 @@
           <a:p>
             <a:pPr lvl="0"/>
             <a:r>
-              <a:rPr lang="en-US" smtClean="0"/>
+              <a:rPr lang="en-US"/>
               <a:t>Click to edit Master text styles</a:t>
             </a:r>
           </a:p>
           <a:p>
             <a:pPr lvl="1"/>
             <a:r>
-              <a:rPr lang="en-US" smtClean="0"/>
+              <a:rPr lang="en-US"/>
               <a:t>Second level</a:t>
             </a:r>
           </a:p>
           <a:p>
             <a:pPr lvl="2"/>
             <a:r>
-              <a:rPr lang="en-US" smtClean="0"/>
+              <a:rPr lang="en-US"/>
               <a:t>Third level</a:t>
             </a:r>
           </a:p>
           <a:p>
             <a:pPr lvl="3"/>
             <a:r>
-              <a:rPr lang="en-US" smtClean="0"/>
+              <a:rPr lang="en-US"/>
               <a:t>Fourth level</a:t>
             </a:r>
           </a:p>
           <a:p>
             <a:pPr lvl="4"/>
             <a:r>
-              <a:rPr lang="en-US" smtClean="0"/>
+              <a:rPr lang="en-US"/>
               <a:t>Fifth level</a:t>
             </a:r>
-            <a:endParaRPr lang="en-US"/>
           </a:p>
         </p:txBody>
       </p:sp>
@@ -467,7 +479,7 @@
           <a:p>
             <a:fld id="{5BCAD085-E8A6-8845-BD4E-CB4CCA059FC4}" type="datetimeFigureOut">
               <a:rPr lang="en-US" smtClean="0"/>
-              <a:t>1/27/13</a:t>
+              <a:t>6/17/2026</a:t>
             </a:fld>
             <a:endParaRPr lang="en-US"/>
           </a:p>
@@ -509,7 +521,7 @@
           <a:p>
             <a:fld id="{C1FF6DA9-008F-8B48-92A6-B652298478BF}" type="slidenum">
               <a:rPr lang="en-US" smtClean="0"/>
-              <a:t>‹#›</a:t>
+              <a:t>‹Nº›</a:t>
             </a:fld>
             <a:endParaRPr lang="en-US"/>
           </a:p>
@@ -566,10 +578,9 @@
           <a:lstStyle/>
           <a:p>
             <a:r>
-              <a:rPr lang="en-US" smtClean="0"/>
+              <a:rPr lang="en-US"/>
               <a:t>Click to edit Master title style</a:t>
             </a:r>
-            <a:endParaRPr lang="en-US"/>
           </a:p>
         </p:txBody>
       </p:sp>
@@ -595,38 +606,37 @@
           <a:p>
             <a:pPr lvl="0"/>
             <a:r>
-              <a:rPr lang="en-US" smtClean="0"/>
+              <a:rPr lang="en-US"/>
               <a:t>Click to edit Master text styles</a:t>
             </a:r>
           </a:p>
           <a:p>
             <a:pPr lvl="1"/>
             <a:r>
-              <a:rPr lang="en-US" smtClean="0"/>
+              <a:rPr lang="en-US"/>
               <a:t>Second level</a:t>
             </a:r>
           </a:p>
           <a:p>
             <a:pPr lvl="2"/>
             <a:r>
-              <a:rPr lang="en-US" smtClean="0"/>
+              <a:rPr lang="en-US"/>
               <a:t>Third level</a:t>
             </a:r>
           </a:p>
           <a:p>
             <a:pPr lvl="3"/>
             <a:r>
-              <a:rPr lang="en-US" smtClean="0"/>
+              <a:rPr lang="en-US"/>
               <a:t>Fourth level</a:t>
             </a:r>
           </a:p>
           <a:p>
             <a:pPr lvl="4"/>
             <a:r>
-              <a:rPr lang="en-US" smtClean="0"/>
+              <a:rPr lang="en-US"/>
               <a:t>Fifth level</a:t>
             </a:r>
-            <a:endParaRPr lang="en-US"/>
           </a:p>
         </p:txBody>
       </p:sp>
@@ -647,7 +657,7 @@
           <a:p>
             <a:fld id="{5BCAD085-E8A6-8845-BD4E-CB4CCA059FC4}" type="datetimeFigureOut">
               <a:rPr lang="en-US" smtClean="0"/>
-              <a:t>1/27/13</a:t>
+              <a:t>6/17/2026</a:t>
             </a:fld>
             <a:endParaRPr lang="en-US"/>
           </a:p>
@@ -689,7 +699,7 @@
           <a:p>
             <a:fld id="{C1FF6DA9-008F-8B48-92A6-B652298478BF}" type="slidenum">
               <a:rPr lang="en-US" smtClean="0"/>
-              <a:t>‹#›</a:t>
+              <a:t>‹Nº›</a:t>
             </a:fld>
             <a:endParaRPr lang="en-US"/>
           </a:p>
@@ -741,10 +751,9 @@
           <a:lstStyle/>
           <a:p>
             <a:r>
-              <a:rPr lang="en-US" smtClean="0"/>
+              <a:rPr lang="en-US"/>
               <a:t>Click to edit Master title style</a:t>
             </a:r>
-            <a:endParaRPr lang="en-US"/>
           </a:p>
         </p:txBody>
       </p:sp>
@@ -765,38 +774,37 @@
           <a:p>
             <a:pPr lvl="0"/>
             <a:r>
-              <a:rPr lang="en-US" smtClean="0"/>
+              <a:rPr lang="en-US"/>
               <a:t>Click to edit Master text styles</a:t>
             </a:r>
           </a:p>
           <a:p>
             <a:pPr lvl="1"/>
             <a:r>
-              <a:rPr lang="en-US" smtClean="0"/>
+              <a:rPr lang="en-US"/>
               <a:t>Second level</a:t>
             </a:r>
           </a:p>
           <a:p>
             <a:pPr lvl="2"/>
             <a:r>
-              <a:rPr lang="en-US" smtClean="0"/>
+              <a:rPr lang="en-US"/>
               <a:t>Third level</a:t>
             </a:r>
           </a:p>
           <a:p>
             <a:pPr lvl="3"/>
             <a:r>
-              <a:rPr lang="en-US" smtClean="0"/>
+              <a:rPr lang="en-US"/>
               <a:t>Fourth level</a:t>
             </a:r>
           </a:p>
           <a:p>
             <a:pPr lvl="4"/>
             <a:r>
-              <a:rPr lang="en-US" smtClean="0"/>
+              <a:rPr lang="en-US"/>
               <a:t>Fifth level</a:t>
             </a:r>
-            <a:endParaRPr lang="en-US"/>
           </a:p>
         </p:txBody>
       </p:sp>
@@ -817,7 +825,7 @@
           <a:p>
             <a:fld id="{5BCAD085-E8A6-8845-BD4E-CB4CCA059FC4}" type="datetimeFigureOut">
               <a:rPr lang="en-US" smtClean="0"/>
-              <a:t>1/27/13</a:t>
+              <a:t>6/17/2026</a:t>
             </a:fld>
             <a:endParaRPr lang="en-US"/>
           </a:p>
@@ -859,7 +867,7 @@
           <a:p>
             <a:fld id="{C1FF6DA9-008F-8B48-92A6-B652298478BF}" type="slidenum">
               <a:rPr lang="en-US" smtClean="0"/>
-              <a:t>‹#›</a:t>
+              <a:t>‹Nº›</a:t>
             </a:fld>
             <a:endParaRPr lang="en-US"/>
           </a:p>
@@ -920,10 +928,9 @@
           </a:lstStyle>
           <a:p>
             <a:r>
-              <a:rPr lang="en-US" smtClean="0"/>
+              <a:rPr lang="en-US"/>
               <a:t>Click to edit Master title style</a:t>
             </a:r>
-            <a:endParaRPr lang="en-US"/>
           </a:p>
         </p:txBody>
       </p:sp>
@@ -1040,7 +1047,7 @@
           <a:p>
             <a:pPr lvl="0"/>
             <a:r>
-              <a:rPr lang="en-US" smtClean="0"/>
+              <a:rPr lang="en-US"/>
               <a:t>Click to edit Master text styles</a:t>
             </a:r>
           </a:p>
@@ -1063,7 +1070,7 @@
           <a:p>
             <a:fld id="{5BCAD085-E8A6-8845-BD4E-CB4CCA059FC4}" type="datetimeFigureOut">
               <a:rPr lang="en-US" smtClean="0"/>
-              <a:t>1/27/13</a:t>
+              <a:t>6/17/2026</a:t>
             </a:fld>
             <a:endParaRPr lang="en-US"/>
           </a:p>
@@ -1105,7 +1112,7 @@
           <a:p>
             <a:fld id="{C1FF6DA9-008F-8B48-92A6-B652298478BF}" type="slidenum">
               <a:rPr lang="en-US" smtClean="0"/>
-              <a:t>‹#›</a:t>
+              <a:t>‹Nº›</a:t>
             </a:fld>
             <a:endParaRPr lang="en-US"/>
           </a:p>
@@ -1157,10 +1164,9 @@
           <a:lstStyle/>
           <a:p>
             <a:r>
-              <a:rPr lang="en-US" smtClean="0"/>
+              <a:rPr lang="en-US"/>
               <a:t>Click to edit Master title style</a:t>
             </a:r>
-            <a:endParaRPr lang="en-US"/>
           </a:p>
         </p:txBody>
       </p:sp>
@@ -1214,38 +1220,37 @@
           <a:p>
             <a:pPr lvl="0"/>
             <a:r>
-              <a:rPr lang="en-US" smtClean="0"/>
+              <a:rPr lang="en-US"/>
               <a:t>Click to edit Master text styles</a:t>
             </a:r>
           </a:p>
           <a:p>
             <a:pPr lvl="1"/>
             <a:r>
-              <a:rPr lang="en-US" smtClean="0"/>
+              <a:rPr lang="en-US"/>
               <a:t>Second level</a:t>
             </a:r>
           </a:p>
           <a:p>
             <a:pPr lvl="2"/>
             <a:r>
-              <a:rPr lang="en-US" smtClean="0"/>
+              <a:rPr lang="en-US"/>
               <a:t>Third level</a:t>
             </a:r>
           </a:p>
           <a:p>
             <a:pPr lvl="3"/>
             <a:r>
-              <a:rPr lang="en-US" smtClean="0"/>
+              <a:rPr lang="en-US"/>
               <a:t>Fourth level</a:t>
             </a:r>
           </a:p>
           <a:p>
             <a:pPr lvl="4"/>
             <a:r>
-              <a:rPr lang="en-US" smtClean="0"/>
+              <a:rPr lang="en-US"/>
               <a:t>Fifth level</a:t>
             </a:r>
-            <a:endParaRPr lang="en-US"/>
           </a:p>
         </p:txBody>
       </p:sp>
@@ -1299,38 +1304,37 @@
           <a:p>
             <a:pPr lvl="0"/>
             <a:r>
-              <a:rPr lang="en-US" smtClean="0"/>
+              <a:rPr lang="en-US"/>
               <a:t>Click to edit Master text styles</a:t>
             </a:r>
           </a:p>
           <a:p>
             <a:pPr lvl="1"/>
             <a:r>
-              <a:rPr lang="en-US" smtClean="0"/>
+              <a:rPr lang="en-US"/>
               <a:t>Second level</a:t>
             </a:r>
           </a:p>
           <a:p>
             <a:pPr lvl="2"/>
             <a:r>
-              <a:rPr lang="en-US" smtClean="0"/>
+              <a:rPr lang="en-US"/>
               <a:t>Third level</a:t>
             </a:r>
           </a:p>
           <a:p>
             <a:pPr lvl="3"/>
             <a:r>
-              <a:rPr lang="en-US" smtClean="0"/>
+              <a:rPr lang="en-US"/>
               <a:t>Fourth level</a:t>
             </a:r>
           </a:p>
           <a:p>
             <a:pPr lvl="4"/>
             <a:r>
-              <a:rPr lang="en-US" smtClean="0"/>
+              <a:rPr lang="en-US"/>
               <a:t>Fifth level</a:t>
             </a:r>
-            <a:endParaRPr lang="en-US"/>
           </a:p>
         </p:txBody>
       </p:sp>
@@ -1351,7 +1355,7 @@
           <a:p>
             <a:fld id="{5BCAD085-E8A6-8845-BD4E-CB4CCA059FC4}" type="datetimeFigureOut">
               <a:rPr lang="en-US" smtClean="0"/>
-              <a:t>1/27/13</a:t>
+              <a:t>6/17/2026</a:t>
             </a:fld>
             <a:endParaRPr lang="en-US"/>
           </a:p>
@@ -1393,7 +1397,7 @@
           <a:p>
             <a:fld id="{C1FF6DA9-008F-8B48-92A6-B652298478BF}" type="slidenum">
               <a:rPr lang="en-US" smtClean="0"/>
-              <a:t>‹#›</a:t>
+              <a:t>‹Nº›</a:t>
             </a:fld>
             <a:endParaRPr lang="en-US"/>
           </a:p>
@@ -1449,10 +1453,9 @@
           </a:lstStyle>
           <a:p>
             <a:r>
-              <a:rPr lang="en-US" smtClean="0"/>
+              <a:rPr lang="en-US"/>
               <a:t>Click to edit Master title style</a:t>
             </a:r>
-            <a:endParaRPr lang="en-US"/>
           </a:p>
         </p:txBody>
       </p:sp>
@@ -1515,7 +1518,7 @@
           <a:p>
             <a:pPr lvl="0"/>
             <a:r>
-              <a:rPr lang="en-US" smtClean="0"/>
+              <a:rPr lang="en-US"/>
               <a:t>Click to edit Master text styles</a:t>
             </a:r>
           </a:p>
@@ -1571,38 +1574,37 @@
           <a:p>
             <a:pPr lvl="0"/>
             <a:r>
-              <a:rPr lang="en-US" smtClean="0"/>
+              <a:rPr lang="en-US"/>
               <a:t>Click to edit Master text styles</a:t>
             </a:r>
           </a:p>
           <a:p>
             <a:pPr lvl="1"/>
             <a:r>
-              <a:rPr lang="en-US" smtClean="0"/>
+              <a:rPr lang="en-US"/>
               <a:t>Second level</a:t>
             </a:r>
           </a:p>
           <a:p>
             <a:pPr lvl="2"/>
             <a:r>
-              <a:rPr lang="en-US" smtClean="0"/>
+              <a:rPr lang="en-US"/>
               <a:t>Third level</a:t>
             </a:r>
           </a:p>
           <a:p>
             <a:pPr lvl="3"/>
             <a:r>
-              <a:rPr lang="en-US" smtClean="0"/>
+              <a:rPr lang="en-US"/>
               <a:t>Fourth level</a:t>
             </a:r>
           </a:p>
           <a:p>
             <a:pPr lvl="4"/>
             <a:r>
-              <a:rPr lang="en-US" smtClean="0"/>
+              <a:rPr lang="en-US"/>
               <a:t>Fifth level</a:t>
             </a:r>
-            <a:endParaRPr lang="en-US"/>
           </a:p>
         </p:txBody>
       </p:sp>
@@ -1665,7 +1667,7 @@
           <a:p>
             <a:pPr lvl="0"/>
             <a:r>
-              <a:rPr lang="en-US" smtClean="0"/>
+              <a:rPr lang="en-US"/>
               <a:t>Click to edit Master text styles</a:t>
             </a:r>
           </a:p>
@@ -1721,38 +1723,37 @@
           <a:p>
             <a:pPr lvl="0"/>
             <a:r>
-              <a:rPr lang="en-US" smtClean="0"/>
+              <a:rPr lang="en-US"/>
               <a:t>Click to edit Master text styles</a:t>
             </a:r>
           </a:p>
           <a:p>
             <a:pPr lvl="1"/>
             <a:r>
-              <a:rPr lang="en-US" smtClean="0"/>
+              <a:rPr lang="en-US"/>
               <a:t>Second level</a:t>
             </a:r>
           </a:p>
           <a:p>
             <a:pPr lvl="2"/>
             <a:r>
-              <a:rPr lang="en-US" smtClean="0"/>
+              <a:rPr lang="en-US"/>
               <a:t>Third level</a:t>
             </a:r>
           </a:p>
           <a:p>
             <a:pPr lvl="3"/>
             <a:r>
-              <a:rPr lang="en-US" smtClean="0"/>
+              <a:rPr lang="en-US"/>
               <a:t>Fourth level</a:t>
             </a:r>
           </a:p>
           <a:p>
             <a:pPr lvl="4"/>
             <a:r>
-              <a:rPr lang="en-US" smtClean="0"/>
+              <a:rPr lang="en-US"/>
               <a:t>Fifth level</a:t>
             </a:r>
-            <a:endParaRPr lang="en-US"/>
           </a:p>
         </p:txBody>
       </p:sp>
@@ -1773,7 +1774,7 @@
           <a:p>
             <a:fld id="{5BCAD085-E8A6-8845-BD4E-CB4CCA059FC4}" type="datetimeFigureOut">
               <a:rPr lang="en-US" smtClean="0"/>
-              <a:t>1/27/13</a:t>
+              <a:t>6/17/2026</a:t>
             </a:fld>
             <a:endParaRPr lang="en-US"/>
           </a:p>
@@ -1815,7 +1816,7 @@
           <a:p>
             <a:fld id="{C1FF6DA9-008F-8B48-92A6-B652298478BF}" type="slidenum">
               <a:rPr lang="en-US" smtClean="0"/>
-              <a:t>‹#›</a:t>
+              <a:t>‹Nº›</a:t>
             </a:fld>
             <a:endParaRPr lang="en-US"/>
           </a:p>
@@ -1867,10 +1868,9 @@
           <a:lstStyle/>
           <a:p>
             <a:r>
-              <a:rPr lang="en-US" smtClean="0"/>
+              <a:rPr lang="en-US"/>
               <a:t>Click to edit Master title style</a:t>
             </a:r>
-            <a:endParaRPr lang="en-US"/>
           </a:p>
         </p:txBody>
       </p:sp>
@@ -1891,7 +1891,7 @@
           <a:p>
             <a:fld id="{5BCAD085-E8A6-8845-BD4E-CB4CCA059FC4}" type="datetimeFigureOut">
               <a:rPr lang="en-US" smtClean="0"/>
-              <a:t>1/27/13</a:t>
+              <a:t>6/17/2026</a:t>
             </a:fld>
             <a:endParaRPr lang="en-US"/>
           </a:p>
@@ -1933,7 +1933,7 @@
           <a:p>
             <a:fld id="{C1FF6DA9-008F-8B48-92A6-B652298478BF}" type="slidenum">
               <a:rPr lang="en-US" smtClean="0"/>
-              <a:t>‹#›</a:t>
+              <a:t>‹Nº›</a:t>
             </a:fld>
             <a:endParaRPr lang="en-US"/>
           </a:p>
@@ -1986,7 +1986,7 @@
           <a:p>
             <a:fld id="{5BCAD085-E8A6-8845-BD4E-CB4CCA059FC4}" type="datetimeFigureOut">
               <a:rPr lang="en-US" smtClean="0"/>
-              <a:t>1/27/13</a:t>
+              <a:t>6/17/2026</a:t>
             </a:fld>
             <a:endParaRPr lang="en-US"/>
           </a:p>
@@ -2028,7 +2028,7 @@
           <a:p>
             <a:fld id="{C1FF6DA9-008F-8B48-92A6-B652298478BF}" type="slidenum">
               <a:rPr lang="en-US" smtClean="0"/>
-              <a:t>‹#›</a:t>
+              <a:t>‹Nº›</a:t>
             </a:fld>
             <a:endParaRPr lang="en-US"/>
           </a:p>
@@ -2089,10 +2089,9 @@
           </a:lstStyle>
           <a:p>
             <a:r>
-              <a:rPr lang="en-US" smtClean="0"/>
+              <a:rPr lang="en-US"/>
               <a:t>Click to edit Master title style</a:t>
             </a:r>
-            <a:endParaRPr lang="en-US"/>
           </a:p>
         </p:txBody>
       </p:sp>
@@ -2146,38 +2145,37 @@
           <a:p>
             <a:pPr lvl="0"/>
             <a:r>
-              <a:rPr lang="en-US" smtClean="0"/>
+              <a:rPr lang="en-US"/>
               <a:t>Click to edit Master text styles</a:t>
             </a:r>
           </a:p>
           <a:p>
             <a:pPr lvl="1"/>
             <a:r>
-              <a:rPr lang="en-US" smtClean="0"/>
+              <a:rPr lang="en-US"/>
               <a:t>Second level</a:t>
             </a:r>
           </a:p>
           <a:p>
             <a:pPr lvl="2"/>
             <a:r>
-              <a:rPr lang="en-US" smtClean="0"/>
+              <a:rPr lang="en-US"/>
               <a:t>Third level</a:t>
             </a:r>
           </a:p>
           <a:p>
             <a:pPr lvl="3"/>
             <a:r>
-              <a:rPr lang="en-US" smtClean="0"/>
+              <a:rPr lang="en-US"/>
               <a:t>Fourth level</a:t>
             </a:r>
           </a:p>
           <a:p>
             <a:pPr lvl="4"/>
             <a:r>
-              <a:rPr lang="en-US" smtClean="0"/>
+              <a:rPr lang="en-US"/>
               <a:t>Fifth level</a:t>
             </a:r>
-            <a:endParaRPr lang="en-US"/>
           </a:p>
         </p:txBody>
       </p:sp>
@@ -2240,7 +2238,7 @@
           <a:p>
             <a:pPr lvl="0"/>
             <a:r>
-              <a:rPr lang="en-US" smtClean="0"/>
+              <a:rPr lang="en-US"/>
               <a:t>Click to edit Master text styles</a:t>
             </a:r>
           </a:p>
@@ -2263,7 +2261,7 @@
           <a:p>
             <a:fld id="{5BCAD085-E8A6-8845-BD4E-CB4CCA059FC4}" type="datetimeFigureOut">
               <a:rPr lang="en-US" smtClean="0"/>
-              <a:t>1/27/13</a:t>
+              <a:t>6/17/2026</a:t>
             </a:fld>
             <a:endParaRPr lang="en-US"/>
           </a:p>
@@ -2305,7 +2303,7 @@
           <a:p>
             <a:fld id="{C1FF6DA9-008F-8B48-92A6-B652298478BF}" type="slidenum">
               <a:rPr lang="en-US" smtClean="0"/>
-              <a:t>‹#›</a:t>
+              <a:t>‹Nº›</a:t>
             </a:fld>
             <a:endParaRPr lang="en-US"/>
           </a:p>
@@ -2366,10 +2364,9 @@
           </a:lstStyle>
           <a:p>
             <a:r>
-              <a:rPr lang="en-US" smtClean="0"/>
+              <a:rPr lang="en-US"/>
               <a:t>Click to edit Master title style</a:t>
             </a:r>
-            <a:endParaRPr lang="en-US"/>
           </a:p>
         </p:txBody>
       </p:sp>
@@ -2493,7 +2490,7 @@
           <a:p>
             <a:pPr lvl="0"/>
             <a:r>
-              <a:rPr lang="en-US" smtClean="0"/>
+              <a:rPr lang="en-US"/>
               <a:t>Click to edit Master text styles</a:t>
             </a:r>
           </a:p>
@@ -2516,7 +2513,7 @@
           <a:p>
             <a:fld id="{5BCAD085-E8A6-8845-BD4E-CB4CCA059FC4}" type="datetimeFigureOut">
               <a:rPr lang="en-US" smtClean="0"/>
-              <a:t>1/27/13</a:t>
+              <a:t>6/17/2026</a:t>
             </a:fld>
             <a:endParaRPr lang="en-US"/>
           </a:p>
@@ -2558,7 +2555,7 @@
           <a:p>
             <a:fld id="{C1FF6DA9-008F-8B48-92A6-B652298478BF}" type="slidenum">
               <a:rPr lang="en-US" smtClean="0"/>
-              <a:t>‹#›</a:t>
+              <a:t>‹Nº›</a:t>
             </a:fld>
             <a:endParaRPr lang="en-US"/>
           </a:p>
@@ -2625,10 +2622,9 @@
           <a:lstStyle/>
           <a:p>
             <a:r>
-              <a:rPr lang="en-US" smtClean="0"/>
+              <a:rPr lang="en-US"/>
               <a:t>Click to edit Master title style</a:t>
             </a:r>
-            <a:endParaRPr lang="en-US"/>
           </a:p>
         </p:txBody>
       </p:sp>
@@ -2659,38 +2655,37 @@
           <a:p>
             <a:pPr lvl="0"/>
             <a:r>
-              <a:rPr lang="en-US" smtClean="0"/>
+              <a:rPr lang="en-US"/>
               <a:t>Click to edit Master text styles</a:t>
             </a:r>
           </a:p>
           <a:p>
             <a:pPr lvl="1"/>
             <a:r>
-              <a:rPr lang="en-US" smtClean="0"/>
+              <a:rPr lang="en-US"/>
               <a:t>Second level</a:t>
             </a:r>
           </a:p>
           <a:p>
             <a:pPr lvl="2"/>
             <a:r>
-              <a:rPr lang="en-US" smtClean="0"/>
+              <a:rPr lang="en-US"/>
               <a:t>Third level</a:t>
             </a:r>
           </a:p>
           <a:p>
             <a:pPr lvl="3"/>
             <a:r>
-              <a:rPr lang="en-US" smtClean="0"/>
+              <a:rPr lang="en-US"/>
               <a:t>Fourth level</a:t>
             </a:r>
           </a:p>
           <a:p>
             <a:pPr lvl="4"/>
             <a:r>
-              <a:rPr lang="en-US" smtClean="0"/>
+              <a:rPr lang="en-US"/>
               <a:t>Fifth level</a:t>
             </a:r>
-            <a:endParaRPr lang="en-US"/>
           </a:p>
         </p:txBody>
       </p:sp>
@@ -2729,7 +2724,7 @@
           <a:p>
             <a:fld id="{5BCAD085-E8A6-8845-BD4E-CB4CCA059FC4}" type="datetimeFigureOut">
               <a:rPr lang="en-US" smtClean="0"/>
-              <a:t>1/27/13</a:t>
+              <a:t>6/17/2026</a:t>
             </a:fld>
             <a:endParaRPr lang="en-US"/>
           </a:p>
@@ -2807,7 +2802,7 @@
           <a:p>
             <a:fld id="{C1FF6DA9-008F-8B48-92A6-B652298478BF}" type="slidenum">
               <a:rPr lang="en-US" smtClean="0"/>
-              <a:t>‹#›</a:t>
+              <a:t>‹Nº›</a:t>
             </a:fld>
             <a:endParaRPr lang="en-US"/>
           </a:p>
@@ -3088,7 +3083,7 @@
 </file>
 
 <file path=ppt/slides/slide1.xml><?xml version="1.0" encoding="utf-8"?>
-<p:sld xmlns:a="http://schemas.openxmlformats.org/drawingml/2006/main" xmlns:p="http://schemas.openxmlformats.org/presentationml/2006/main" xmlns:r="http://schemas.openxmlformats.org/officeDocument/2006/relationships">
+<p:sld xmlns:a="http://schemas.openxmlformats.org/drawingml/2006/main" xmlns:r="http://schemas.openxmlformats.org/officeDocument/2006/relationships" xmlns:p="http://schemas.openxmlformats.org/presentationml/2006/main">
   <p:cSld>
     <p:bg>
       <p:bgPr>
@@ -3104,7 +3099,14 @@
         <p:cNvGrpSpPr/>
         <p:nvPr/>
       </p:nvGrpSpPr>
-      <p:grpSpPr/>
+      <p:grpSpPr>
+        <a:xfrm>
+          <a:off x="0" y="0"/>
+          <a:ext cx="0" cy="0"/>
+          <a:chOff x="0" y="0"/>
+          <a:chExt cx="0" cy="0"/>
+        </a:xfrm>
+      </p:grpSpPr>
       <p:sp>
         <p:nvSpPr>
           <p:cNvPr id="2" name="Rectangle 1"/>
@@ -3146,6 +3148,7 @@
           <a:lstStyle/>
           <a:p>
             <a:pPr algn="ctr"/>
+            <a:endParaRPr/>
           </a:p>
         </p:txBody>
       </p:sp>
@@ -3190,6 +3193,7 @@
           <a:lstStyle/>
           <a:p>
             <a:pPr algn="ctr"/>
+            <a:endParaRPr/>
           </a:p>
         </p:txBody>
       </p:sp>
@@ -3374,7 +3378,7 @@
 </file>
 
 <file path=ppt/slides/slide10.xml><?xml version="1.0" encoding="utf-8"?>
-<p:sld xmlns:a="http://schemas.openxmlformats.org/drawingml/2006/main" xmlns:p="http://schemas.openxmlformats.org/presentationml/2006/main" xmlns:r="http://schemas.openxmlformats.org/officeDocument/2006/relationships">
+<p:sld xmlns:a="http://schemas.openxmlformats.org/drawingml/2006/main" xmlns:r="http://schemas.openxmlformats.org/officeDocument/2006/relationships" xmlns:p="http://schemas.openxmlformats.org/presentationml/2006/main">
   <p:cSld>
     <p:bg>
       <p:bgPr>
@@ -3390,7 +3394,14 @@
         <p:cNvGrpSpPr/>
         <p:nvPr/>
       </p:nvGrpSpPr>
-      <p:grpSpPr/>
+      <p:grpSpPr>
+        <a:xfrm>
+          <a:off x="0" y="0"/>
+          <a:ext cx="0" cy="0"/>
+          <a:chOff x="0" y="0"/>
+          <a:chExt cx="0" cy="0"/>
+        </a:xfrm>
+      </p:grpSpPr>
       <p:sp>
         <p:nvSpPr>
           <p:cNvPr id="2" name="Rectangle 1"/>
@@ -3432,6 +3443,7 @@
           <a:lstStyle/>
           <a:p>
             <a:pPr algn="ctr"/>
+            <a:endParaRPr/>
           </a:p>
         </p:txBody>
       </p:sp>
@@ -3476,6 +3488,7 @@
           <a:lstStyle/>
           <a:p>
             <a:pPr algn="ctr"/>
+            <a:endParaRPr/>
           </a:p>
         </p:txBody>
       </p:sp>
@@ -3582,7 +3595,7 @@
         <p:spPr>
           <a:xfrm>
             <a:off x="914400" y="5852160"/>
-            <a:ext cx="10332720" cy="548640"/>
+            <a:ext cx="10332720" cy="323165"/>
           </a:xfrm>
           <a:prstGeom prst="rect">
             <a:avLst/>
@@ -3601,13 +3614,13 @@
               </a:spcAft>
             </a:pPr>
             <a:r>
-              <a:rPr sz="1500" b="1">
+              <a:rPr sz="1500" b="1" dirty="0">
                 <a:solidFill>
                   <a:srgbClr val="E7FBF8"/>
                 </a:solidFill>
                 <a:latin typeface="Calibri"/>
               </a:rPr>
-              <a:t>github.com/santivicente/veribeca   ·   ¡Gracias!</a:t>
+              <a:t>¡Gracias!</a:t>
             </a:r>
           </a:p>
         </p:txBody>
@@ -3621,7 +3634,7 @@
 </file>
 
 <file path=ppt/slides/slide2.xml><?xml version="1.0" encoding="utf-8"?>
-<p:sld xmlns:a="http://schemas.openxmlformats.org/drawingml/2006/main" xmlns:p="http://schemas.openxmlformats.org/presentationml/2006/main" xmlns:r="http://schemas.openxmlformats.org/officeDocument/2006/relationships">
+<p:sld xmlns:a="http://schemas.openxmlformats.org/drawingml/2006/main" xmlns:r="http://schemas.openxmlformats.org/officeDocument/2006/relationships" xmlns:p="http://schemas.openxmlformats.org/presentationml/2006/main">
   <p:cSld>
     <p:bg>
       <p:bgPr>
@@ -3637,7 +3650,14 @@
         <p:cNvGrpSpPr/>
         <p:nvPr/>
       </p:nvGrpSpPr>
-      <p:grpSpPr/>
+      <p:grpSpPr>
+        <a:xfrm>
+          <a:off x="0" y="0"/>
+          <a:ext cx="0" cy="0"/>
+          <a:chOff x="0" y="0"/>
+          <a:chExt cx="0" cy="0"/>
+        </a:xfrm>
+      </p:grpSpPr>
       <p:sp>
         <p:nvSpPr>
           <p:cNvPr id="2" name="Rectangle 1"/>
@@ -3679,6 +3699,7 @@
           <a:lstStyle/>
           <a:p>
             <a:pPr algn="ctr"/>
+            <a:endParaRPr/>
           </a:p>
         </p:txBody>
       </p:sp>
@@ -3723,6 +3744,7 @@
           <a:lstStyle/>
           <a:p>
             <a:pPr algn="ctr"/>
+            <a:endParaRPr/>
           </a:p>
         </p:txBody>
       </p:sp>
@@ -4073,6 +4095,7 @@
           <a:lstStyle/>
           <a:p>
             <a:pPr algn="ctr"/>
+            <a:endParaRPr/>
           </a:p>
         </p:txBody>
       </p:sp>
@@ -4140,7 +4163,7 @@
 </file>
 
 <file path=ppt/slides/slide3.xml><?xml version="1.0" encoding="utf-8"?>
-<p:sld xmlns:a="http://schemas.openxmlformats.org/drawingml/2006/main" xmlns:p="http://schemas.openxmlformats.org/presentationml/2006/main" xmlns:r="http://schemas.openxmlformats.org/officeDocument/2006/relationships">
+<p:sld xmlns:a="http://schemas.openxmlformats.org/drawingml/2006/main" xmlns:r="http://schemas.openxmlformats.org/officeDocument/2006/relationships" xmlns:p="http://schemas.openxmlformats.org/presentationml/2006/main">
   <p:cSld>
     <p:bg>
       <p:bgPr>
@@ -4156,7 +4179,14 @@
         <p:cNvGrpSpPr/>
         <p:nvPr/>
       </p:nvGrpSpPr>
-      <p:grpSpPr/>
+      <p:grpSpPr>
+        <a:xfrm>
+          <a:off x="0" y="0"/>
+          <a:ext cx="0" cy="0"/>
+          <a:chOff x="0" y="0"/>
+          <a:chExt cx="0" cy="0"/>
+        </a:xfrm>
+      </p:grpSpPr>
       <p:sp>
         <p:nvSpPr>
           <p:cNvPr id="2" name="Rectangle 1"/>
@@ -4198,6 +4228,7 @@
           <a:lstStyle/>
           <a:p>
             <a:pPr algn="ctr"/>
+            <a:endParaRPr/>
           </a:p>
         </p:txBody>
       </p:sp>
@@ -4242,6 +4273,7 @@
           <a:lstStyle/>
           <a:p>
             <a:pPr algn="ctr"/>
+            <a:endParaRPr/>
           </a:p>
         </p:txBody>
       </p:sp>
@@ -4438,7 +4470,7 @@
           </a:fontRef>
         </p:style>
         <p:txBody>
-          <a:bodyPr rtlCol="0" anchor="ctr" wrap="square"/>
+          <a:bodyPr wrap="square" rtlCol="0" anchor="ctr"/>
           <a:lstStyle/>
           <a:p>
             <a:pPr algn="ctr">
@@ -4543,7 +4575,7 @@
           </a:fontRef>
         </p:style>
         <p:txBody>
-          <a:bodyPr rtlCol="0" anchor="ctr" wrap="square"/>
+          <a:bodyPr wrap="square" rtlCol="0" anchor="ctr"/>
           <a:lstStyle/>
           <a:p>
             <a:pPr algn="ctr">
@@ -4648,7 +4680,7 @@
           </a:fontRef>
         </p:style>
         <p:txBody>
-          <a:bodyPr rtlCol="0" anchor="ctr" wrap="square"/>
+          <a:bodyPr wrap="square" rtlCol="0" anchor="ctr"/>
           <a:lstStyle/>
           <a:p>
             <a:pPr algn="ctr">
@@ -4753,7 +4785,7 @@
           </a:fontRef>
         </p:style>
         <p:txBody>
-          <a:bodyPr rtlCol="0" anchor="ctr" wrap="square"/>
+          <a:bodyPr wrap="square" rtlCol="0" anchor="ctr"/>
           <a:lstStyle/>
           <a:p>
             <a:pPr algn="ctr">
@@ -4858,7 +4890,7 @@
           </a:fontRef>
         </p:style>
         <p:txBody>
-          <a:bodyPr rtlCol="0" anchor="ctr" wrap="square"/>
+          <a:bodyPr wrap="square" rtlCol="0" anchor="ctr"/>
           <a:lstStyle/>
           <a:p>
             <a:pPr algn="ctr">
@@ -4935,7 +4967,7 @@
 </file>
 
 <file path=ppt/slides/slide4.xml><?xml version="1.0" encoding="utf-8"?>
-<p:sld xmlns:a="http://schemas.openxmlformats.org/drawingml/2006/main" xmlns:p="http://schemas.openxmlformats.org/presentationml/2006/main" xmlns:r="http://schemas.openxmlformats.org/officeDocument/2006/relationships">
+<p:sld xmlns:a="http://schemas.openxmlformats.org/drawingml/2006/main" xmlns:r="http://schemas.openxmlformats.org/officeDocument/2006/relationships" xmlns:p="http://schemas.openxmlformats.org/presentationml/2006/main">
   <p:cSld>
     <p:bg>
       <p:bgPr>
@@ -4951,7 +4983,14 @@
         <p:cNvGrpSpPr/>
         <p:nvPr/>
       </p:nvGrpSpPr>
-      <p:grpSpPr/>
+      <p:grpSpPr>
+        <a:xfrm>
+          <a:off x="0" y="0"/>
+          <a:ext cx="0" cy="0"/>
+          <a:chOff x="0" y="0"/>
+          <a:chExt cx="0" cy="0"/>
+        </a:xfrm>
+      </p:grpSpPr>
       <p:sp>
         <p:nvSpPr>
           <p:cNvPr id="2" name="Rectangle 1"/>
@@ -4993,6 +5032,7 @@
           <a:lstStyle/>
           <a:p>
             <a:pPr algn="ctr"/>
+            <a:endParaRPr/>
           </a:p>
         </p:txBody>
       </p:sp>
@@ -5037,6 +5077,7 @@
           <a:lstStyle/>
           <a:p>
             <a:pPr algn="ctr"/>
+            <a:endParaRPr/>
           </a:p>
         </p:txBody>
       </p:sp>
@@ -5233,7 +5274,7 @@
           </a:fontRef>
         </p:style>
         <p:txBody>
-          <a:bodyPr rtlCol="0" anchor="ctr" wrap="square"/>
+          <a:bodyPr wrap="square" rtlCol="0" anchor="ctr"/>
           <a:lstStyle/>
           <a:p>
             <a:pPr algn="ctr">
@@ -5410,7 +5451,7 @@
 </file>
 
 <file path=ppt/slides/slide5.xml><?xml version="1.0" encoding="utf-8"?>
-<p:sld xmlns:a="http://schemas.openxmlformats.org/drawingml/2006/main" xmlns:p="http://schemas.openxmlformats.org/presentationml/2006/main" xmlns:r="http://schemas.openxmlformats.org/officeDocument/2006/relationships">
+<p:sld xmlns:a="http://schemas.openxmlformats.org/drawingml/2006/main" xmlns:r="http://schemas.openxmlformats.org/officeDocument/2006/relationships" xmlns:p="http://schemas.openxmlformats.org/presentationml/2006/main">
   <p:cSld>
     <p:bg>
       <p:bgPr>
@@ -5426,7 +5467,14 @@
         <p:cNvGrpSpPr/>
         <p:nvPr/>
       </p:nvGrpSpPr>
-      <p:grpSpPr/>
+      <p:grpSpPr>
+        <a:xfrm>
+          <a:off x="0" y="0"/>
+          <a:ext cx="0" cy="0"/>
+          <a:chOff x="0" y="0"/>
+          <a:chExt cx="0" cy="0"/>
+        </a:xfrm>
+      </p:grpSpPr>
       <p:sp>
         <p:nvSpPr>
           <p:cNvPr id="2" name="Rectangle 1"/>
@@ -5468,6 +5516,7 @@
           <a:lstStyle/>
           <a:p>
             <a:pPr algn="ctr"/>
+            <a:endParaRPr/>
           </a:p>
         </p:txBody>
       </p:sp>
@@ -5512,6 +5561,7 @@
           <a:lstStyle/>
           <a:p>
             <a:pPr algn="ctr"/>
+            <a:endParaRPr/>
           </a:p>
         </p:txBody>
       </p:sp>
@@ -5712,6 +5762,7 @@
           <a:lstStyle/>
           <a:p>
             <a:pPr algn="ctr"/>
+            <a:endParaRPr/>
           </a:p>
         </p:txBody>
       </p:sp>
@@ -5795,6 +5846,7 @@
           <a:lstStyle/>
           <a:p>
             <a:pPr algn="ctr"/>
+            <a:endParaRPr/>
           </a:p>
         </p:txBody>
       </p:sp>
@@ -5839,6 +5891,7 @@
           <a:lstStyle/>
           <a:p>
             <a:pPr algn="ctr"/>
+            <a:endParaRPr/>
           </a:p>
         </p:txBody>
       </p:sp>
@@ -5922,6 +5975,7 @@
           <a:lstStyle/>
           <a:p>
             <a:pPr algn="ctr"/>
+            <a:endParaRPr/>
           </a:p>
         </p:txBody>
       </p:sp>
@@ -5968,6 +6022,7 @@
           <a:lstStyle/>
           <a:p>
             <a:pPr algn="ctr"/>
+            <a:endParaRPr/>
           </a:p>
         </p:txBody>
       </p:sp>
@@ -6083,6 +6138,7 @@
           <a:lstStyle/>
           <a:p>
             <a:pPr algn="ctr"/>
+            <a:endParaRPr/>
           </a:p>
         </p:txBody>
       </p:sp>
@@ -6129,6 +6185,7 @@
           <a:lstStyle/>
           <a:p>
             <a:pPr algn="ctr"/>
+            <a:endParaRPr/>
           </a:p>
         </p:txBody>
       </p:sp>
@@ -6244,6 +6301,7 @@
           <a:lstStyle/>
           <a:p>
             <a:pPr algn="ctr"/>
+            <a:endParaRPr/>
           </a:p>
         </p:txBody>
       </p:sp>
@@ -6290,6 +6348,7 @@
           <a:lstStyle/>
           <a:p>
             <a:pPr algn="ctr"/>
+            <a:endParaRPr/>
           </a:p>
         </p:txBody>
       </p:sp>
@@ -6373,7 +6432,7 @@
 </file>
 
 <file path=ppt/slides/slide6.xml><?xml version="1.0" encoding="utf-8"?>
-<p:sld xmlns:a="http://schemas.openxmlformats.org/drawingml/2006/main" xmlns:p="http://schemas.openxmlformats.org/presentationml/2006/main" xmlns:r="http://schemas.openxmlformats.org/officeDocument/2006/relationships">
+<p:sld xmlns:a="http://schemas.openxmlformats.org/drawingml/2006/main" xmlns:r="http://schemas.openxmlformats.org/officeDocument/2006/relationships" xmlns:p="http://schemas.openxmlformats.org/presentationml/2006/main">
   <p:cSld>
     <p:bg>
       <p:bgPr>
@@ -6389,7 +6448,14 @@
         <p:cNvGrpSpPr/>
         <p:nvPr/>
       </p:nvGrpSpPr>
-      <p:grpSpPr/>
+      <p:grpSpPr>
+        <a:xfrm>
+          <a:off x="0" y="0"/>
+          <a:ext cx="0" cy="0"/>
+          <a:chOff x="0" y="0"/>
+          <a:chExt cx="0" cy="0"/>
+        </a:xfrm>
+      </p:grpSpPr>
       <p:sp>
         <p:nvSpPr>
           <p:cNvPr id="2" name="Rectangle 1"/>
@@ -6431,6 +6497,7 @@
           <a:lstStyle/>
           <a:p>
             <a:pPr algn="ctr"/>
+            <a:endParaRPr/>
           </a:p>
         </p:txBody>
       </p:sp>
@@ -6475,6 +6542,7 @@
           <a:lstStyle/>
           <a:p>
             <a:pPr algn="ctr"/>
+            <a:endParaRPr/>
           </a:p>
         </p:txBody>
       </p:sp>
@@ -6653,8 +6721,20 @@
                 <a:tableStyleId>{5C22544A-7EE6-4342-B048-85BDC9FD1C3A}</a:tableStyleId>
               </a:tblPr>
               <a:tblGrid>
-                <a:gridCol w="3840480"/>
-                <a:gridCol w="6492240"/>
+                <a:gridCol w="3840480">
+                  <a:extLst>
+                    <a:ext uri="{9D8B030D-6E8A-4147-A177-3AD203B41FA5}">
+                      <a16:colId xmlns:a16="http://schemas.microsoft.com/office/drawing/2014/main" val="20000"/>
+                    </a:ext>
+                  </a:extLst>
+                </a:gridCol>
+                <a:gridCol w="6492240">
+                  <a:extLst>
+                    <a:ext uri="{9D8B030D-6E8A-4147-A177-3AD203B41FA5}">
+                      <a16:colId xmlns:a16="http://schemas.microsoft.com/office/drawing/2014/main" val="20001"/>
+                    </a:ext>
+                  </a:extLst>
+                </a:gridCol>
               </a:tblGrid>
               <a:tr h="670560">
                 <a:tc>
@@ -6701,6 +6781,11 @@
                     </a:solidFill>
                   </a:tcPr>
                 </a:tc>
+                <a:extLst>
+                  <a:ext uri="{0D108BD9-81ED-4DB2-BD59-A6C34878D82A}">
+                    <a16:rowId xmlns:a16="http://schemas.microsoft.com/office/drawing/2014/main" val="10000"/>
+                  </a:ext>
+                </a:extLst>
               </a:tr>
               <a:tr h="670560">
                 <a:tc>
@@ -6747,6 +6832,11 @@
                     </a:solidFill>
                   </a:tcPr>
                 </a:tc>
+                <a:extLst>
+                  <a:ext uri="{0D108BD9-81ED-4DB2-BD59-A6C34878D82A}">
+                    <a16:rowId xmlns:a16="http://schemas.microsoft.com/office/drawing/2014/main" val="10001"/>
+                  </a:ext>
+                </a:extLst>
               </a:tr>
               <a:tr h="670560">
                 <a:tc>
@@ -6793,6 +6883,11 @@
                     </a:solidFill>
                   </a:tcPr>
                 </a:tc>
+                <a:extLst>
+                  <a:ext uri="{0D108BD9-81ED-4DB2-BD59-A6C34878D82A}">
+                    <a16:rowId xmlns:a16="http://schemas.microsoft.com/office/drawing/2014/main" val="10002"/>
+                  </a:ext>
+                </a:extLst>
               </a:tr>
               <a:tr h="670560">
                 <a:tc>
@@ -6839,6 +6934,11 @@
                     </a:solidFill>
                   </a:tcPr>
                 </a:tc>
+                <a:extLst>
+                  <a:ext uri="{0D108BD9-81ED-4DB2-BD59-A6C34878D82A}">
+                    <a16:rowId xmlns:a16="http://schemas.microsoft.com/office/drawing/2014/main" val="10003"/>
+                  </a:ext>
+                </a:extLst>
               </a:tr>
               <a:tr h="670560">
                 <a:tc>
@@ -6885,6 +6985,11 @@
                     </a:solidFill>
                   </a:tcPr>
                 </a:tc>
+                <a:extLst>
+                  <a:ext uri="{0D108BD9-81ED-4DB2-BD59-A6C34878D82A}">
+                    <a16:rowId xmlns:a16="http://schemas.microsoft.com/office/drawing/2014/main" val="10004"/>
+                  </a:ext>
+                </a:extLst>
               </a:tr>
               <a:tr h="670560">
                 <a:tc>
@@ -6931,6 +7036,11 @@
                     </a:solidFill>
                   </a:tcPr>
                 </a:tc>
+                <a:extLst>
+                  <a:ext uri="{0D108BD9-81ED-4DB2-BD59-A6C34878D82A}">
+                    <a16:rowId xmlns:a16="http://schemas.microsoft.com/office/drawing/2014/main" val="10005"/>
+                  </a:ext>
+                </a:extLst>
               </a:tr>
             </a:tbl>
           </a:graphicData>
@@ -6945,7 +7055,7 @@
 </file>
 
 <file path=ppt/slides/slide7.xml><?xml version="1.0" encoding="utf-8"?>
-<p:sld xmlns:a="http://schemas.openxmlformats.org/drawingml/2006/main" xmlns:p="http://schemas.openxmlformats.org/presentationml/2006/main" xmlns:r="http://schemas.openxmlformats.org/officeDocument/2006/relationships">
+<p:sld xmlns:a="http://schemas.openxmlformats.org/drawingml/2006/main" xmlns:r="http://schemas.openxmlformats.org/officeDocument/2006/relationships" xmlns:p="http://schemas.openxmlformats.org/presentationml/2006/main">
   <p:cSld>
     <p:bg>
       <p:bgPr>
@@ -6961,7 +7071,14 @@
         <p:cNvGrpSpPr/>
         <p:nvPr/>
       </p:nvGrpSpPr>
-      <p:grpSpPr/>
+      <p:grpSpPr>
+        <a:xfrm>
+          <a:off x="0" y="0"/>
+          <a:ext cx="0" cy="0"/>
+          <a:chOff x="0" y="0"/>
+          <a:chExt cx="0" cy="0"/>
+        </a:xfrm>
+      </p:grpSpPr>
       <p:sp>
         <p:nvSpPr>
           <p:cNvPr id="2" name="Rectangle 1"/>
@@ -7003,6 +7120,7 @@
           <a:lstStyle/>
           <a:p>
             <a:pPr algn="ctr"/>
+            <a:endParaRPr/>
           </a:p>
         </p:txBody>
       </p:sp>
@@ -7047,6 +7165,7 @@
           <a:lstStyle/>
           <a:p>
             <a:pPr algn="ctr"/>
+            <a:endParaRPr/>
           </a:p>
         </p:txBody>
       </p:sp>
@@ -7249,6 +7368,7 @@
           <a:lstStyle/>
           <a:p>
             <a:pPr algn="ctr"/>
+            <a:endParaRPr/>
           </a:p>
         </p:txBody>
       </p:sp>
@@ -7293,6 +7413,7 @@
           <a:lstStyle/>
           <a:p>
             <a:pPr algn="ctr"/>
+            <a:endParaRPr/>
           </a:p>
         </p:txBody>
       </p:sp>
@@ -7394,6 +7515,7 @@
           <a:lstStyle/>
           <a:p>
             <a:pPr algn="ctr"/>
+            <a:endParaRPr/>
           </a:p>
         </p:txBody>
       </p:sp>
@@ -7438,6 +7560,7 @@
           <a:lstStyle/>
           <a:p>
             <a:pPr algn="ctr"/>
+            <a:endParaRPr/>
           </a:p>
         </p:txBody>
       </p:sp>
@@ -7539,6 +7662,7 @@
           <a:lstStyle/>
           <a:p>
             <a:pPr algn="ctr"/>
+            <a:endParaRPr/>
           </a:p>
         </p:txBody>
       </p:sp>
@@ -7583,6 +7707,7 @@
           <a:lstStyle/>
           <a:p>
             <a:pPr algn="ctr"/>
+            <a:endParaRPr/>
           </a:p>
         </p:txBody>
       </p:sp>
@@ -7650,7 +7775,7 @@
 </file>
 
 <file path=ppt/slides/slide8.xml><?xml version="1.0" encoding="utf-8"?>
-<p:sld xmlns:a="http://schemas.openxmlformats.org/drawingml/2006/main" xmlns:p="http://schemas.openxmlformats.org/presentationml/2006/main" xmlns:r="http://schemas.openxmlformats.org/officeDocument/2006/relationships">
+<p:sld xmlns:a="http://schemas.openxmlformats.org/drawingml/2006/main" xmlns:r="http://schemas.openxmlformats.org/officeDocument/2006/relationships" xmlns:p="http://schemas.openxmlformats.org/presentationml/2006/main">
   <p:cSld>
     <p:bg>
       <p:bgPr>
@@ -7666,7 +7791,14 @@
         <p:cNvGrpSpPr/>
         <p:nvPr/>
       </p:nvGrpSpPr>
-      <p:grpSpPr/>
+      <p:grpSpPr>
+        <a:xfrm>
+          <a:off x="0" y="0"/>
+          <a:ext cx="0" cy="0"/>
+          <a:chOff x="0" y="0"/>
+          <a:chExt cx="0" cy="0"/>
+        </a:xfrm>
+      </p:grpSpPr>
       <p:sp>
         <p:nvSpPr>
           <p:cNvPr id="2" name="Rectangle 1"/>
@@ -7708,6 +7840,7 @@
           <a:lstStyle/>
           <a:p>
             <a:pPr algn="ctr"/>
+            <a:endParaRPr/>
           </a:p>
         </p:txBody>
       </p:sp>
@@ -7752,6 +7885,7 @@
           <a:lstStyle/>
           <a:p>
             <a:pPr algn="ctr"/>
+            <a:endParaRPr/>
           </a:p>
         </p:txBody>
       </p:sp>
@@ -7952,6 +8086,7 @@
           <a:lstStyle/>
           <a:p>
             <a:pPr algn="ctr"/>
+            <a:endParaRPr/>
           </a:p>
         </p:txBody>
       </p:sp>
@@ -8067,6 +8202,7 @@
           <a:lstStyle/>
           <a:p>
             <a:pPr algn="ctr"/>
+            <a:endParaRPr/>
           </a:p>
         </p:txBody>
       </p:sp>
@@ -8182,6 +8318,7 @@
           <a:lstStyle/>
           <a:p>
             <a:pPr algn="ctr"/>
+            <a:endParaRPr/>
           </a:p>
         </p:txBody>
       </p:sp>
@@ -8297,6 +8434,7 @@
           <a:lstStyle/>
           <a:p>
             <a:pPr algn="ctr"/>
+            <a:endParaRPr/>
           </a:p>
         </p:txBody>
       </p:sp>
@@ -8478,7 +8616,7 @@
 </file>
 
 <file path=ppt/slides/slide9.xml><?xml version="1.0" encoding="utf-8"?>
-<p:sld xmlns:a="http://schemas.openxmlformats.org/drawingml/2006/main" xmlns:p="http://schemas.openxmlformats.org/presentationml/2006/main" xmlns:r="http://schemas.openxmlformats.org/officeDocument/2006/relationships">
+<p:sld xmlns:a="http://schemas.openxmlformats.org/drawingml/2006/main" xmlns:r="http://schemas.openxmlformats.org/officeDocument/2006/relationships" xmlns:p="http://schemas.openxmlformats.org/presentationml/2006/main">
   <p:cSld>
     <p:bg>
       <p:bgPr>
@@ -8494,7 +8632,14 @@
         <p:cNvGrpSpPr/>
         <p:nvPr/>
       </p:nvGrpSpPr>
-      <p:grpSpPr/>
+      <p:grpSpPr>
+        <a:xfrm>
+          <a:off x="0" y="0"/>
+          <a:ext cx="0" cy="0"/>
+          <a:chOff x="0" y="0"/>
+          <a:chExt cx="0" cy="0"/>
+        </a:xfrm>
+      </p:grpSpPr>
       <p:sp>
         <p:nvSpPr>
           <p:cNvPr id="2" name="Rectangle 1"/>
@@ -8536,6 +8681,7 @@
           <a:lstStyle/>
           <a:p>
             <a:pPr algn="ctr"/>
+            <a:endParaRPr/>
           </a:p>
         </p:txBody>
       </p:sp>
@@ -8580,6 +8726,7 @@
           <a:lstStyle/>
           <a:p>
             <a:pPr algn="ctr"/>
+            <a:endParaRPr/>
           </a:p>
         </p:txBody>
       </p:sp>
@@ -8962,6 +9109,7 @@
           <a:lstStyle/>
           <a:p>
             <a:pPr algn="ctr"/>
+            <a:endParaRPr/>
           </a:p>
         </p:txBody>
       </p:sp>
